--- a/docs/제출양식/기능설명서_기획안팩트체크_작성본.pptx
+++ b/docs/제출양식/기능설명서_기획안팩트체크_작성본.pptx
@@ -11957,7 +11957,7 @@
                           </a:solidFill>
                           <a:latin typeface="+mn-lt"/>
                         </a:rPr>
-                        <a:t>https://oneshot-mvp.vercel.app/check?name=%ED%99%94%EC%B2%9C%EC%82%B0%EC%B2%9C%EC%96%B4%EC%B6%95%EC%A0%9C&amp;sido=%EA%B0%95%EC%9B%90&amp;sigungu=%ED%99%94%EC%B2%9C%EA%B5%B0&amp;n=1860000&amp;basis=period&amp;counting=personDays&amp;start=2027-01-09&amp;end=2027-01-31&amp;h1s=2025-01-11&amp;h1e=2025-02-02&amp;h2s=2026-01-10&amp;h2e=2026-02-01</a:t>
+                        <a:t>https://oneshot-mvp.vercel.app/check?name=%ED%99%94%EC%B2%9C%EC%82%B0%EC%B2%9C%EC%96%B4%EC%B6%95%EC%A0%9C&amp;sido=%EA%B0%95%EC%9B%90&amp;sigungu=%ED%99%94%EC%B2%9C%EA%B5%B0&amp;n=1860000&amp;basis=period&amp;counting=personDays&amp;pop=2.3&amp;start=2027-01-09&amp;end=2027-01-31&amp;h1s=2024-01-06&amp;h1e=2024-01-28&amp;h2s=2025-01-11&amp;h2e=2025-02-02&amp;h3s=2026-01-10&amp;h3e=2026-02-01</a:t>
                       </a:r>
                       <a:endParaRPr lang="en-US" altLang="ko-KR" sz="1800" b="0" smtClean="0">
                         <a:solidFill>

--- a/docs/제출양식/기능설명서_기획안팩트체크_작성본.pptx
+++ b/docs/제출양식/기능설명서_기획안팩트체크_작성본.pptx
@@ -2259,7 +2259,7 @@
                           </a:solidFill>
                           <a:latin typeface="+mn-lt"/>
                         </a:rPr>
-                        <a:t>[캡처 1]</a:t>
+                        <a:t/>
                       </a:r>
                       <a:endParaRPr lang="en-US" altLang="ko-KR" sz="1800" b="0">
                         <a:solidFill>
@@ -2321,16 +2321,7 @@
                   <a:txBody>
                     <a:bodyPr/>
                     <a:lstStyle/>
-                    <a:p>
-                      <a:r>
-                        <a:rPr sz="1000">
-                          <a:solidFill>
-                            <a:srgbClr val="1A1A1A"/>
-                          </a:solidFill>
-                        </a:rPr>
-                        <a:t>[캡처 2]</a:t>
-                      </a:r>
-                    </a:p>
+                    <a:p/>
                   </a:txBody>
                   <a:tcPr anchor="ctr">
                     <a:lnL w="12700" cap="flat" cmpd="sng" algn="ctr">
@@ -2384,16 +2375,7 @@
                   <a:txBody>
                     <a:bodyPr/>
                     <a:lstStyle/>
-                    <a:p>
-                      <a:r>
-                        <a:rPr sz="1000">
-                          <a:solidFill>
-                            <a:srgbClr val="1A1A1A"/>
-                          </a:solidFill>
-                        </a:rPr>
-                        <a:t>[캡처 3]</a:t>
-                      </a:r>
-                    </a:p>
+                    <a:p/>
                   </a:txBody>
                   <a:tcPr anchor="ctr">
                     <a:lnL w="12700" cap="flat" cmpd="sng" algn="ctr">
@@ -2447,16 +2429,7 @@
                   <a:txBody>
                     <a:bodyPr/>
                     <a:lstStyle/>
-                    <a:p>
-                      <a:r>
-                        <a:rPr sz="1000">
-                          <a:solidFill>
-                            <a:srgbClr val="1A1A1A"/>
-                          </a:solidFill>
-                        </a:rPr>
-                        <a:t>[캡처 4]</a:t>
-                      </a:r>
-                    </a:p>
+                    <a:p/>
                   </a:txBody>
                   <a:tcPr anchor="ctr">
                     <a:lnL w="12700" cap="flat" cmpd="sng" algn="ctr">
@@ -2848,18 +2821,10 @@
                       <a:r>
                         <a:rPr lang="ko-KR" altLang="en-US" b="1" dirty="0" smtClean="0">
                           <a:solidFill>
-                            <a:schemeClr val="bg1"/>
-                          </a:solidFill>
-                        </a:rPr>
-                        <a:t>해시태그</a:t>
-                      </a:r>
-                      <a:r>
-                        <a:rPr lang="en-US" altLang="ko-KR" b="1" dirty="0" smtClean="0">
-                          <a:solidFill>
-                            <a:schemeClr val="bg1"/>
-                          </a:solidFill>
-                        </a:rPr>
-                        <a:t>1</a:t>
+                            <a:srgbClr val="1A1A1A"/>
+                          </a:solidFill>
+                        </a:rPr>
+                        <a:t>해시태그2</a:t>
                       </a:r>
                       <a:endParaRPr lang="ko-KR" altLang="en-US" b="1" dirty="0">
                         <a:solidFill>
@@ -3019,18 +2984,10 @@
                       <a:r>
                         <a:rPr lang="ko-KR" altLang="en-US" b="1" dirty="0" err="1" smtClean="0">
                           <a:solidFill>
-                            <a:schemeClr val="bg1"/>
-                          </a:solidFill>
-                        </a:rPr>
-                        <a:t>연계기능</a:t>
-                      </a:r>
-                      <a:r>
-                        <a:rPr lang="en-US" altLang="ko-KR" b="1" dirty="0" smtClean="0">
-                          <a:solidFill>
-                            <a:schemeClr val="bg1"/>
-                          </a:solidFill>
-                        </a:rPr>
-                        <a:t>1</a:t>
+                            <a:srgbClr val="1A1A1A"/>
+                          </a:solidFill>
+                        </a:rPr>
+                        <a:t>연계기능2</a:t>
                       </a:r>
                       <a:endParaRPr lang="ko-KR" altLang="en-US" b="1" dirty="0" smtClean="0">
                         <a:solidFill>
@@ -3174,18 +3131,10 @@
                       <a:r>
                         <a:rPr lang="ko-KR" altLang="en-US" b="1" dirty="0" err="1" smtClean="0">
                           <a:solidFill>
-                            <a:schemeClr val="bg1"/>
-                          </a:solidFill>
-                        </a:rPr>
-                        <a:t>기능설명</a:t>
-                      </a:r>
-                      <a:r>
-                        <a:rPr lang="en-US" altLang="ko-KR" b="1" dirty="0" smtClean="0">
-                          <a:solidFill>
-                            <a:schemeClr val="bg1"/>
-                          </a:solidFill>
-                        </a:rPr>
-                        <a:t>1</a:t>
+                            <a:srgbClr val="1A1A1A"/>
+                          </a:solidFill>
+                        </a:rPr>
+                        <a:t>기능설명2</a:t>
                       </a:r>
                       <a:endParaRPr lang="ko-KR" altLang="en-US" b="1" dirty="0">
                         <a:solidFill>
@@ -3339,6 +3288,198 @@
           </a:graphicData>
         </a:graphic>
       </p:graphicFrame>
+      <p:pic>
+        <p:nvPicPr>
+          <p:cNvPr id="7" name="Picture 6" descr="f1_1_home.png"/>
+          <p:cNvPicPr>
+            <a:picLocks noChangeAspect="1"/>
+          </p:cNvPicPr>
+          <p:nvPr/>
+        </p:nvPicPr>
+        <p:blipFill>
+          <a:blip r:embed="rId2"/>
+          <a:stretch>
+            <a:fillRect/>
+          </a:stretch>
+        </p:blipFill>
+        <p:spPr>
+          <a:xfrm>
+            <a:off x="352952" y="3131586"/>
+            <a:ext cx="2756577" cy="2067433"/>
+          </a:xfrm>
+          <a:prstGeom prst="rect">
+            <a:avLst/>
+          </a:prstGeom>
+        </p:spPr>
+      </p:pic>
+      <p:pic>
+        <p:nvPicPr>
+          <p:cNvPr id="8" name="Picture 7" descr="f1_2_underlay.png"/>
+          <p:cNvPicPr>
+            <a:picLocks noChangeAspect="1"/>
+          </p:cNvPicPr>
+          <p:nvPr/>
+        </p:nvPicPr>
+        <p:blipFill>
+          <a:blip r:embed="rId3"/>
+          <a:stretch>
+            <a:fillRect/>
+          </a:stretch>
+        </p:blipFill>
+        <p:spPr>
+          <a:xfrm>
+            <a:off x="3606811" y="3074071"/>
+            <a:ext cx="1962012" cy="2182463"/>
+          </a:xfrm>
+          <a:prstGeom prst="rect">
+            <a:avLst/>
+          </a:prstGeom>
+        </p:spPr>
+      </p:pic>
+      <p:pic>
+        <p:nvPicPr>
+          <p:cNvPr id="9" name="Picture 8" descr="f1_3_venue.png"/>
+          <p:cNvPicPr>
+            <a:picLocks noChangeAspect="1"/>
+          </p:cNvPicPr>
+          <p:nvPr/>
+        </p:nvPicPr>
+        <p:blipFill>
+          <a:blip r:embed="rId4"/>
+          <a:stretch>
+            <a:fillRect/>
+          </a:stretch>
+        </p:blipFill>
+        <p:spPr>
+          <a:xfrm>
+            <a:off x="6066106" y="3164909"/>
+            <a:ext cx="2756577" cy="2000787"/>
+          </a:xfrm>
+          <a:prstGeom prst="rect">
+            <a:avLst/>
+          </a:prstGeom>
+        </p:spPr>
+      </p:pic>
+      <p:pic>
+        <p:nvPicPr>
+          <p:cNvPr id="10" name="Picture 9" descr="f1_4_panel.png"/>
+          <p:cNvPicPr>
+            <a:picLocks noChangeAspect="1"/>
+          </p:cNvPicPr>
+          <p:nvPr/>
+        </p:nvPicPr>
+        <p:blipFill>
+          <a:blip r:embed="rId5"/>
+          <a:stretch>
+            <a:fillRect/>
+          </a:stretch>
+        </p:blipFill>
+        <p:spPr>
+          <a:xfrm>
+            <a:off x="9822306" y="3074071"/>
+            <a:ext cx="957331" cy="2182463"/>
+          </a:xfrm>
+          <a:prstGeom prst="rect">
+            <a:avLst/>
+          </a:prstGeom>
+        </p:spPr>
+      </p:pic>
+      <p:pic>
+        <p:nvPicPr>
+          <p:cNvPr id="11" name="Picture 10" descr="f2_1_verdict.png"/>
+          <p:cNvPicPr>
+            <a:picLocks noChangeAspect="1"/>
+          </p:cNvPicPr>
+          <p:nvPr/>
+        </p:nvPicPr>
+        <p:blipFill>
+          <a:blip r:embed="rId2"/>
+          <a:stretch>
+            <a:fillRect/>
+          </a:stretch>
+        </p:blipFill>
+        <p:spPr>
+          <a:xfrm>
+            <a:off x="352952" y="3822209"/>
+            <a:ext cx="2756577" cy="686187"/>
+          </a:xfrm>
+          <a:prstGeom prst="rect">
+            <a:avLst/>
+          </a:prstGeom>
+        </p:spPr>
+      </p:pic>
+      <p:pic>
+        <p:nvPicPr>
+          <p:cNvPr id="12" name="Picture 11" descr="f2_2_stages.png"/>
+          <p:cNvPicPr>
+            <a:picLocks noChangeAspect="1"/>
+          </p:cNvPicPr>
+          <p:nvPr/>
+        </p:nvPicPr>
+        <p:blipFill>
+          <a:blip r:embed="rId3"/>
+          <a:stretch>
+            <a:fillRect/>
+          </a:stretch>
+        </p:blipFill>
+        <p:spPr>
+          <a:xfrm>
+            <a:off x="3209529" y="3485031"/>
+            <a:ext cx="2756577" cy="1360542"/>
+          </a:xfrm>
+          <a:prstGeom prst="rect">
+            <a:avLst/>
+          </a:prstGeom>
+        </p:spPr>
+      </p:pic>
+      <p:pic>
+        <p:nvPicPr>
+          <p:cNvPr id="13" name="Picture 12" descr="f2_3_range.png"/>
+          <p:cNvPicPr>
+            <a:picLocks noChangeAspect="1"/>
+          </p:cNvPicPr>
+          <p:nvPr/>
+        </p:nvPicPr>
+        <p:blipFill>
+          <a:blip r:embed="rId4"/>
+          <a:stretch>
+            <a:fillRect/>
+          </a:stretch>
+        </p:blipFill>
+        <p:spPr>
+          <a:xfrm>
+            <a:off x="6369951" y="3074071"/>
+            <a:ext cx="2148886" cy="2182463"/>
+          </a:xfrm>
+          <a:prstGeom prst="rect">
+            <a:avLst/>
+          </a:prstGeom>
+        </p:spPr>
+      </p:pic>
+      <p:pic>
+        <p:nvPicPr>
+          <p:cNvPr id="14" name="Picture 13" descr="f2_4_first.png"/>
+          <p:cNvPicPr>
+            <a:picLocks noChangeAspect="1"/>
+          </p:cNvPicPr>
+          <p:nvPr/>
+        </p:nvPicPr>
+        <p:blipFill>
+          <a:blip r:embed="rId5"/>
+          <a:stretch>
+            <a:fillRect/>
+          </a:stretch>
+        </p:blipFill>
+        <p:spPr>
+          <a:xfrm>
+            <a:off x="8922683" y="3259205"/>
+            <a:ext cx="2756577" cy="1812194"/>
+          </a:xfrm>
+          <a:prstGeom prst="rect">
+            <a:avLst/>
+          </a:prstGeom>
+        </p:spPr>
+      </p:pic>
     </p:spTree>
   </p:cSld>
   <p:clrMapOvr>
@@ -3719,7 +3860,7 @@
                           </a:solidFill>
                           <a:latin typeface="+mn-lt"/>
                         </a:rPr>
-                        <a:t>[캡처 1]</a:t>
+                        <a:t/>
                       </a:r>
                       <a:endParaRPr lang="en-US" altLang="ko-KR" sz="1800" b="0">
                         <a:solidFill>
@@ -3781,16 +3922,7 @@
                   <a:txBody>
                     <a:bodyPr/>
                     <a:lstStyle/>
-                    <a:p>
-                      <a:r>
-                        <a:rPr sz="1000">
-                          <a:solidFill>
-                            <a:srgbClr val="1A1A1A"/>
-                          </a:solidFill>
-                        </a:rPr>
-                        <a:t>[캡처 2]</a:t>
-                      </a:r>
-                    </a:p>
+                    <a:p/>
                   </a:txBody>
                   <a:tcPr anchor="ctr">
                     <a:lnL w="12700" cap="flat" cmpd="sng" algn="ctr">
@@ -3844,16 +3976,7 @@
                   <a:txBody>
                     <a:bodyPr/>
                     <a:lstStyle/>
-                    <a:p>
-                      <a:r>
-                        <a:rPr sz="1000">
-                          <a:solidFill>
-                            <a:srgbClr val="1A1A1A"/>
-                          </a:solidFill>
-                        </a:rPr>
-                        <a:t>[캡처 3]</a:t>
-                      </a:r>
-                    </a:p>
+                    <a:p/>
                   </a:txBody>
                   <a:tcPr anchor="ctr">
                     <a:lnL w="12700" cap="flat" cmpd="sng" algn="ctr">
@@ -3907,16 +4030,7 @@
                   <a:txBody>
                     <a:bodyPr/>
                     <a:lstStyle/>
-                    <a:p>
-                      <a:r>
-                        <a:rPr sz="1000">
-                          <a:solidFill>
-                            <a:srgbClr val="1A1A1A"/>
-                          </a:solidFill>
-                        </a:rPr>
-                        <a:t>[캡처 4]</a:t>
-                      </a:r>
-                    </a:p>
+                    <a:p/>
                   </a:txBody>
                   <a:tcPr anchor="ctr">
                     <a:lnL w="12700" cap="flat" cmpd="sng" algn="ctr">
@@ -4308,18 +4422,10 @@
                       <a:r>
                         <a:rPr lang="ko-KR" altLang="en-US" b="1" dirty="0" smtClean="0">
                           <a:solidFill>
-                            <a:schemeClr val="bg1"/>
-                          </a:solidFill>
-                        </a:rPr>
-                        <a:t>해시태그</a:t>
-                      </a:r>
-                      <a:r>
-                        <a:rPr lang="en-US" altLang="ko-KR" b="1" dirty="0" smtClean="0">
-                          <a:solidFill>
-                            <a:schemeClr val="bg1"/>
-                          </a:solidFill>
-                        </a:rPr>
-                        <a:t>1</a:t>
+                            <a:srgbClr val="1A1A1A"/>
+                          </a:solidFill>
+                        </a:rPr>
+                        <a:t>해시태그3</a:t>
                       </a:r>
                       <a:endParaRPr lang="ko-KR" altLang="en-US" b="1" dirty="0">
                         <a:solidFill>
@@ -4479,18 +4585,10 @@
                       <a:r>
                         <a:rPr lang="ko-KR" altLang="en-US" b="1" dirty="0" err="1" smtClean="0">
                           <a:solidFill>
-                            <a:schemeClr val="bg1"/>
-                          </a:solidFill>
-                        </a:rPr>
-                        <a:t>연계기능</a:t>
-                      </a:r>
-                      <a:r>
-                        <a:rPr lang="en-US" altLang="ko-KR" b="1" dirty="0" smtClean="0">
-                          <a:solidFill>
-                            <a:schemeClr val="bg1"/>
-                          </a:solidFill>
-                        </a:rPr>
-                        <a:t>1</a:t>
+                            <a:srgbClr val="1A1A1A"/>
+                          </a:solidFill>
+                        </a:rPr>
+                        <a:t>연계기능3</a:t>
                       </a:r>
                       <a:endParaRPr lang="ko-KR" altLang="en-US" b="1" dirty="0" smtClean="0">
                         <a:solidFill>
@@ -4634,18 +4732,10 @@
                       <a:r>
                         <a:rPr lang="ko-KR" altLang="en-US" b="1" dirty="0" err="1" smtClean="0">
                           <a:solidFill>
-                            <a:schemeClr val="bg1"/>
-                          </a:solidFill>
-                        </a:rPr>
-                        <a:t>기능설명</a:t>
-                      </a:r>
-                      <a:r>
-                        <a:rPr lang="en-US" altLang="ko-KR" b="1" dirty="0" smtClean="0">
-                          <a:solidFill>
-                            <a:schemeClr val="bg1"/>
-                          </a:solidFill>
-                        </a:rPr>
-                        <a:t>1</a:t>
+                            <a:srgbClr val="1A1A1A"/>
+                          </a:solidFill>
+                        </a:rPr>
+                        <a:t>기능설명3</a:t>
                       </a:r>
                       <a:endParaRPr lang="ko-KR" altLang="en-US" b="1" dirty="0">
                         <a:solidFill>
@@ -4799,6 +4889,198 @@
           </a:graphicData>
         </a:graphic>
       </p:graphicFrame>
+      <p:pic>
+        <p:nvPicPr>
+          <p:cNvPr id="7" name="Picture 6" descr="f1_1_home.png"/>
+          <p:cNvPicPr>
+            <a:picLocks noChangeAspect="1"/>
+          </p:cNvPicPr>
+          <p:nvPr/>
+        </p:nvPicPr>
+        <p:blipFill>
+          <a:blip r:embed="rId2"/>
+          <a:stretch>
+            <a:fillRect/>
+          </a:stretch>
+        </p:blipFill>
+        <p:spPr>
+          <a:xfrm>
+            <a:off x="352952" y="3131586"/>
+            <a:ext cx="2756577" cy="2067433"/>
+          </a:xfrm>
+          <a:prstGeom prst="rect">
+            <a:avLst/>
+          </a:prstGeom>
+        </p:spPr>
+      </p:pic>
+      <p:pic>
+        <p:nvPicPr>
+          <p:cNvPr id="8" name="Picture 7" descr="f1_2_underlay.png"/>
+          <p:cNvPicPr>
+            <a:picLocks noChangeAspect="1"/>
+          </p:cNvPicPr>
+          <p:nvPr/>
+        </p:nvPicPr>
+        <p:blipFill>
+          <a:blip r:embed="rId3"/>
+          <a:stretch>
+            <a:fillRect/>
+          </a:stretch>
+        </p:blipFill>
+        <p:spPr>
+          <a:xfrm>
+            <a:off x="3606811" y="3074071"/>
+            <a:ext cx="1962012" cy="2182463"/>
+          </a:xfrm>
+          <a:prstGeom prst="rect">
+            <a:avLst/>
+          </a:prstGeom>
+        </p:spPr>
+      </p:pic>
+      <p:pic>
+        <p:nvPicPr>
+          <p:cNvPr id="9" name="Picture 8" descr="f1_3_venue.png"/>
+          <p:cNvPicPr>
+            <a:picLocks noChangeAspect="1"/>
+          </p:cNvPicPr>
+          <p:nvPr/>
+        </p:nvPicPr>
+        <p:blipFill>
+          <a:blip r:embed="rId4"/>
+          <a:stretch>
+            <a:fillRect/>
+          </a:stretch>
+        </p:blipFill>
+        <p:spPr>
+          <a:xfrm>
+            <a:off x="6066106" y="3164909"/>
+            <a:ext cx="2756577" cy="2000787"/>
+          </a:xfrm>
+          <a:prstGeom prst="rect">
+            <a:avLst/>
+          </a:prstGeom>
+        </p:spPr>
+      </p:pic>
+      <p:pic>
+        <p:nvPicPr>
+          <p:cNvPr id="10" name="Picture 9" descr="f1_4_panel.png"/>
+          <p:cNvPicPr>
+            <a:picLocks noChangeAspect="1"/>
+          </p:cNvPicPr>
+          <p:nvPr/>
+        </p:nvPicPr>
+        <p:blipFill>
+          <a:blip r:embed="rId5"/>
+          <a:stretch>
+            <a:fillRect/>
+          </a:stretch>
+        </p:blipFill>
+        <p:spPr>
+          <a:xfrm>
+            <a:off x="9822306" y="3074071"/>
+            <a:ext cx="957331" cy="2182463"/>
+          </a:xfrm>
+          <a:prstGeom prst="rect">
+            <a:avLst/>
+          </a:prstGeom>
+        </p:spPr>
+      </p:pic>
+      <p:pic>
+        <p:nvPicPr>
+          <p:cNvPr id="11" name="Picture 10" descr="f3_1_other.png"/>
+          <p:cNvPicPr>
+            <a:picLocks noChangeAspect="1"/>
+          </p:cNvPicPr>
+          <p:nvPr/>
+        </p:nvPicPr>
+        <p:blipFill>
+          <a:blip r:embed="rId2"/>
+          <a:stretch>
+            <a:fillRect/>
+          </a:stretch>
+        </p:blipFill>
+        <p:spPr>
+          <a:xfrm>
+            <a:off x="352952" y="3514608"/>
+            <a:ext cx="2756577" cy="1301388"/>
+          </a:xfrm>
+          <a:prstGeom prst="rect">
+            <a:avLst/>
+          </a:prstGeom>
+        </p:spPr>
+      </p:pic>
+      <p:pic>
+        <p:nvPicPr>
+          <p:cNvPr id="12" name="Picture 11" descr="f3_2_budget.png"/>
+          <p:cNvPicPr>
+            <a:picLocks noChangeAspect="1"/>
+          </p:cNvPicPr>
+          <p:nvPr/>
+        </p:nvPicPr>
+        <p:blipFill>
+          <a:blip r:embed="rId3"/>
+          <a:stretch>
+            <a:fillRect/>
+          </a:stretch>
+        </p:blipFill>
+        <p:spPr>
+          <a:xfrm>
+            <a:off x="3209529" y="3239265"/>
+            <a:ext cx="2756577" cy="1852075"/>
+          </a:xfrm>
+          <a:prstGeom prst="rect">
+            <a:avLst/>
+          </a:prstGeom>
+        </p:spPr>
+      </p:pic>
+      <p:pic>
+        <p:nvPicPr>
+          <p:cNvPr id="13" name="Picture 12" descr="f3_3_attrib.png"/>
+          <p:cNvPicPr>
+            <a:picLocks noChangeAspect="1"/>
+          </p:cNvPicPr>
+          <p:nvPr/>
+        </p:nvPicPr>
+        <p:blipFill>
+          <a:blip r:embed="rId4"/>
+          <a:stretch>
+            <a:fillRect/>
+          </a:stretch>
+        </p:blipFill>
+        <p:spPr>
+          <a:xfrm>
+            <a:off x="6066106" y="3881363"/>
+            <a:ext cx="2756577" cy="567879"/>
+          </a:xfrm>
+          <a:prstGeom prst="rect">
+            <a:avLst/>
+          </a:prstGeom>
+        </p:spPr>
+      </p:pic>
+      <p:pic>
+        <p:nvPicPr>
+          <p:cNvPr id="14" name="Picture 13" descr="f3_4_report.png"/>
+          <p:cNvPicPr>
+            <a:picLocks noChangeAspect="1"/>
+          </p:cNvPicPr>
+          <p:nvPr/>
+        </p:nvPicPr>
+        <p:blipFill>
+          <a:blip r:embed="rId5"/>
+          <a:stretch>
+            <a:fillRect/>
+          </a:stretch>
+        </p:blipFill>
+        <p:spPr>
+          <a:xfrm>
+            <a:off x="9060414" y="3074071"/>
+            <a:ext cx="2481115" cy="2182463"/>
+          </a:xfrm>
+          <a:prstGeom prst="rect">
+            <a:avLst/>
+          </a:prstGeom>
+        </p:spPr>
+      </p:pic>
     </p:spTree>
   </p:cSld>
   <p:clrMapOvr>
@@ -5179,7 +5461,7 @@
                           </a:solidFill>
                           <a:latin typeface="+mn-lt"/>
                         </a:rPr>
-                        <a:t>[캡처 1]</a:t>
+                        <a:t/>
                       </a:r>
                       <a:endParaRPr lang="en-US" altLang="ko-KR" sz="1800" b="0">
                         <a:solidFill>
@@ -5241,16 +5523,7 @@
                   <a:txBody>
                     <a:bodyPr/>
                     <a:lstStyle/>
-                    <a:p>
-                      <a:r>
-                        <a:rPr sz="1000">
-                          <a:solidFill>
-                            <a:srgbClr val="1A1A1A"/>
-                          </a:solidFill>
-                        </a:rPr>
-                        <a:t>[캡처 2]</a:t>
-                      </a:r>
-                    </a:p>
+                    <a:p/>
                   </a:txBody>
                   <a:tcPr anchor="ctr">
                     <a:lnL w="12700" cap="flat" cmpd="sng" algn="ctr">
@@ -5304,16 +5577,7 @@
                   <a:txBody>
                     <a:bodyPr/>
                     <a:lstStyle/>
-                    <a:p>
-                      <a:r>
-                        <a:rPr sz="1000">
-                          <a:solidFill>
-                            <a:srgbClr val="1A1A1A"/>
-                          </a:solidFill>
-                        </a:rPr>
-                        <a:t>[캡처 3]</a:t>
-                      </a:r>
-                    </a:p>
+                    <a:p/>
                   </a:txBody>
                   <a:tcPr anchor="ctr">
                     <a:lnL w="12700" cap="flat" cmpd="sng" algn="ctr">
@@ -5367,16 +5631,7 @@
                   <a:txBody>
                     <a:bodyPr/>
                     <a:lstStyle/>
-                    <a:p>
-                      <a:r>
-                        <a:rPr sz="1000">
-                          <a:solidFill>
-                            <a:srgbClr val="1A1A1A"/>
-                          </a:solidFill>
-                        </a:rPr>
-                        <a:t>[캡처 4]</a:t>
-                      </a:r>
-                    </a:p>
+                    <a:p/>
                   </a:txBody>
                   <a:tcPr anchor="ctr">
                     <a:lnL w="12700" cap="flat" cmpd="sng" algn="ctr">
@@ -5768,18 +6023,10 @@
                       <a:r>
                         <a:rPr lang="ko-KR" altLang="en-US" b="1" dirty="0" smtClean="0">
                           <a:solidFill>
-                            <a:schemeClr val="bg1"/>
-                          </a:solidFill>
-                        </a:rPr>
-                        <a:t>해시태그</a:t>
-                      </a:r>
-                      <a:r>
-                        <a:rPr lang="en-US" altLang="ko-KR" b="1" dirty="0" smtClean="0">
-                          <a:solidFill>
-                            <a:schemeClr val="bg1"/>
-                          </a:solidFill>
-                        </a:rPr>
-                        <a:t>1</a:t>
+                            <a:srgbClr val="1A1A1A"/>
+                          </a:solidFill>
+                        </a:rPr>
+                        <a:t>해시태그4</a:t>
                       </a:r>
                       <a:endParaRPr lang="ko-KR" altLang="en-US" b="1" dirty="0">
                         <a:solidFill>
@@ -5939,18 +6186,10 @@
                       <a:r>
                         <a:rPr lang="ko-KR" altLang="en-US" b="1" dirty="0" err="1" smtClean="0">
                           <a:solidFill>
-                            <a:schemeClr val="bg1"/>
-                          </a:solidFill>
-                        </a:rPr>
-                        <a:t>연계기능</a:t>
-                      </a:r>
-                      <a:r>
-                        <a:rPr lang="en-US" altLang="ko-KR" b="1" dirty="0" smtClean="0">
-                          <a:solidFill>
-                            <a:schemeClr val="bg1"/>
-                          </a:solidFill>
-                        </a:rPr>
-                        <a:t>1</a:t>
+                            <a:srgbClr val="1A1A1A"/>
+                          </a:solidFill>
+                        </a:rPr>
+                        <a:t>연계기능4</a:t>
                       </a:r>
                       <a:endParaRPr lang="ko-KR" altLang="en-US" b="1" dirty="0" smtClean="0">
                         <a:solidFill>
@@ -6094,18 +6333,10 @@
                       <a:r>
                         <a:rPr lang="ko-KR" altLang="en-US" b="1" dirty="0" err="1" smtClean="0">
                           <a:solidFill>
-                            <a:schemeClr val="bg1"/>
-                          </a:solidFill>
-                        </a:rPr>
-                        <a:t>기능설명</a:t>
-                      </a:r>
-                      <a:r>
-                        <a:rPr lang="en-US" altLang="ko-KR" b="1" dirty="0" smtClean="0">
-                          <a:solidFill>
-                            <a:schemeClr val="bg1"/>
-                          </a:solidFill>
-                        </a:rPr>
-                        <a:t>1</a:t>
+                            <a:srgbClr val="1A1A1A"/>
+                          </a:solidFill>
+                        </a:rPr>
+                        <a:t>기능설명4</a:t>
                       </a:r>
                       <a:endParaRPr lang="ko-KR" altLang="en-US" b="1" dirty="0">
                         <a:solidFill>
@@ -6259,6 +6490,198 @@
           </a:graphicData>
         </a:graphic>
       </p:graphicFrame>
+      <p:pic>
+        <p:nvPicPr>
+          <p:cNvPr id="7" name="Picture 6" descr="f1_1_home.png"/>
+          <p:cNvPicPr>
+            <a:picLocks noChangeAspect="1"/>
+          </p:cNvPicPr>
+          <p:nvPr/>
+        </p:nvPicPr>
+        <p:blipFill>
+          <a:blip r:embed="rId2"/>
+          <a:stretch>
+            <a:fillRect/>
+          </a:stretch>
+        </p:blipFill>
+        <p:spPr>
+          <a:xfrm>
+            <a:off x="352952" y="3131586"/>
+            <a:ext cx="2756577" cy="2067433"/>
+          </a:xfrm>
+          <a:prstGeom prst="rect">
+            <a:avLst/>
+          </a:prstGeom>
+        </p:spPr>
+      </p:pic>
+      <p:pic>
+        <p:nvPicPr>
+          <p:cNvPr id="8" name="Picture 7" descr="f1_2_underlay.png"/>
+          <p:cNvPicPr>
+            <a:picLocks noChangeAspect="1"/>
+          </p:cNvPicPr>
+          <p:nvPr/>
+        </p:nvPicPr>
+        <p:blipFill>
+          <a:blip r:embed="rId3"/>
+          <a:stretch>
+            <a:fillRect/>
+          </a:stretch>
+        </p:blipFill>
+        <p:spPr>
+          <a:xfrm>
+            <a:off x="3606811" y="3074071"/>
+            <a:ext cx="1962012" cy="2182463"/>
+          </a:xfrm>
+          <a:prstGeom prst="rect">
+            <a:avLst/>
+          </a:prstGeom>
+        </p:spPr>
+      </p:pic>
+      <p:pic>
+        <p:nvPicPr>
+          <p:cNvPr id="9" name="Picture 8" descr="f1_3_venue.png"/>
+          <p:cNvPicPr>
+            <a:picLocks noChangeAspect="1"/>
+          </p:cNvPicPr>
+          <p:nvPr/>
+        </p:nvPicPr>
+        <p:blipFill>
+          <a:blip r:embed="rId4"/>
+          <a:stretch>
+            <a:fillRect/>
+          </a:stretch>
+        </p:blipFill>
+        <p:spPr>
+          <a:xfrm>
+            <a:off x="6066106" y="3164909"/>
+            <a:ext cx="2756577" cy="2000787"/>
+          </a:xfrm>
+          <a:prstGeom prst="rect">
+            <a:avLst/>
+          </a:prstGeom>
+        </p:spPr>
+      </p:pic>
+      <p:pic>
+        <p:nvPicPr>
+          <p:cNvPr id="10" name="Picture 9" descr="f1_4_panel.png"/>
+          <p:cNvPicPr>
+            <a:picLocks noChangeAspect="1"/>
+          </p:cNvPicPr>
+          <p:nvPr/>
+        </p:nvPicPr>
+        <p:blipFill>
+          <a:blip r:embed="rId5"/>
+          <a:stretch>
+            <a:fillRect/>
+          </a:stretch>
+        </p:blipFill>
+        <p:spPr>
+          <a:xfrm>
+            <a:off x="9822306" y="3074071"/>
+            <a:ext cx="957331" cy="2182463"/>
+          </a:xfrm>
+          <a:prstGeom prst="rect">
+            <a:avLst/>
+          </a:prstGeom>
+        </p:spPr>
+      </p:pic>
+      <p:pic>
+        <p:nvPicPr>
+          <p:cNvPr id="11" name="Picture 10" descr="f4_1_datause.png"/>
+          <p:cNvPicPr>
+            <a:picLocks noChangeAspect="1"/>
+          </p:cNvPicPr>
+          <p:nvPr/>
+        </p:nvPicPr>
+        <p:blipFill>
+          <a:blip r:embed="rId2"/>
+          <a:stretch>
+            <a:fillRect/>
+          </a:stretch>
+        </p:blipFill>
+        <p:spPr>
+          <a:xfrm>
+            <a:off x="352952" y="3573762"/>
+            <a:ext cx="2756577" cy="1183080"/>
+          </a:xfrm>
+          <a:prstGeom prst="rect">
+            <a:avLst/>
+          </a:prstGeom>
+        </p:spPr>
+      </p:pic>
+      <p:pic>
+        <p:nvPicPr>
+          <p:cNvPr id="12" name="Picture 11" descr="f4_2_evidence.png"/>
+          <p:cNvPicPr>
+            <a:picLocks noChangeAspect="1"/>
+          </p:cNvPicPr>
+          <p:nvPr/>
+        </p:nvPicPr>
+        <p:blipFill>
+          <a:blip r:embed="rId3"/>
+          <a:stretch>
+            <a:fillRect/>
+          </a:stretch>
+        </p:blipFill>
+        <p:spPr>
+          <a:xfrm>
+            <a:off x="3209529" y="3208157"/>
+            <a:ext cx="2756577" cy="1914290"/>
+          </a:xfrm>
+          <a:prstGeom prst="rect">
+            <a:avLst/>
+          </a:prstGeom>
+        </p:spPr>
+      </p:pic>
+      <p:pic>
+        <p:nvPicPr>
+          <p:cNvPr id="13" name="Picture 12" descr="f4_3_twins.png"/>
+          <p:cNvPicPr>
+            <a:picLocks noChangeAspect="1"/>
+          </p:cNvPicPr>
+          <p:nvPr/>
+        </p:nvPicPr>
+        <p:blipFill>
+          <a:blip r:embed="rId4"/>
+          <a:stretch>
+            <a:fillRect/>
+          </a:stretch>
+        </p:blipFill>
+        <p:spPr>
+          <a:xfrm>
+            <a:off x="6106200" y="3074071"/>
+            <a:ext cx="2676389" cy="2182463"/>
+          </a:xfrm>
+          <a:prstGeom prst="rect">
+            <a:avLst/>
+          </a:prstGeom>
+        </p:spPr>
+      </p:pic>
+      <p:pic>
+        <p:nvPicPr>
+          <p:cNvPr id="14" name="Picture 13" descr="f4_4_history.png"/>
+          <p:cNvPicPr>
+            <a:picLocks noChangeAspect="1"/>
+          </p:cNvPicPr>
+          <p:nvPr/>
+        </p:nvPicPr>
+        <p:blipFill>
+          <a:blip r:embed="rId5"/>
+          <a:stretch>
+            <a:fillRect/>
+          </a:stretch>
+        </p:blipFill>
+        <p:spPr>
+          <a:xfrm>
+            <a:off x="9709117" y="3074071"/>
+            <a:ext cx="1183708" cy="2182463"/>
+          </a:xfrm>
+          <a:prstGeom prst="rect">
+            <a:avLst/>
+          </a:prstGeom>
+        </p:spPr>
+      </p:pic>
     </p:spTree>
   </p:cSld>
   <p:clrMapOvr>
@@ -6896,7 +7319,73 @@
                           </a:solidFill>
                           <a:latin typeface="+mn-lt"/>
                         </a:rPr>
-                        <a:t>축제 기획서(PDF)를 올리면 예상 방문객·개최 기간·예산을 옮겨 적고, 그 축제가 지난 회차에 실제로 겪은 한국관광공사 KT 시군구 일별 실측(외지인 배수·순증)과 같은 자로 재서 통과/주의/과대/과소/상한 초과/근거 없음을 판정합니다. 내년 배수 구간, 1인당 예산 대조, 같은 시기 경쟁 축제 귀속 경고, 결재 첨부용 검증 보고서 A4 2장을 내고, 행사장 도면 위 보행 시뮬레이션으로 쏠림이 어디서 막히는지를 미리 봅니다. 판정·시뮬에 생성형 모델을 쓰지 않습니다.</a:t>
+                        <a:t>축제 기획서(PDF)를 올리면 예상 방문객·개최 기간·예산을 옮겨 적고, 그 축제가 지난 회차에 실제로 겪은 한국관광공사 KT 시군구 일별 실측(외지인 배수·순증)과 같은 기준으로 재서 통과/주의/과대/과소/상한 초과/근거 없음을 판정합니다. 내년 배수 구간, 1인당 예산 대조, 같은 시기 경쟁 축제 귀속 경고, 결재 첨부용 검증 보고서 A4 2장을 내고, 행사장 도면 위 보행 시뮬레이션으로 쏠림이 어디서 막히는지를 미리 봅니다. 판정·시뮬에 생성형 모델을 쓰지 않습니다.</a:t>
+                      </a:r>
+                    </a:p>
+                    <a:p>
+                      <a:pPr marL="0" marR="0" lvl="0" indent="0" algn="just" defTabSz="914400" rtl="0" eaLnBrk="1" fontAlgn="auto" latinLnBrk="1" hangingPunct="1">
+                        <a:lnSpc>
+                          <a:spcPct val="100000"/>
+                        </a:lnSpc>
+                        <a:spcBef>
+                          <a:spcPts val="0"/>
+                        </a:spcBef>
+                        <a:spcAft>
+                          <a:spcPts val="0"/>
+                        </a:spcAft>
+                        <a:buClrTx/>
+                        <a:buSzTx/>
+                        <a:buFontTx/>
+                        <a:buNone/>
+                        <a:tabLst/>
+                        <a:defRPr/>
+                      </a:pPr>
+                      <a:r>
+                        <a:rPr lang="en-US" altLang="ko-KR" sz="1200">
+                          <a:solidFill>
+                            <a:srgbClr val="1A1A1A"/>
+                          </a:solidFill>
+                          <a:latin typeface="+mn-lt"/>
+                        </a:rPr>
+                        <a:t>심사용 경로: 시연 안내 </a:t>
+                      </a:r>
+                      <a:r>
+                        <a:rPr lang="en-US" altLang="ko-KR" sz="1200">
+                          <a:solidFill>
+                            <a:srgbClr val="1A1A1A"/>
+                          </a:solidFill>
+                          <a:latin typeface="+mn-lt"/>
+                          <a:hlinkClick r:id="rId2"/>
+                        </a:rPr>
+                        <a:t>https://oneshot-mvp.vercel.app/judge-guide.pdf</a:t>
+                      </a:r>
+                      <a:r>
+                        <a:rPr lang="en-US" altLang="ko-KR" sz="1200">
+                          <a:solidFill>
+                            <a:srgbClr val="1A1A1A"/>
+                          </a:solidFill>
+                          <a:latin typeface="+mn-lt"/>
+                        </a:rPr>
+                        <a:t> · 예비 데모 기획서 </a:t>
+                      </a:r>
+                      <a:r>
+                        <a:rPr lang="en-US" altLang="ko-KR" sz="1200">
+                          <a:solidFill>
+                            <a:srgbClr val="1A1A1A"/>
+                          </a:solidFill>
+                          <a:latin typeface="+mn-lt"/>
+                          <a:hlinkClick r:id="rId3"/>
+                        </a:rPr>
+                        <a:t>https://oneshot-mvp.vercel.app/sample-plan.pdf</a:t>
+                      </a:r>
+                      <a:r>
+                        <a:rPr lang="en-US" altLang="ko-KR" sz="1200">
+                          <a:solidFill>
+                            <a:srgbClr val="1A1A1A"/>
+                          </a:solidFill>
+                          <a:latin typeface="+mn-lt"/>
+                        </a:rPr>
+                        <a:t> (첫 화면에 올리면 판정이 열립니다)</a:t>
                       </a:r>
                     </a:p>
                   </a:txBody>
@@ -10232,7 +10721,7 @@
                           </a:solidFill>
                           <a:latin typeface="+mn-lt"/>
                         </a:rPr>
-                        <a:t>[캡처 1]</a:t>
+                        <a:t/>
                       </a:r>
                       <a:endParaRPr lang="en-US" altLang="ko-KR" sz="1800" b="0">
                         <a:solidFill>
@@ -10294,16 +10783,7 @@
                   <a:txBody>
                     <a:bodyPr/>
                     <a:lstStyle/>
-                    <a:p>
-                      <a:r>
-                        <a:rPr sz="1000">
-                          <a:solidFill>
-                            <a:srgbClr val="1A1A1A"/>
-                          </a:solidFill>
-                        </a:rPr>
-                        <a:t>[캡처 2]</a:t>
-                      </a:r>
-                    </a:p>
+                    <a:p/>
                   </a:txBody>
                   <a:tcPr anchor="ctr">
                     <a:lnL w="12700" cap="flat" cmpd="sng" algn="ctr">
@@ -10357,16 +10837,7 @@
                   <a:txBody>
                     <a:bodyPr/>
                     <a:lstStyle/>
-                    <a:p>
-                      <a:r>
-                        <a:rPr sz="1000">
-                          <a:solidFill>
-                            <a:srgbClr val="1A1A1A"/>
-                          </a:solidFill>
-                        </a:rPr>
-                        <a:t>[캡처 3]</a:t>
-                      </a:r>
-                    </a:p>
+                    <a:p/>
                   </a:txBody>
                   <a:tcPr anchor="ctr">
                     <a:lnL w="12700" cap="flat" cmpd="sng" algn="ctr">
@@ -10420,16 +10891,7 @@
                   <a:txBody>
                     <a:bodyPr/>
                     <a:lstStyle/>
-                    <a:p>
-                      <a:r>
-                        <a:rPr sz="1000">
-                          <a:solidFill>
-                            <a:srgbClr val="1A1A1A"/>
-                          </a:solidFill>
-                        </a:rPr>
-                        <a:t>[캡처 4]</a:t>
-                      </a:r>
-                    </a:p>
+                    <a:p/>
                   </a:txBody>
                   <a:tcPr anchor="ctr">
                     <a:lnL w="12700" cap="flat" cmpd="sng" algn="ctr">
@@ -10646,7 +11108,7 @@
                             <a:srgbClr val="1A1A1A"/>
                           </a:solidFill>
                         </a:rPr>
-                        <a:t>③ 출입구·부스·통로를 놓고 [시뮬레이션 시작] → 최대 밀도·병목 상위·대기열</a:t>
+                        <a:t>③ 출입구·부스·통로를 놓고 [시뮬레이션 시작] → 도면 위 보행자 흐름과 밀도</a:t>
                       </a:r>
                     </a:p>
                   </a:txBody>
@@ -10709,7 +11171,7 @@
                             <a:srgbClr val="1A1A1A"/>
                           </a:solidFill>
                         </a:rPr>
-                        <a:t>④ [배수 올려 가며 재생]으로 이 배치가 버티는 상한 배수를 찾는다</a:t>
+                        <a:t>④ 오른쪽 패널: 시각·장내 인원·최대 밀도 등급, 병목 상위·대기열·출입구별 입장. [배수 올려 가며 재생]으로 상한 배수</a:t>
                       </a:r>
                     </a:p>
                   </a:txBody>
@@ -10821,18 +11283,10 @@
                       <a:r>
                         <a:rPr lang="ko-KR" altLang="en-US" b="1" dirty="0" smtClean="0">
                           <a:solidFill>
-                            <a:schemeClr val="bg1"/>
-                          </a:solidFill>
-                        </a:rPr>
-                        <a:t>해시태그</a:t>
-                      </a:r>
-                      <a:r>
-                        <a:rPr lang="en-US" altLang="ko-KR" b="1" dirty="0" smtClean="0">
-                          <a:solidFill>
-                            <a:schemeClr val="bg1"/>
-                          </a:solidFill>
-                        </a:rPr>
-                        <a:t>1</a:t>
+                            <a:srgbClr val="1A1A1A"/>
+                          </a:solidFill>
+                        </a:rPr>
+                        <a:t>해시태그1</a:t>
                       </a:r>
                       <a:endParaRPr lang="ko-KR" altLang="en-US" b="1" dirty="0">
                         <a:solidFill>
@@ -10992,18 +11446,10 @@
                       <a:r>
                         <a:rPr lang="ko-KR" altLang="en-US" b="1" dirty="0" err="1" smtClean="0">
                           <a:solidFill>
-                            <a:schemeClr val="bg1"/>
-                          </a:solidFill>
-                        </a:rPr>
-                        <a:t>연계기능</a:t>
-                      </a:r>
-                      <a:r>
-                        <a:rPr lang="en-US" altLang="ko-KR" b="1" dirty="0" smtClean="0">
-                          <a:solidFill>
-                            <a:schemeClr val="bg1"/>
-                          </a:solidFill>
-                        </a:rPr>
-                        <a:t>1</a:t>
+                            <a:srgbClr val="1A1A1A"/>
+                          </a:solidFill>
+                        </a:rPr>
+                        <a:t>연계기능1</a:t>
                       </a:r>
                       <a:endParaRPr lang="ko-KR" altLang="en-US" b="1" dirty="0" smtClean="0">
                         <a:solidFill>
@@ -11147,18 +11593,10 @@
                       <a:r>
                         <a:rPr lang="ko-KR" altLang="en-US" b="1" dirty="0" err="1" smtClean="0">
                           <a:solidFill>
-                            <a:schemeClr val="bg1"/>
-                          </a:solidFill>
-                        </a:rPr>
-                        <a:t>기능설명</a:t>
-                      </a:r>
-                      <a:r>
-                        <a:rPr lang="en-US" altLang="ko-KR" b="1" dirty="0" smtClean="0">
-                          <a:solidFill>
-                            <a:schemeClr val="bg1"/>
-                          </a:solidFill>
-                        </a:rPr>
-                        <a:t>1</a:t>
+                            <a:srgbClr val="1A1A1A"/>
+                          </a:solidFill>
+                        </a:rPr>
+                        <a:t>기능설명1</a:t>
                       </a:r>
                       <a:endParaRPr lang="ko-KR" altLang="en-US" b="1" dirty="0">
                         <a:solidFill>
@@ -11312,6 +11750,102 @@
           </a:graphicData>
         </a:graphic>
       </p:graphicFrame>
+      <p:pic>
+        <p:nvPicPr>
+          <p:cNvPr id="7" name="Picture 6" descr="f1_1_home.png"/>
+          <p:cNvPicPr>
+            <a:picLocks noChangeAspect="1"/>
+          </p:cNvPicPr>
+          <p:nvPr/>
+        </p:nvPicPr>
+        <p:blipFill>
+          <a:blip r:embed="rId2"/>
+          <a:stretch>
+            <a:fillRect/>
+          </a:stretch>
+        </p:blipFill>
+        <p:spPr>
+          <a:xfrm>
+            <a:off x="352952" y="3131586"/>
+            <a:ext cx="2756577" cy="2067433"/>
+          </a:xfrm>
+          <a:prstGeom prst="rect">
+            <a:avLst/>
+          </a:prstGeom>
+        </p:spPr>
+      </p:pic>
+      <p:pic>
+        <p:nvPicPr>
+          <p:cNvPr id="8" name="Picture 7" descr="f1_2_underlay.png"/>
+          <p:cNvPicPr>
+            <a:picLocks noChangeAspect="1"/>
+          </p:cNvPicPr>
+          <p:nvPr/>
+        </p:nvPicPr>
+        <p:blipFill>
+          <a:blip r:embed="rId3"/>
+          <a:stretch>
+            <a:fillRect/>
+          </a:stretch>
+        </p:blipFill>
+        <p:spPr>
+          <a:xfrm>
+            <a:off x="3606811" y="3074071"/>
+            <a:ext cx="1962012" cy="2182463"/>
+          </a:xfrm>
+          <a:prstGeom prst="rect">
+            <a:avLst/>
+          </a:prstGeom>
+        </p:spPr>
+      </p:pic>
+      <p:pic>
+        <p:nvPicPr>
+          <p:cNvPr id="9" name="Picture 8" descr="f1_3_venue.png"/>
+          <p:cNvPicPr>
+            <a:picLocks noChangeAspect="1"/>
+          </p:cNvPicPr>
+          <p:nvPr/>
+        </p:nvPicPr>
+        <p:blipFill>
+          <a:blip r:embed="rId4"/>
+          <a:stretch>
+            <a:fillRect/>
+          </a:stretch>
+        </p:blipFill>
+        <p:spPr>
+          <a:xfrm>
+            <a:off x="6066106" y="3164909"/>
+            <a:ext cx="2756577" cy="2000787"/>
+          </a:xfrm>
+          <a:prstGeom prst="rect">
+            <a:avLst/>
+          </a:prstGeom>
+        </p:spPr>
+      </p:pic>
+      <p:pic>
+        <p:nvPicPr>
+          <p:cNvPr id="10" name="Picture 9" descr="f1_4_panel.png"/>
+          <p:cNvPicPr>
+            <a:picLocks noChangeAspect="1"/>
+          </p:cNvPicPr>
+          <p:nvPr/>
+        </p:nvPicPr>
+        <p:blipFill>
+          <a:blip r:embed="rId5"/>
+          <a:stretch>
+            <a:fillRect/>
+          </a:stretch>
+        </p:blipFill>
+        <p:spPr>
+          <a:xfrm>
+            <a:off x="9822306" y="3074071"/>
+            <a:ext cx="957331" cy="2182463"/>
+          </a:xfrm>
+          <a:prstGeom prst="rect">
+            <a:avLst/>
+          </a:prstGeom>
+        </p:spPr>
+      </p:pic>
     </p:spTree>
     <p:extLst>
       <p:ext uri="{BB962C8B-B14F-4D97-AF65-F5344CB8AC3E}">
@@ -11532,13 +12066,13 @@
                         <a:defRPr/>
                       </a:pPr>
                       <a:r>
-                        <a:rPr lang="en-US" altLang="ko-KR" sz="1100" b="0" smtClean="0">
+                        <a:rPr lang="en-US" altLang="ko-KR" sz="1000" b="0" smtClean="0">
                           <a:solidFill>
                             <a:srgbClr val="1A1A1A"/>
                           </a:solidFill>
                           <a:latin typeface="+mn-lt"/>
                         </a:rPr>
-                        <a:t>[대표 이미지 — 판정 화면: 예상 방문객 라벨 + 3단 판정표 + 서비스명]</a:t>
+                        <a:t/>
                       </a:r>
                       <a:endParaRPr lang="en-US" altLang="ko-KR" sz="1800" b="0" smtClean="0">
                         <a:solidFill>
@@ -11695,7 +12229,7 @@
                     <a:bodyPr/>
                     <a:lstStyle/>
                     <a:p>
-                      <a:pPr marL="0" marR="0" lvl="0" indent="0" algn="l" defTabSz="914400" rtl="0" eaLnBrk="1" fontAlgn="auto" latinLnBrk="1" hangingPunct="1">
+                      <a:pPr marL="0" marR="0" lvl="0" indent="0" algn="just" defTabSz="914400" rtl="0" eaLnBrk="1" fontAlgn="auto" latinLnBrk="1" hangingPunct="1">
                         <a:lnSpc>
                           <a:spcPct val="100000"/>
                         </a:lnSpc>
@@ -11713,251 +12247,13 @@
                         <a:defRPr/>
                       </a:pPr>
                       <a:r>
-                        <a:rPr lang="en-US" altLang="ko-KR" sz="900" b="0" smtClean="0">
+                        <a:rPr lang="en-US" altLang="ko-KR" sz="1000" b="0" smtClean="0">
                           <a:solidFill>
                             <a:srgbClr val="1A1A1A"/>
                           </a:solidFill>
                           <a:latin typeface="+mn-lt"/>
                         </a:rPr>
-                        <a:t>[상세 이미지 4장 — ① 첫 화면(기획서 PDF 올리기) ② 판정 화면(판정문·3단 표·공사 데이터 표) ③ 실측 근거(연도별 곡선) ④ 시뮬레이션(도면 위 보행자·병목)]</a:t>
-                      </a:r>
-                      <a:endParaRPr lang="en-US" altLang="ko-KR" sz="1800" b="0" smtClean="0">
-                        <a:solidFill>
-                          <a:srgbClr val="FF0000"/>
-                        </a:solidFill>
-                        <a:latin typeface="+mn-lt"/>
-                      </a:endParaRPr>
-                    </a:p>
-                    <a:p>
-                      <a:pPr marL="0" marR="0" lvl="0" indent="0" algn="l" defTabSz="914400" rtl="0" eaLnBrk="1" fontAlgn="auto" latinLnBrk="1" hangingPunct="1">
-                        <a:lnSpc>
-                          <a:spcPct val="100000"/>
-                        </a:lnSpc>
-                        <a:spcBef>
-                          <a:spcPts val="0"/>
-                        </a:spcBef>
-                        <a:spcAft>
-                          <a:spcPts val="0"/>
-                        </a:spcAft>
-                        <a:buClrTx/>
-                        <a:buSzTx/>
-                        <a:buFontTx/>
-                        <a:buNone/>
-                        <a:tabLst/>
-                        <a:defRPr/>
-                      </a:pPr>
-                      <a:r>
-                        <a:rPr lang="en-US" altLang="ko-KR" sz="900" b="0" smtClean="0">
-                          <a:solidFill>
-                            <a:srgbClr val="1A1A1A"/>
-                          </a:solidFill>
-                          <a:latin typeface="+mn-lt"/>
-                        </a:rPr>
-                        <a:t>심사용 접속 경로 — 서비스 https://oneshot-mvp.vercel.app (로그인 없음)</a:t>
-                      </a:r>
-                      <a:endParaRPr lang="en-US" altLang="ko-KR" sz="1800" b="0" smtClean="0">
-                        <a:solidFill>
-                          <a:srgbClr val="FF0000"/>
-                        </a:solidFill>
-                        <a:latin typeface="+mn-lt"/>
-                      </a:endParaRPr>
-                    </a:p>
-                    <a:p>
-                      <a:pPr marL="0" marR="0" lvl="0" indent="0" algn="l" defTabSz="914400" rtl="0" eaLnBrk="1" fontAlgn="auto" latinLnBrk="1" hangingPunct="1">
-                        <a:lnSpc>
-                          <a:spcPct val="100000"/>
-                        </a:lnSpc>
-                        <a:spcBef>
-                          <a:spcPts val="0"/>
-                        </a:spcBef>
-                        <a:spcAft>
-                          <a:spcPts val="0"/>
-                        </a:spcAft>
-                        <a:buClrTx/>
-                        <a:buSzTx/>
-                        <a:buFontTx/>
-                        <a:buNone/>
-                        <a:tabLst/>
-                        <a:defRPr/>
-                      </a:pPr>
-                      <a:r>
-                        <a:rPr lang="en-US" altLang="ko-KR" sz="900" b="0" smtClean="0">
-                          <a:solidFill>
-                            <a:srgbClr val="1A1A1A"/>
-                          </a:solidFill>
-                          <a:latin typeface="+mn-lt"/>
-                        </a:rPr>
-                        <a:t>예비 데모 기획서 https://oneshot-mvp.vercel.app/sample-plan.pdf · 기획안 양식 https://oneshot-mvp.vercel.app/plan-form.pdf · 심사위원 시연 안내 https://oneshot-mvp.vercel.app/judge-guide.pdf</a:t>
-                      </a:r>
-                      <a:endParaRPr lang="en-US" altLang="ko-KR" sz="1800" b="0" smtClean="0">
-                        <a:solidFill>
-                          <a:srgbClr val="FF0000"/>
-                        </a:solidFill>
-                        <a:latin typeface="+mn-lt"/>
-                      </a:endParaRPr>
-                    </a:p>
-                    <a:p>
-                      <a:pPr marL="0" marR="0" lvl="0" indent="0" algn="l" defTabSz="914400" rtl="0" eaLnBrk="1" fontAlgn="auto" latinLnBrk="1" hangingPunct="1">
-                        <a:lnSpc>
-                          <a:spcPct val="100000"/>
-                        </a:lnSpc>
-                        <a:spcBef>
-                          <a:spcPts val="0"/>
-                        </a:spcBef>
-                        <a:spcAft>
-                          <a:spcPts val="0"/>
-                        </a:spcAft>
-                        <a:buClrTx/>
-                        <a:buSzTx/>
-                        <a:buFontTx/>
-                        <a:buNone/>
-                        <a:tabLst/>
-                        <a:defRPr/>
-                      </a:pPr>
-                      <a:r>
-                        <a:rPr lang="en-US" altLang="ko-KR" sz="900" b="0" smtClean="0">
-                          <a:solidFill>
-                            <a:srgbClr val="1A1A1A"/>
-                          </a:solidFill>
-                          <a:latin typeface="+mn-lt"/>
-                        </a:rPr>
-                        <a:t>완성 판정 화면(PDF 없이 바로 들어가는 주소)</a:t>
-                      </a:r>
-                      <a:endParaRPr lang="en-US" altLang="ko-KR" sz="1800" b="0" smtClean="0">
-                        <a:solidFill>
-                          <a:srgbClr val="FF0000"/>
-                        </a:solidFill>
-                        <a:latin typeface="+mn-lt"/>
-                      </a:endParaRPr>
-                    </a:p>
-                    <a:p>
-                      <a:pPr marL="0" marR="0" lvl="0" indent="0" algn="l" defTabSz="914400" rtl="0" eaLnBrk="1" fontAlgn="auto" latinLnBrk="1" hangingPunct="1">
-                        <a:lnSpc>
-                          <a:spcPct val="100000"/>
-                        </a:lnSpc>
-                        <a:spcBef>
-                          <a:spcPts val="0"/>
-                        </a:spcBef>
-                        <a:spcAft>
-                          <a:spcPts val="0"/>
-                        </a:spcAft>
-                        <a:buClrTx/>
-                        <a:buSzTx/>
-                        <a:buFontTx/>
-                        <a:buNone/>
-                        <a:tabLst/>
-                        <a:defRPr/>
-                      </a:pPr>
-                      <a:r>
-                        <a:rPr lang="en-US" altLang="ko-KR" sz="900" b="0" smtClean="0">
-                          <a:solidFill>
-                            <a:srgbClr val="1A1A1A"/>
-                          </a:solidFill>
-                          <a:latin typeface="+mn-lt"/>
-                        </a:rPr>
-                        <a:t>· 군포철쭉축제 2027 → 주의</a:t>
-                      </a:r>
-                      <a:endParaRPr lang="en-US" altLang="ko-KR" sz="1800" b="0" smtClean="0">
-                        <a:solidFill>
-                          <a:srgbClr val="FF0000"/>
-                        </a:solidFill>
-                        <a:latin typeface="+mn-lt"/>
-                      </a:endParaRPr>
-                    </a:p>
-                    <a:p>
-                      <a:pPr marL="0" marR="0" lvl="0" indent="0" algn="l" defTabSz="914400" rtl="0" eaLnBrk="1" fontAlgn="auto" latinLnBrk="1" hangingPunct="1">
-                        <a:lnSpc>
-                          <a:spcPct val="100000"/>
-                        </a:lnSpc>
-                        <a:spcBef>
-                          <a:spcPts val="0"/>
-                        </a:spcBef>
-                        <a:spcAft>
-                          <a:spcPts val="0"/>
-                        </a:spcAft>
-                        <a:buClrTx/>
-                        <a:buSzTx/>
-                        <a:buFontTx/>
-                        <a:buNone/>
-                        <a:tabLst/>
-                        <a:defRPr/>
-                      </a:pPr>
-                      <a:r>
-                        <a:rPr lang="en-US" altLang="ko-KR" sz="900" b="0" smtClean="0">
-                          <a:solidFill>
-                            <a:srgbClr val="1A1A1A"/>
-                          </a:solidFill>
-                          <a:latin typeface="+mn-lt"/>
-                        </a:rPr>
-                        <a:t>https://oneshot-mvp.vercel.app/check?name=%EA%B5%B0%ED%8F%AC%EC%B2%A0%EC%AD%89%EC%B6%95%EC%A0%9C&amp;sido=%EA%B2%BD%EA%B8%B0&amp;sigungu=%EA%B5%B0%ED%8F%AC%EC%8B%9C&amp;n=600000&amp;basis=period&amp;counting=personDays&amp;budget=100000&amp;start=2027-04-17&amp;end=2027-04-25&amp;h1s=2024-04-20&amp;h1e=2024-04-28&amp;h2s=2025-04-19&amp;h2e=2025-04-27&amp;h3s=2026-04-18&amp;h3e=2026-04-26&amp;theme=2&amp;acc=4</a:t>
-                      </a:r>
-                      <a:endParaRPr lang="en-US" altLang="ko-KR" sz="1800" b="0" smtClean="0">
-                        <a:solidFill>
-                          <a:srgbClr val="FF0000"/>
-                        </a:solidFill>
-                        <a:latin typeface="+mn-lt"/>
-                      </a:endParaRPr>
-                    </a:p>
-                    <a:p>
-                      <a:pPr marL="0" marR="0" lvl="0" indent="0" algn="l" defTabSz="914400" rtl="0" eaLnBrk="1" fontAlgn="auto" latinLnBrk="1" hangingPunct="1">
-                        <a:lnSpc>
-                          <a:spcPct val="100000"/>
-                        </a:lnSpc>
-                        <a:spcBef>
-                          <a:spcPts val="0"/>
-                        </a:spcBef>
-                        <a:spcAft>
-                          <a:spcPts val="0"/>
-                        </a:spcAft>
-                        <a:buClrTx/>
-                        <a:buSzTx/>
-                        <a:buFontTx/>
-                        <a:buNone/>
-                        <a:tabLst/>
-                        <a:defRPr/>
-                      </a:pPr>
-                      <a:r>
-                        <a:rPr lang="en-US" altLang="ko-KR" sz="900" b="0" smtClean="0">
-                          <a:solidFill>
-                            <a:srgbClr val="1A1A1A"/>
-                          </a:solidFill>
-                          <a:latin typeface="+mn-lt"/>
-                        </a:rPr>
-                        <a:t>· 화천산천어축제 2027 → 상한 초과</a:t>
-                      </a:r>
-                      <a:endParaRPr lang="en-US" altLang="ko-KR" sz="1800" b="0" smtClean="0">
-                        <a:solidFill>
-                          <a:srgbClr val="FF0000"/>
-                        </a:solidFill>
-                        <a:latin typeface="+mn-lt"/>
-                      </a:endParaRPr>
-                    </a:p>
-                    <a:p>
-                      <a:pPr marL="0" marR="0" lvl="0" indent="0" algn="l" defTabSz="914400" rtl="0" eaLnBrk="1" fontAlgn="auto" latinLnBrk="1" hangingPunct="1">
-                        <a:lnSpc>
-                          <a:spcPct val="100000"/>
-                        </a:lnSpc>
-                        <a:spcBef>
-                          <a:spcPts val="0"/>
-                        </a:spcBef>
-                        <a:spcAft>
-                          <a:spcPts val="0"/>
-                        </a:spcAft>
-                        <a:buClrTx/>
-                        <a:buSzTx/>
-                        <a:buFontTx/>
-                        <a:buNone/>
-                        <a:tabLst/>
-                        <a:defRPr/>
-                      </a:pPr>
-                      <a:r>
-                        <a:rPr lang="en-US" altLang="ko-KR" sz="900" b="0" smtClean="0">
-                          <a:solidFill>
-                            <a:srgbClr val="1A1A1A"/>
-                          </a:solidFill>
-                          <a:latin typeface="+mn-lt"/>
-                        </a:rPr>
-                        <a:t>https://oneshot-mvp.vercel.app/check?name=%ED%99%94%EC%B2%9C%EC%82%B0%EC%B2%9C%EC%96%B4%EC%B6%95%EC%A0%9C&amp;sido=%EA%B0%95%EC%9B%90&amp;sigungu=%ED%99%94%EC%B2%9C%EA%B5%B0&amp;n=1860000&amp;basis=period&amp;counting=personDays&amp;pop=2.3&amp;start=2027-01-09&amp;end=2027-01-31&amp;h1s=2024-01-06&amp;h1e=2024-01-28&amp;h2s=2025-01-11&amp;h2e=2025-02-02&amp;h3s=2026-01-10&amp;h3e=2026-02-01</a:t>
+                        <a:t/>
                       </a:r>
                       <a:endParaRPr lang="en-US" altLang="ko-KR" sz="1800" b="0" smtClean="0">
                         <a:solidFill>
@@ -12025,6 +12321,54 @@
           </a:graphicData>
         </a:graphic>
       </p:graphicFrame>
+      <p:pic>
+        <p:nvPicPr>
+          <p:cNvPr id="4" name="Picture 3" descr="hero_wide.png"/>
+          <p:cNvPicPr>
+            <a:picLocks noChangeAspect="1"/>
+          </p:cNvPicPr>
+          <p:nvPr/>
+        </p:nvPicPr>
+        <p:blipFill>
+          <a:blip r:embed="rId2"/>
+          <a:stretch>
+            <a:fillRect/>
+          </a:stretch>
+        </p:blipFill>
+        <p:spPr>
+          <a:xfrm>
+            <a:off x="4845486" y="1115401"/>
+            <a:ext cx="4456250" cy="2300000"/>
+          </a:xfrm>
+          <a:prstGeom prst="rect">
+            <a:avLst/>
+          </a:prstGeom>
+        </p:spPr>
+      </p:pic>
+      <p:pic>
+        <p:nvPicPr>
+          <p:cNvPr id="5" name="Picture 4" descr="detail_montage.png"/>
+          <p:cNvPicPr>
+            <a:picLocks noChangeAspect="1"/>
+          </p:cNvPicPr>
+          <p:nvPr/>
+        </p:nvPicPr>
+        <p:blipFill>
+          <a:blip r:embed="rId3"/>
+          <a:stretch>
+            <a:fillRect/>
+          </a:stretch>
+        </p:blipFill>
+        <p:spPr>
+          <a:xfrm>
+            <a:off x="2276310" y="4207290"/>
+            <a:ext cx="9594603" cy="1686222"/>
+          </a:xfrm>
+          <a:prstGeom prst="rect">
+            <a:avLst/>
+          </a:prstGeom>
+        </p:spPr>
+      </p:pic>
     </p:spTree>
     <p:extLst>
       <p:ext uri="{BB962C8B-B14F-4D97-AF65-F5344CB8AC3E}">
@@ -12833,7 +13177,7 @@
                             <a:srgbClr val="1A1A1A"/>
                           </a:solidFill>
                         </a:rPr>
-                        <a:t>판정 화면에서 실시간 호출. 작년 축제 기간 반경 50km 안에 등록된 다른 축제를 찾아 "이 배수는 개최 시군구 배수이고 이 축제 몫만이 아니다"라는 귀속 경고를 냅니다(군포 2026: 36건). 호출이 실패해도 판정은 그대로 서고 실패 사실을 표시합니다.</a:t>
+                        <a:t>판정 화면에서 실시간 호출. 작년 축제 기간 반경 50km 안에 등록된 다른 축제를 찾아 "이 배수는 개최 시군구 배수이고 이 축제 몫만이 아니다"라는 귀속 경고를 냅니다(군포 2026 기준 등록 행사 36건, 실시간 값). 호출이 실패해도 판정은 그대로 서고 실패 사실을 표시합니다.</a:t>
                       </a:r>
                     </a:p>
                   </a:txBody>
@@ -15013,7 +15357,7 @@
                           </a:solidFill>
                           <a:latin typeface="+mn-lt"/>
                         </a:rPr>
-                        <a:t>둘째, 공사 데이터를 한 번 부르는 것이 아니라 전수로 적재했습니다(시군구 272개 × 2,658일 = 697,403행). 데이터랩 축제 목록 619건의 배수도 같은 자료로 전부 다시 계산해, 또래 비교와 자기검증(정밀도 65.8% · 재현율 61.6% · 무작위 대비 3.26배)이 같은 정의 위에 섭니다.</a:t>
+                        <a:t>둘째, 공사 데이터를 한 번 부르는 것이 아니라 전수로 적재했습니다(시군구 272개 × 최장 2,658일, 시군구마다 시작일이 달라 합계 697,403행). 데이터랩 축제 목록 619건의 배수도 같은 자료로 전부 다시 계산해, 또래 비교와 자기검증(정밀도 65.8% · 재현율 61.6% · 무작위 대비 3.26배)이 같은 정의 위에 섭니다.</a:t>
                       </a:r>
                       <a:endParaRPr lang="en-US" altLang="ko-KR" sz="1800" b="0">
                         <a:solidFill>
@@ -15066,6 +15410,78 @@
                           <a:latin typeface="+mn-lt"/>
                         </a:rPr>
                         <a:t>넷째, 화면이 자기 한계를 먼저 말합니다. 명·원 숫자는 출처 셀로만 나가고(e2e 가 셉니다), 임계값은 정한 값이라고 적으며, 내년 구간의 적중률은 −52주 근사(표본 381건, 두 해 채택 325건 중 167건(51.4%))로만 쟀다고 카드가 말합니다. 판정·시뮬에 생성형 모델을 쓰지 않아 같은 입력에 늘 같은 답입니다.</a:t>
+                      </a:r>
+                      <a:endParaRPr lang="en-US" altLang="ko-KR" sz="1800" b="0">
+                        <a:solidFill>
+                          <a:srgbClr val="FF0000"/>
+                        </a:solidFill>
+                        <a:latin typeface="+mn-lt"/>
+                      </a:endParaRPr>
+                    </a:p>
+                    <a:p>
+                      <a:pPr marL="0" lvl="0" indent="0" algn="just" rtl="0">
+                        <a:spcBef>
+                          <a:spcPts val="0"/>
+                        </a:spcBef>
+                        <a:spcAft>
+                          <a:spcPts val="0"/>
+                        </a:spcAft>
+                        <a:buNone/>
+                      </a:pPr>
+                      <a:r>
+                        <a:rPr lang="en-US" altLang="ko-KR" sz="750" b="0">
+                          <a:solidFill>
+                            <a:srgbClr val="1A1A1A"/>
+                          </a:solidFill>
+                          <a:latin typeface="+mn-lt"/>
+                        </a:rPr>
+                        <a:t>완성 판정 화면(클릭) — 군포철쭉축제 2027 → 주의: </a:t>
+                      </a:r>
+                      <a:r>
+                        <a:rPr lang="en-US" altLang="ko-KR" sz="750" b="0">
+                          <a:solidFill>
+                            <a:srgbClr val="1A1A1A"/>
+                          </a:solidFill>
+                          <a:latin typeface="+mn-lt"/>
+                          <a:hlinkClick r:id="rId2"/>
+                        </a:rPr>
+                        <a:t>https://oneshot-mvp.vercel.app/check?name=%EA%B5%B0%ED%8F%AC%EC%B2%A0%EC%AD%89%EC%B6%95%EC%A0%9C&amp;sido=%EA%B2%BD%EA%B8%B0&amp;sigungu=%EA%B5%B0%ED%8F%AC%EC%8B%9C&amp;n=600000&amp;basis=period&amp;counting=personDays&amp;budget=100000&amp;start=2027-04-17&amp;end=2027-04-25&amp;h1s=2024-04-20&amp;h1e=2024-04-28&amp;h2s=2025-04-19&amp;h2e=2025-04-27&amp;h3s=2026-04-18&amp;h3e=2026-04-26&amp;theme=2&amp;acc=4</a:t>
+                      </a:r>
+                      <a:endParaRPr lang="en-US" altLang="ko-KR" sz="1800" b="0">
+                        <a:solidFill>
+                          <a:srgbClr val="FF0000"/>
+                        </a:solidFill>
+                        <a:latin typeface="+mn-lt"/>
+                      </a:endParaRPr>
+                    </a:p>
+                    <a:p>
+                      <a:pPr marL="0" lvl="0" indent="0" algn="just" rtl="0">
+                        <a:spcBef>
+                          <a:spcPts val="0"/>
+                        </a:spcBef>
+                        <a:spcAft>
+                          <a:spcPts val="0"/>
+                        </a:spcAft>
+                        <a:buNone/>
+                      </a:pPr>
+                      <a:r>
+                        <a:rPr lang="en-US" altLang="ko-KR" sz="750" b="0">
+                          <a:solidFill>
+                            <a:srgbClr val="1A1A1A"/>
+                          </a:solidFill>
+                          <a:latin typeface="+mn-lt"/>
+                        </a:rPr>
+                        <a:t>화천산천어축제 2027 → 상한 초과: </a:t>
+                      </a:r>
+                      <a:r>
+                        <a:rPr lang="en-US" altLang="ko-KR" sz="750" b="0">
+                          <a:solidFill>
+                            <a:srgbClr val="1A1A1A"/>
+                          </a:solidFill>
+                          <a:latin typeface="+mn-lt"/>
+                          <a:hlinkClick r:id="rId3"/>
+                        </a:rPr>
+                        <a:t>https://oneshot-mvp.vercel.app/check?name=%ED%99%94%EC%B2%9C%EC%82%B0%EC%B2%9C%EC%96%B4%EC%B6%95%EC%A0%9C&amp;sido=%EA%B0%95%EC%9B%90&amp;sigungu=%ED%99%94%EC%B2%9C%EA%B5%B0&amp;n=1860000&amp;basis=period&amp;counting=personDays&amp;pop=2.3&amp;start=2027-01-09&amp;end=2027-01-31&amp;h1s=2024-01-06&amp;h1e=2024-01-28&amp;h2s=2025-01-11&amp;h2e=2025-02-02&amp;h3s=2026-01-10&amp;h3e=2026-02-01</a:t>
                       </a:r>
                       <a:endParaRPr lang="en-US" altLang="ko-KR" sz="1800" b="0">
                         <a:solidFill>
@@ -15338,6 +15754,34 @@
                           <a:latin typeface="+mn-lt"/>
                         </a:rPr>
                         <a:t>5) 배치도 자동 인식 — 지금은 배치도를 밑그림으로 깔고 따라 그립니다. 실물 배치도로 정확도를 잰 뒤 모델 초안 생성을 붙입니다.</a:t>
+                      </a:r>
+                    </a:p>
+                    <a:p>
+                      <a:pPr marL="0" marR="0" lvl="0" indent="0" algn="just" defTabSz="914400" rtl="0" eaLnBrk="1" fontAlgn="auto" latinLnBrk="1" hangingPunct="1">
+                        <a:lnSpc>
+                          <a:spcPct val="100000"/>
+                        </a:lnSpc>
+                        <a:spcBef>
+                          <a:spcPts val="0"/>
+                        </a:spcBef>
+                        <a:spcAft>
+                          <a:spcPts val="0"/>
+                        </a:spcAft>
+                        <a:buClrTx/>
+                        <a:buSzTx/>
+                        <a:buFontTx/>
+                        <a:buNone/>
+                        <a:tabLst/>
+                        <a:defRPr/>
+                      </a:pPr>
+                      <a:r>
+                        <a:rPr lang="en-US" altLang="ko-KR" sz="1000">
+                          <a:solidFill>
+                            <a:srgbClr val="1A1A1A"/>
+                          </a:solidFill>
+                          <a:latin typeface="+mn-lt"/>
+                        </a:rPr>
+                        <a:t>운영: 정적 사이트 + 서버리스(Vercel)라 고정비가 없고, 공사 데이터는 월 1회 프리페치(개발계정 1,000회/일 안)로 갱신합니다. 운영계정 전환 시 실시간 호출 한도 문제도 사라집니다.</a:t>
                       </a:r>
                     </a:p>
                   </a:txBody>

--- a/docs/제출양식/기능설명서_기획안팩트체크_작성본.pptx
+++ b/docs/제출양식/기능설명서_기획안팩트체크_작성본.pptx
@@ -3304,8 +3304,8 @@
         </p:blipFill>
         <p:spPr>
           <a:xfrm>
-            <a:off x="352952" y="3131586"/>
-            <a:ext cx="2756577" cy="2067433"/>
+            <a:off x="352952" y="3513866"/>
+            <a:ext cx="2756577" cy="1302873"/>
           </a:xfrm>
           <a:prstGeom prst="rect">
             <a:avLst/>
@@ -3328,8 +3328,8 @@
         </p:blipFill>
         <p:spPr>
           <a:xfrm>
-            <a:off x="3606811" y="3074071"/>
-            <a:ext cx="1962012" cy="2182463"/>
+            <a:off x="4033808" y="3074071"/>
+            <a:ext cx="1108019" cy="2182463"/>
           </a:xfrm>
           <a:prstGeom prst="rect">
             <a:avLst/>
@@ -3352,8 +3352,8 @@
         </p:blipFill>
         <p:spPr>
           <a:xfrm>
-            <a:off x="6066106" y="3164909"/>
-            <a:ext cx="2756577" cy="2000787"/>
+            <a:off x="6345198" y="3074071"/>
+            <a:ext cx="2198393" cy="2182463"/>
           </a:xfrm>
           <a:prstGeom prst="rect">
             <a:avLst/>
@@ -3376,8 +3376,8 @@
         </p:blipFill>
         <p:spPr>
           <a:xfrm>
-            <a:off x="9822306" y="3074071"/>
-            <a:ext cx="957331" cy="2182463"/>
+            <a:off x="9669616" y="3074071"/>
+            <a:ext cx="1262710" cy="2182463"/>
           </a:xfrm>
           <a:prstGeom prst="rect">
             <a:avLst/>
@@ -3400,8 +3400,8 @@
         </p:blipFill>
         <p:spPr>
           <a:xfrm>
-            <a:off x="352952" y="3822209"/>
-            <a:ext cx="2756577" cy="686187"/>
+            <a:off x="352952" y="3370317"/>
+            <a:ext cx="2756577" cy="1589971"/>
           </a:xfrm>
           <a:prstGeom prst="rect">
             <a:avLst/>
@@ -3424,8 +3424,8 @@
         </p:blipFill>
         <p:spPr>
           <a:xfrm>
-            <a:off x="3209529" y="3485031"/>
-            <a:ext cx="2756577" cy="1360542"/>
+            <a:off x="3343729" y="3074071"/>
+            <a:ext cx="2488177" cy="2182463"/>
           </a:xfrm>
           <a:prstGeom prst="rect">
             <a:avLst/>
@@ -3448,8 +3448,8 @@
         </p:blipFill>
         <p:spPr>
           <a:xfrm>
-            <a:off x="6369951" y="3074071"/>
-            <a:ext cx="2148886" cy="2182463"/>
+            <a:off x="6066106" y="3300206"/>
+            <a:ext cx="2756577" cy="1730192"/>
           </a:xfrm>
           <a:prstGeom prst="rect">
             <a:avLst/>
@@ -3472,8 +3472,8 @@
         </p:blipFill>
         <p:spPr>
           <a:xfrm>
-            <a:off x="8922683" y="3259205"/>
-            <a:ext cx="2756577" cy="1812194"/>
+            <a:off x="9590459" y="3074071"/>
+            <a:ext cx="1421025" cy="2182463"/>
           </a:xfrm>
           <a:prstGeom prst="rect">
             <a:avLst/>
@@ -4905,8 +4905,8 @@
         </p:blipFill>
         <p:spPr>
           <a:xfrm>
-            <a:off x="352952" y="3131586"/>
-            <a:ext cx="2756577" cy="2067433"/>
+            <a:off x="352952" y="3513866"/>
+            <a:ext cx="2756577" cy="1302873"/>
           </a:xfrm>
           <a:prstGeom prst="rect">
             <a:avLst/>
@@ -4929,8 +4929,8 @@
         </p:blipFill>
         <p:spPr>
           <a:xfrm>
-            <a:off x="3606811" y="3074071"/>
-            <a:ext cx="1962012" cy="2182463"/>
+            <a:off x="4033808" y="3074071"/>
+            <a:ext cx="1108019" cy="2182463"/>
           </a:xfrm>
           <a:prstGeom prst="rect">
             <a:avLst/>
@@ -4953,8 +4953,8 @@
         </p:blipFill>
         <p:spPr>
           <a:xfrm>
-            <a:off x="6066106" y="3164909"/>
-            <a:ext cx="2756577" cy="2000787"/>
+            <a:off x="6345198" y="3074071"/>
+            <a:ext cx="2198393" cy="2182463"/>
           </a:xfrm>
           <a:prstGeom prst="rect">
             <a:avLst/>
@@ -4977,8 +4977,8 @@
         </p:blipFill>
         <p:spPr>
           <a:xfrm>
-            <a:off x="9822306" y="3074071"/>
-            <a:ext cx="957331" cy="2182463"/>
+            <a:off x="9669616" y="3074071"/>
+            <a:ext cx="1262710" cy="2182463"/>
           </a:xfrm>
           <a:prstGeom prst="rect">
             <a:avLst/>
@@ -5001,8 +5001,8 @@
         </p:blipFill>
         <p:spPr>
           <a:xfrm>
-            <a:off x="352952" y="3514608"/>
-            <a:ext cx="2756577" cy="1301388"/>
+            <a:off x="1020728" y="3074071"/>
+            <a:ext cx="1421025" cy="2182463"/>
           </a:xfrm>
           <a:prstGeom prst="rect">
             <a:avLst/>
@@ -5011,7 +5011,7 @@
       </p:pic>
       <p:pic>
         <p:nvPicPr>
-          <p:cNvPr id="12" name="Picture 11" descr="f3_2_budget.png"/>
+          <p:cNvPr id="12" name="Picture 11" descr="f2_3_range.png"/>
           <p:cNvPicPr>
             <a:picLocks noChangeAspect="1"/>
           </p:cNvPicPr>
@@ -5025,8 +5025,8 @@
         </p:blipFill>
         <p:spPr>
           <a:xfrm>
-            <a:off x="3209529" y="3239265"/>
-            <a:ext cx="2756577" cy="1852075"/>
+            <a:off x="3209529" y="3300206"/>
+            <a:ext cx="2756577" cy="1730192"/>
           </a:xfrm>
           <a:prstGeom prst="rect">
             <a:avLst/>
@@ -5049,8 +5049,8 @@
         </p:blipFill>
         <p:spPr>
           <a:xfrm>
-            <a:off x="6066106" y="3881363"/>
-            <a:ext cx="2756577" cy="567879"/>
+            <a:off x="6066106" y="3957350"/>
+            <a:ext cx="2756577" cy="415905"/>
           </a:xfrm>
           <a:prstGeom prst="rect">
             <a:avLst/>
@@ -5073,8 +5073,8 @@
         </p:blipFill>
         <p:spPr>
           <a:xfrm>
-            <a:off x="9060414" y="3074071"/>
-            <a:ext cx="2481115" cy="2182463"/>
+            <a:off x="9679233" y="3074071"/>
+            <a:ext cx="1243476" cy="2182463"/>
           </a:xfrm>
           <a:prstGeom prst="rect">
             <a:avLst/>
@@ -6506,8 +6506,8 @@
         </p:blipFill>
         <p:spPr>
           <a:xfrm>
-            <a:off x="352952" y="3131586"/>
-            <a:ext cx="2756577" cy="2067433"/>
+            <a:off x="352952" y="3513866"/>
+            <a:ext cx="2756577" cy="1302873"/>
           </a:xfrm>
           <a:prstGeom prst="rect">
             <a:avLst/>
@@ -6530,8 +6530,8 @@
         </p:blipFill>
         <p:spPr>
           <a:xfrm>
-            <a:off x="3606811" y="3074071"/>
-            <a:ext cx="1962012" cy="2182463"/>
+            <a:off x="4033808" y="3074071"/>
+            <a:ext cx="1108019" cy="2182463"/>
           </a:xfrm>
           <a:prstGeom prst="rect">
             <a:avLst/>
@@ -6554,8 +6554,8 @@
         </p:blipFill>
         <p:spPr>
           <a:xfrm>
-            <a:off x="6066106" y="3164909"/>
-            <a:ext cx="2756577" cy="2000787"/>
+            <a:off x="6345198" y="3074071"/>
+            <a:ext cx="2198393" cy="2182463"/>
           </a:xfrm>
           <a:prstGeom prst="rect">
             <a:avLst/>
@@ -6578,8 +6578,8 @@
         </p:blipFill>
         <p:spPr>
           <a:xfrm>
-            <a:off x="9822306" y="3074071"/>
-            <a:ext cx="957331" cy="2182463"/>
+            <a:off x="9669616" y="3074071"/>
+            <a:ext cx="1262710" cy="2182463"/>
           </a:xfrm>
           <a:prstGeom prst="rect">
             <a:avLst/>
@@ -6588,7 +6588,7 @@
       </p:pic>
       <p:pic>
         <p:nvPicPr>
-          <p:cNvPr id="11" name="Picture 10" descr="f4_1_datause.png"/>
+          <p:cNvPr id="11" name="Picture 10" descr="f2_1_verdict.png"/>
           <p:cNvPicPr>
             <a:picLocks noChangeAspect="1"/>
           </p:cNvPicPr>
@@ -6602,8 +6602,8 @@
         </p:blipFill>
         <p:spPr>
           <a:xfrm>
-            <a:off x="352952" y="3573762"/>
-            <a:ext cx="2756577" cy="1183080"/>
+            <a:off x="352952" y="3370317"/>
+            <a:ext cx="2756577" cy="1589971"/>
           </a:xfrm>
           <a:prstGeom prst="rect">
             <a:avLst/>
@@ -6626,8 +6626,8 @@
         </p:blipFill>
         <p:spPr>
           <a:xfrm>
-            <a:off x="3209529" y="3208157"/>
-            <a:ext cx="2756577" cy="1914290"/>
+            <a:off x="3209529" y="3697821"/>
+            <a:ext cx="2756577" cy="934963"/>
           </a:xfrm>
           <a:prstGeom prst="rect">
             <a:avLst/>
@@ -6650,8 +6650,8 @@
         </p:blipFill>
         <p:spPr>
           <a:xfrm>
-            <a:off x="6106200" y="3074071"/>
-            <a:ext cx="2676389" cy="2182463"/>
+            <a:off x="6066106" y="3871173"/>
+            <a:ext cx="2756577" cy="588259"/>
           </a:xfrm>
           <a:prstGeom prst="rect">
             <a:avLst/>
@@ -6674,8 +6674,8 @@
         </p:blipFill>
         <p:spPr>
           <a:xfrm>
-            <a:off x="9709117" y="3074071"/>
-            <a:ext cx="1183708" cy="2182463"/>
+            <a:off x="8922683" y="3910958"/>
+            <a:ext cx="2756577" cy="508688"/>
           </a:xfrm>
           <a:prstGeom prst="rect">
             <a:avLst/>
@@ -11766,8 +11766,8 @@
         </p:blipFill>
         <p:spPr>
           <a:xfrm>
-            <a:off x="352952" y="3131586"/>
-            <a:ext cx="2756577" cy="2067433"/>
+            <a:off x="352952" y="3513866"/>
+            <a:ext cx="2756577" cy="1302873"/>
           </a:xfrm>
           <a:prstGeom prst="rect">
             <a:avLst/>
@@ -11790,8 +11790,8 @@
         </p:blipFill>
         <p:spPr>
           <a:xfrm>
-            <a:off x="3606811" y="3074071"/>
-            <a:ext cx="1962012" cy="2182463"/>
+            <a:off x="4033808" y="3074071"/>
+            <a:ext cx="1108019" cy="2182463"/>
           </a:xfrm>
           <a:prstGeom prst="rect">
             <a:avLst/>
@@ -11814,8 +11814,8 @@
         </p:blipFill>
         <p:spPr>
           <a:xfrm>
-            <a:off x="6066106" y="3164909"/>
-            <a:ext cx="2756577" cy="2000787"/>
+            <a:off x="6345198" y="3074071"/>
+            <a:ext cx="2198393" cy="2182463"/>
           </a:xfrm>
           <a:prstGeom prst="rect">
             <a:avLst/>
@@ -11838,8 +11838,8 @@
         </p:blipFill>
         <p:spPr>
           <a:xfrm>
-            <a:off x="9822306" y="3074071"/>
-            <a:ext cx="957331" cy="2182463"/>
+            <a:off x="9669616" y="3074071"/>
+            <a:ext cx="1262710" cy="2182463"/>
           </a:xfrm>
           <a:prstGeom prst="rect">
             <a:avLst/>
@@ -12337,8 +12337,8 @@
         </p:blipFill>
         <p:spPr>
           <a:xfrm>
-            <a:off x="4845486" y="1115401"/>
-            <a:ext cx="4456250" cy="2300000"/>
+            <a:off x="6053945" y="1115401"/>
+            <a:ext cx="2039333" cy="2300000"/>
           </a:xfrm>
           <a:prstGeom prst="rect">
             <a:avLst/>
@@ -12361,8 +12361,8 @@
         </p:blipFill>
         <p:spPr>
           <a:xfrm>
-            <a:off x="2276310" y="4207290"/>
-            <a:ext cx="9594603" cy="1686222"/>
+            <a:off x="4019727" y="3515401"/>
+            <a:ext cx="6107769" cy="3070000"/>
           </a:xfrm>
           <a:prstGeom prst="rect">
             <a:avLst/>

--- a/docs/제출양식/기능설명서_기획안팩트체크_작성본.pptx
+++ b/docs/제출양식/기능설명서_기획안팩트체크_작성본.pptx
@@ -7347,8 +7347,27 @@
                           </a:solidFill>
                           <a:latin typeface="+mn-lt"/>
                         </a:rPr>
-                        <a:t>심사용 경로: 시연 안내 </a:t>
-                      </a:r>
+                        <a:t>심사용 경로 — 올릴 기획서가 없으면 이 주소가 판정 화면을 바로 엽니다(업로드 불필요):</a:t>
+                      </a:r>
+                    </a:p>
+                    <a:p>
+                      <a:pPr marL="0" marR="0" lvl="0" indent="0" algn="just" defTabSz="914400" rtl="0" eaLnBrk="1" fontAlgn="auto" latinLnBrk="1" hangingPunct="1">
+                        <a:lnSpc>
+                          <a:spcPct val="100000"/>
+                        </a:lnSpc>
+                        <a:spcBef>
+                          <a:spcPts val="0"/>
+                        </a:spcBef>
+                        <a:spcAft>
+                          <a:spcPts val="0"/>
+                        </a:spcAft>
+                        <a:buClrTx/>
+                        <a:buSzTx/>
+                        <a:buFontTx/>
+                        <a:buNone/>
+                        <a:tabLst/>
+                        <a:defRPr/>
+                      </a:pPr>
                       <a:r>
                         <a:rPr lang="en-US" altLang="ko-KR" sz="1200">
                           <a:solidFill>
@@ -7357,8 +7376,27 @@
                           <a:latin typeface="+mn-lt"/>
                           <a:hlinkClick r:id="rId2"/>
                         </a:rPr>
-                        <a:t>https://oneshot-mvp.vercel.app/judge-guide.pdf</a:t>
-                      </a:r>
+                        <a:t>https://oneshot-mvp.vercel.app/check?name=%EA%B5%B0%ED%8F%AC%EC%B2%A0%EC%AD%89%EC%B6%95%EC%A0%9C&amp;sido=%EA%B2%BD%EA%B8%B0&amp;sigungu=%EA%B5%B0%ED%8F%AC%EC%8B%9C&amp;n=600000&amp;basis=period&amp;counting=personDays&amp;budget=100000&amp;start=2027-04-17&amp;end=2027-04-25&amp;h1s=2024-04-20&amp;h1e=2024-04-28&amp;h2s=2025-04-19&amp;h2e=2025-04-27&amp;h3s=2026-04-18&amp;h3e=2026-04-26&amp;theme=2&amp;acc=4</a:t>
+                      </a:r>
+                    </a:p>
+                    <a:p>
+                      <a:pPr marL="0" marR="0" lvl="0" indent="0" algn="just" defTabSz="914400" rtl="0" eaLnBrk="1" fontAlgn="auto" latinLnBrk="1" hangingPunct="1">
+                        <a:lnSpc>
+                          <a:spcPct val="100000"/>
+                        </a:lnSpc>
+                        <a:spcBef>
+                          <a:spcPts val="0"/>
+                        </a:spcBef>
+                        <a:spcAft>
+                          <a:spcPts val="0"/>
+                        </a:spcAft>
+                        <a:buClrTx/>
+                        <a:buSzTx/>
+                        <a:buFontTx/>
+                        <a:buNone/>
+                        <a:tabLst/>
+                        <a:defRPr/>
+                      </a:pPr>
                       <a:r>
                         <a:rPr lang="en-US" altLang="ko-KR" sz="1200">
                           <a:solidFill>
@@ -7366,7 +7404,7 @@
                           </a:solidFill>
                           <a:latin typeface="+mn-lt"/>
                         </a:rPr>
-                        <a:t> · 예비 데모 기획서 </a:t>
+                        <a:t>시연 안내 </a:t>
                       </a:r>
                       <a:r>
                         <a:rPr lang="en-US" altLang="ko-KR" sz="1200">
@@ -7375,6 +7413,25 @@
                           </a:solidFill>
                           <a:latin typeface="+mn-lt"/>
                           <a:hlinkClick r:id="rId3"/>
+                        </a:rPr>
+                        <a:t>https://oneshot-mvp.vercel.app/judge-guide.pdf</a:t>
+                      </a:r>
+                      <a:r>
+                        <a:rPr lang="en-US" altLang="ko-KR" sz="1200">
+                          <a:solidFill>
+                            <a:srgbClr val="1A1A1A"/>
+                          </a:solidFill>
+                          <a:latin typeface="+mn-lt"/>
+                        </a:rPr>
+                        <a:t> · 예비 데모 기획서 </a:t>
+                      </a:r>
+                      <a:r>
+                        <a:rPr lang="en-US" altLang="ko-KR" sz="1200">
+                          <a:solidFill>
+                            <a:srgbClr val="1A1A1A"/>
+                          </a:solidFill>
+                          <a:latin typeface="+mn-lt"/>
+                          <a:hlinkClick r:id="rId4"/>
                         </a:rPr>
                         <a:t>https://oneshot-mvp.vercel.app/sample-plan.pdf</a:t>
                       </a:r>
@@ -12347,7 +12404,7 @@
       </p:pic>
       <p:pic>
         <p:nvPicPr>
-          <p:cNvPr id="5" name="Picture 4" descr="detail_montage.png"/>
+          <p:cNvPr id="5" name="Picture 4" descr="detail_4up.png"/>
           <p:cNvPicPr>
             <a:picLocks noChangeAspect="1"/>
           </p:cNvPicPr>
@@ -12361,8 +12418,8 @@
         </p:blipFill>
         <p:spPr>
           <a:xfrm>
-            <a:off x="4019727" y="3515401"/>
-            <a:ext cx="6107769" cy="3070000"/>
+            <a:off x="4838367" y="3515401"/>
+            <a:ext cx="4470489" cy="3070000"/>
           </a:xfrm>
           <a:prstGeom prst="rect">
             <a:avLst/>

--- a/docs/제출양식/기능설명서_기획안팩트체크_작성본.pptx
+++ b/docs/제출양식/기능설명서_기획안팩트체크_작성본.pptx
@@ -3304,8 +3304,8 @@
         </p:blipFill>
         <p:spPr>
           <a:xfrm>
-            <a:off x="352952" y="3513866"/>
-            <a:ext cx="2756577" cy="1302873"/>
+            <a:off x="352952" y="3379938"/>
+            <a:ext cx="2756577" cy="1570729"/>
           </a:xfrm>
           <a:prstGeom prst="rect">
             <a:avLst/>
@@ -3352,8 +3352,8 @@
         </p:blipFill>
         <p:spPr>
           <a:xfrm>
-            <a:off x="6345198" y="3074071"/>
-            <a:ext cx="2198393" cy="2182463"/>
+            <a:off x="6341171" y="3074071"/>
+            <a:ext cx="2206446" cy="2182463"/>
           </a:xfrm>
           <a:prstGeom prst="rect">
             <a:avLst/>
@@ -3400,8 +3400,8 @@
         </p:blipFill>
         <p:spPr>
           <a:xfrm>
-            <a:off x="352952" y="3370317"/>
-            <a:ext cx="2756577" cy="1589971"/>
+            <a:off x="525644" y="3074071"/>
+            <a:ext cx="2411192" cy="2182463"/>
           </a:xfrm>
           <a:prstGeom prst="rect">
             <a:avLst/>
@@ -3424,8 +3424,8 @@
         </p:blipFill>
         <p:spPr>
           <a:xfrm>
-            <a:off x="3343729" y="3074071"/>
-            <a:ext cx="2488177" cy="2182463"/>
+            <a:off x="3682632" y="3074071"/>
+            <a:ext cx="1810371" cy="2182463"/>
           </a:xfrm>
           <a:prstGeom prst="rect">
             <a:avLst/>
@@ -3448,8 +3448,8 @@
         </p:blipFill>
         <p:spPr>
           <a:xfrm>
-            <a:off x="6066106" y="3300206"/>
-            <a:ext cx="2756577" cy="1730192"/>
+            <a:off x="6066106" y="3513748"/>
+            <a:ext cx="2756577" cy="1303109"/>
           </a:xfrm>
           <a:prstGeom prst="rect">
             <a:avLst/>
@@ -3472,8 +3472,8 @@
         </p:blipFill>
         <p:spPr>
           <a:xfrm>
-            <a:off x="9590459" y="3074071"/>
-            <a:ext cx="1421025" cy="2182463"/>
+            <a:off x="9687457" y="3074071"/>
+            <a:ext cx="1227029" cy="2182463"/>
           </a:xfrm>
           <a:prstGeom prst="rect">
             <a:avLst/>
@@ -4905,8 +4905,8 @@
         </p:blipFill>
         <p:spPr>
           <a:xfrm>
-            <a:off x="352952" y="3513866"/>
-            <a:ext cx="2756577" cy="1302873"/>
+            <a:off x="352952" y="3379938"/>
+            <a:ext cx="2756577" cy="1570729"/>
           </a:xfrm>
           <a:prstGeom prst="rect">
             <a:avLst/>
@@ -4953,8 +4953,8 @@
         </p:blipFill>
         <p:spPr>
           <a:xfrm>
-            <a:off x="6345198" y="3074071"/>
-            <a:ext cx="2198393" cy="2182463"/>
+            <a:off x="6341171" y="3074071"/>
+            <a:ext cx="2206446" cy="2182463"/>
           </a:xfrm>
           <a:prstGeom prst="rect">
             <a:avLst/>
@@ -5001,8 +5001,8 @@
         </p:blipFill>
         <p:spPr>
           <a:xfrm>
-            <a:off x="1020728" y="3074071"/>
-            <a:ext cx="1421025" cy="2182463"/>
+            <a:off x="1117726" y="3074071"/>
+            <a:ext cx="1227029" cy="2182463"/>
           </a:xfrm>
           <a:prstGeom prst="rect">
             <a:avLst/>
@@ -5025,8 +5025,8 @@
         </p:blipFill>
         <p:spPr>
           <a:xfrm>
-            <a:off x="3209529" y="3300206"/>
-            <a:ext cx="2756577" cy="1730192"/>
+            <a:off x="3209529" y="3513748"/>
+            <a:ext cx="2756577" cy="1303109"/>
           </a:xfrm>
           <a:prstGeom prst="rect">
             <a:avLst/>
@@ -5049,8 +5049,8 @@
         </p:blipFill>
         <p:spPr>
           <a:xfrm>
-            <a:off x="6066106" y="3957350"/>
-            <a:ext cx="2756577" cy="415905"/>
+            <a:off x="6066106" y="3873846"/>
+            <a:ext cx="2756577" cy="582913"/>
           </a:xfrm>
           <a:prstGeom prst="rect">
             <a:avLst/>
@@ -5073,8 +5073,8 @@
         </p:blipFill>
         <p:spPr>
           <a:xfrm>
-            <a:off x="9679233" y="3074071"/>
-            <a:ext cx="1243476" cy="2182463"/>
+            <a:off x="9756844" y="3074071"/>
+            <a:ext cx="1088254" cy="2182463"/>
           </a:xfrm>
           <a:prstGeom prst="rect">
             <a:avLst/>
@@ -6506,8 +6506,8 @@
         </p:blipFill>
         <p:spPr>
           <a:xfrm>
-            <a:off x="352952" y="3513866"/>
-            <a:ext cx="2756577" cy="1302873"/>
+            <a:off x="352952" y="3379938"/>
+            <a:ext cx="2756577" cy="1570729"/>
           </a:xfrm>
           <a:prstGeom prst="rect">
             <a:avLst/>
@@ -6554,8 +6554,8 @@
         </p:blipFill>
         <p:spPr>
           <a:xfrm>
-            <a:off x="6345198" y="3074071"/>
-            <a:ext cx="2198393" cy="2182463"/>
+            <a:off x="6341171" y="3074071"/>
+            <a:ext cx="2206446" cy="2182463"/>
           </a:xfrm>
           <a:prstGeom prst="rect">
             <a:avLst/>
@@ -6602,8 +6602,8 @@
         </p:blipFill>
         <p:spPr>
           <a:xfrm>
-            <a:off x="352952" y="3370317"/>
-            <a:ext cx="2756577" cy="1589971"/>
+            <a:off x="525644" y="3074071"/>
+            <a:ext cx="2411192" cy="2182463"/>
           </a:xfrm>
           <a:prstGeom prst="rect">
             <a:avLst/>
@@ -6650,8 +6650,8 @@
         </p:blipFill>
         <p:spPr>
           <a:xfrm>
-            <a:off x="6066106" y="3871173"/>
-            <a:ext cx="2756577" cy="588259"/>
+            <a:off x="6066106" y="3875435"/>
+            <a:ext cx="2756577" cy="579734"/>
           </a:xfrm>
           <a:prstGeom prst="rect">
             <a:avLst/>
@@ -6674,8 +6674,8 @@
         </p:blipFill>
         <p:spPr>
           <a:xfrm>
-            <a:off x="8922683" y="3910958"/>
-            <a:ext cx="2756577" cy="508688"/>
+            <a:off x="8922683" y="3925167"/>
+            <a:ext cx="2756577" cy="480270"/>
           </a:xfrm>
           <a:prstGeom prst="rect">
             <a:avLst/>
@@ -7858,7 +7858,7 @@
                           </a:solidFill>
                           <a:latin typeface="+mn-lt"/>
                         </a:rPr>
-                        <a:t>발표되는 방문객 수는 산출 방식이 공개되지 않고, 내년 기획안은 그 발표치를 옮겨 적는 데서 시작합니다. 군포철쭉축제 2025 발표 최다일 217,502명은 같은 날 KT 가 센 군포시 전체 체류 262,457명의 83%였습니다. 공사 데이터랩에 이동통신 실측이 이미 있는데 기획 단계에서 쓰이지 않습니다. 그 실측을 담당자가 결재에 들고 갈 수 있는 판정문으로 옮기면 풀리는 문제라고 봤습니다.</a:t>
+                        <a:t>발표되는 방문객 수는 산출 방식이 공개되지 않고, 내년 기획안은 그 발표치를 옮겨 적는 데서 시작합니다. 군포철쭉축제만 봐도 그렇습니다 — 시 발표 방문객은 2024년 360,370명에서 2025년 545,802명으로 1.51배가 됐는데(연합뉴스 2025-04-28), 같은 축제를 공사 KT 일별 실측으로 재면 최대일 외지인 배수는 1.47배 → 1.52배로 거의 그대로입니다. 세 해 모두 축제 신호는 '뚜렷함'이라 측정이 못 잡은 것도 아닙니다. 두 숫자는 서로 다른 것을 잽니다 — 발표치는 절대 인원, 배수는 평소 대비 상대값입니다. 그런데 예산 심의는 둘을 구분하지 않습니다. 이 서비스가 하는 일이 그 구분을 화면에서 강제하는 것입니다. 군포철쭉축제 2025 발표 최다일 217,502명은 같은 날 KT 가 센 군포시 전체 체류 262,457명의 83%였습니다. 공사 데이터랩에 이동통신 실측이 이미 있는데 기획 단계에서 쓰이지 않습니다. 그 실측을 담당자가 결재에 들고 갈 수 있는 판정문으로 옮기면 풀리는 문제라고 봤습니다.</a:t>
                       </a:r>
                     </a:p>
                   </a:txBody>
@@ -11823,8 +11823,8 @@
         </p:blipFill>
         <p:spPr>
           <a:xfrm>
-            <a:off x="352952" y="3513866"/>
-            <a:ext cx="2756577" cy="1302873"/>
+            <a:off x="352952" y="3379938"/>
+            <a:ext cx="2756577" cy="1570729"/>
           </a:xfrm>
           <a:prstGeom prst="rect">
             <a:avLst/>
@@ -11871,8 +11871,8 @@
         </p:blipFill>
         <p:spPr>
           <a:xfrm>
-            <a:off x="6345198" y="3074071"/>
-            <a:ext cx="2198393" cy="2182463"/>
+            <a:off x="6341171" y="3074071"/>
+            <a:ext cx="2206446" cy="2182463"/>
           </a:xfrm>
           <a:prstGeom prst="rect">
             <a:avLst/>
@@ -12394,8 +12394,8 @@
         </p:blipFill>
         <p:spPr>
           <a:xfrm>
-            <a:off x="6053945" y="1115401"/>
-            <a:ext cx="2039333" cy="2300000"/>
+            <a:off x="6156167" y="1115401"/>
+            <a:ext cx="1834888" cy="2300000"/>
           </a:xfrm>
           <a:prstGeom prst="rect">
             <a:avLst/>
@@ -15811,6 +15811,34 @@
                           <a:latin typeface="+mn-lt"/>
                         </a:rPr>
                         <a:t>5) 배치도 자동 인식 — 지금은 배치도를 밑그림으로 깔고 따라 그립니다. 실물 배치도로 정확도를 잰 뒤 모델 초안 생성을 붙입니다.</a:t>
+                      </a:r>
+                    </a:p>
+                    <a:p>
+                      <a:pPr marL="0" marR="0" lvl="0" indent="0" algn="just" defTabSz="914400" rtl="0" eaLnBrk="1" fontAlgn="auto" latinLnBrk="1" hangingPunct="1">
+                        <a:lnSpc>
+                          <a:spcPct val="100000"/>
+                        </a:lnSpc>
+                        <a:spcBef>
+                          <a:spcPts val="0"/>
+                        </a:spcBef>
+                        <a:spcAft>
+                          <a:spcPts val="0"/>
+                        </a:spcAft>
+                        <a:buClrTx/>
+                        <a:buSzTx/>
+                        <a:buFontTx/>
+                        <a:buNone/>
+                        <a:tabLst/>
+                        <a:defRPr/>
+                      </a:pPr>
+                      <a:r>
+                        <a:rPr lang="en-US" altLang="ko-KR" sz="1000">
+                          <a:solidFill>
+                            <a:srgbClr val="1A1A1A"/>
+                          </a:solidFill>
+                          <a:latin typeface="+mn-lt"/>
+                        </a:rPr>
+                        <a:t>6) 지자체 실무 채널 — 축제 담당 부서와 접촉해 추진결과 보고·차년도 기본계획의 실물 서식과 결재 리드타임(개최 약 7개월 전)을 확인했습니다. 비공개 자료라 수치·원문은 인용하지 않고, 공개 출처로 재확인된 값만 화면에 씁니다(접촉 기록은 저장소 docs/interviews.md). 다음 회차 기획 주기에 맞춰 1개 지자체 파일럿을 목표로 합니다.</a:t>
                       </a:r>
                     </a:p>
                     <a:p>

--- a/docs/제출양식/기능설명서_기획안팩트체크_작성본.pptx
+++ b/docs/제출양식/기능설명서_기획안팩트체크_작성본.pptx
@@ -1709,11 +1709,19 @@
                     <a:bodyPr/>
                     <a:lstStyle/>
                     <a:p>
+                      <a:pPr>
+                        <a:lnSpc>
+                          <a:spcPct val="115000"/>
+                        </a:lnSpc>
+                      </a:pPr>
                       <a:r>
                         <a:rPr>
                           <a:solidFill>
                             <a:srgbClr val="1A1A1A"/>
                           </a:solidFill>
+                          <a:latin typeface="Noto Sans KR"/>
+                          <a:ea typeface="Noto Sans KR"/>
+                          <a:cs typeface="Noto Sans KR"/>
                         </a:rPr>
                         <a:t>장준용 (숭실대학교 AI소프트웨어학부)</a:t>
                       </a:r>
@@ -1819,13 +1827,21 @@
                     <a:bodyPr/>
                     <a:lstStyle/>
                     <a:p>
+                      <a:pPr>
+                        <a:lnSpc>
+                          <a:spcPct val="115000"/>
+                        </a:lnSpc>
+                      </a:pPr>
                       <a:r>
                         <a:rPr>
                           <a:solidFill>
                             <a:srgbClr val="1A1A1A"/>
                           </a:solidFill>
-                        </a:rPr>
-                        <a:t>기획안 팩트체크 — 지자체 축제 예산 심의용 실측 검증</a:t>
+                          <a:latin typeface="Noto Sans KR"/>
+                          <a:ea typeface="Noto Sans KR"/>
+                          <a:cs typeface="Noto Sans KR"/>
+                        </a:rPr>
+                        <a:t>기획안 팩트체크 - 지자체 축제 예산 심의용 실측 검증</a:t>
                       </a:r>
                     </a:p>
                   </a:txBody>
@@ -1867,6 +1883,42 @@
           </a:graphicData>
         </a:graphic>
       </p:graphicFrame>
+      <p:sp>
+        <p:nvSpPr>
+          <p:cNvPr id="7" name="TextBox 6"/>
+          <p:cNvSpPr txBox="1"/>
+          <p:nvPr/>
+        </p:nvSpPr>
+        <p:spPr>
+          <a:xfrm>
+            <a:off x="527397" y="5765897"/>
+            <a:ext cx="6712988" cy="330000"/>
+          </a:xfrm>
+          <a:prstGeom prst="rect">
+            <a:avLst/>
+          </a:prstGeom>
+          <a:noFill/>
+        </p:spPr>
+        <p:txBody>
+          <a:bodyPr wrap="none">
+            <a:spAutoFit/>
+          </a:bodyPr>
+          <a:lstStyle/>
+          <a:p>
+            <a:r>
+              <a:rPr sz="1100" u="none">
+                <a:solidFill>
+                  <a:srgbClr val="FFFFFF"/>
+                </a:solidFill>
+                <a:latin typeface="Noto Sans KR"/>
+                <a:ea typeface="Noto Sans KR"/>
+                <a:cs typeface="Noto Sans KR"/>
+              </a:rPr>
+              <a:t>oneshot-mvp.vercel.app  ·  로그인·설치 없음  ·  한국관광공사 TourAPI(KT 이동통신) 일별 실측 기반</a:t>
+            </a:r>
+          </a:p>
+        </p:txBody>
+      </p:sp>
     </p:spTree>
     <p:extLst>
       <p:ext uri="{BB962C8B-B14F-4D97-AF65-F5344CB8AC3E}">
@@ -2237,7 +2289,7 @@
                     <a:p>
                       <a:pPr marL="0" marR="0" lvl="0" indent="0" algn="ctr" defTabSz="914400" rtl="0" eaLnBrk="1" fontAlgn="auto" latinLnBrk="1" hangingPunct="1">
                         <a:lnSpc>
-                          <a:spcPct val="100000"/>
+                          <a:spcPct val="115000"/>
                         </a:lnSpc>
                         <a:spcBef>
                           <a:spcPts val="0"/>
@@ -2257,7 +2309,9 @@
                           <a:solidFill>
                             <a:srgbClr val="1A1A1A"/>
                           </a:solidFill>
-                          <a:latin typeface="+mn-lt"/>
+                          <a:latin typeface="Noto Sans KR"/>
+                          <a:ea typeface="Noto Sans KR"/>
+                          <a:cs typeface="Noto Sans KR"/>
                         </a:rPr>
                         <a:t/>
                       </a:r>
@@ -2321,7 +2375,13 @@
                   <a:txBody>
                     <a:bodyPr/>
                     <a:lstStyle/>
-                    <a:p/>
+                    <a:p>
+                      <a:pPr>
+                        <a:lnSpc>
+                          <a:spcPct val="115000"/>
+                        </a:lnSpc>
+                      </a:pPr>
+                    </a:p>
                   </a:txBody>
                   <a:tcPr anchor="ctr">
                     <a:lnL w="12700" cap="flat" cmpd="sng" algn="ctr">
@@ -2375,7 +2435,13 @@
                   <a:txBody>
                     <a:bodyPr/>
                     <a:lstStyle/>
-                    <a:p/>
+                    <a:p>
+                      <a:pPr>
+                        <a:lnSpc>
+                          <a:spcPct val="115000"/>
+                        </a:lnSpc>
+                      </a:pPr>
+                    </a:p>
                   </a:txBody>
                   <a:tcPr anchor="ctr">
                     <a:lnL w="12700" cap="flat" cmpd="sng" algn="ctr">
@@ -2429,7 +2495,13 @@
                   <a:txBody>
                     <a:bodyPr/>
                     <a:lstStyle/>
-                    <a:p/>
+                    <a:p>
+                      <a:pPr>
+                        <a:lnSpc>
+                          <a:spcPct val="115000"/>
+                        </a:lnSpc>
+                      </a:pPr>
+                    </a:p>
                   </a:txBody>
                   <a:tcPr anchor="ctr">
                     <a:lnL w="12700" cap="flat" cmpd="sng" algn="ctr">
@@ -2493,7 +2565,7 @@
                     <a:p>
                       <a:pPr marL="0" marR="0" lvl="0" indent="0" algn="ctr" defTabSz="914400" rtl="0" eaLnBrk="1" fontAlgn="auto" latinLnBrk="1" hangingPunct="1">
                         <a:lnSpc>
-                          <a:spcPct val="100000"/>
+                          <a:spcPct val="115000"/>
                         </a:lnSpc>
                         <a:spcBef>
                           <a:spcPts val="0"/>
@@ -2513,9 +2585,11 @@
                           <a:solidFill>
                             <a:srgbClr val="1A1A1A"/>
                           </a:solidFill>
-                          <a:latin typeface="+mn-lt"/>
-                        </a:rPr>
-                        <a:t>① 판정 화면 맨 위 라벨(통과/주의/과대/과소/상한 초과/근거 없음)과 한 문단 판정문</a:t>
+                          <a:latin typeface="Noto Sans KR"/>
+                          <a:ea typeface="Noto Sans KR"/>
+                          <a:cs typeface="Noto Sans KR"/>
+                        </a:rPr>
+                        <a:t>- 맨 위 라벨과 한 문단 판정문</a:t>
                       </a:r>
                       <a:endParaRPr lang="en-US" altLang="ko-KR" b="0">
                         <a:solidFill>
@@ -2577,13 +2651,21 @@
                     <a:bodyPr/>
                     <a:lstStyle/>
                     <a:p>
+                      <a:pPr>
+                        <a:lnSpc>
+                          <a:spcPct val="115000"/>
+                        </a:lnSpc>
+                      </a:pPr>
                       <a:r>
                         <a:rPr sz="1000">
                           <a:solidFill>
                             <a:srgbClr val="1A1A1A"/>
                           </a:solidFill>
-                        </a:rPr>
-                        <a:t>② 판정표: 1단계 모집단 상한 → 2단계 순증분 → 3단계 동일 정의 배수(임계값 표기)</a:t>
+                          <a:latin typeface="Noto Sans KR"/>
+                          <a:ea typeface="Noto Sans KR"/>
+                          <a:cs typeface="Noto Sans KR"/>
+                        </a:rPr>
+                        <a:t>- 판정표 - 모집단 상한 → 순증분 → 동일 정의 배수</a:t>
                       </a:r>
                     </a:p>
                   </a:txBody>
@@ -2640,13 +2722,21 @@
                     <a:bodyPr/>
                     <a:lstStyle/>
                     <a:p>
+                      <a:pPr>
+                        <a:lnSpc>
+                          <a:spcPct val="115000"/>
+                        </a:lnSpc>
+                      </a:pPr>
                       <a:r>
                         <a:rPr sz="1000">
                           <a:solidFill>
                             <a:srgbClr val="1A1A1A"/>
                           </a:solidFill>
-                        </a:rPr>
-                        <a:t>③ 내년 배수 구간 카드(평균·최대일) + 또래 구간 + 자기 이력 연도별 배수·축제 신호</a:t>
+                          <a:latin typeface="Noto Sans KR"/>
+                          <a:ea typeface="Noto Sans KR"/>
+                          <a:cs typeface="Noto Sans KR"/>
+                        </a:rPr>
+                        <a:t>- 내년 배수 구간 = 지난 회차 배수의 범위 (예측값 아님)</a:t>
                       </a:r>
                     </a:p>
                   </a:txBody>
@@ -2703,13 +2793,21 @@
                     <a:bodyPr/>
                     <a:lstStyle/>
                     <a:p>
+                      <a:pPr>
+                        <a:lnSpc>
+                          <a:spcPct val="115000"/>
+                        </a:lnSpc>
+                      </a:pPr>
                       <a:r>
                         <a:rPr sz="1000">
                           <a:solidFill>
                             <a:srgbClr val="1A1A1A"/>
                           </a:solidFill>
-                        </a:rPr>
-                        <a:t>④ 이력이 없으면 "근거 없음"과 또래 구간만 낸다 — 지어내지 않는다</a:t>
+                          <a:latin typeface="Noto Sans KR"/>
+                          <a:ea typeface="Noto Sans KR"/>
+                          <a:cs typeface="Noto Sans KR"/>
+                        </a:rPr>
+                        <a:t>- 이력이 없으면 근거 없음과 또래 구간만 낸다</a:t>
                       </a:r>
                     </a:p>
                   </a:txBody>
@@ -2817,12 +2915,19 @@
                     <a:bodyPr/>
                     <a:lstStyle/>
                     <a:p>
-                      <a:pPr algn="ctr" latinLnBrk="1"/>
+                      <a:pPr algn="ctr" latinLnBrk="1">
+                        <a:lnSpc>
+                          <a:spcPct val="115000"/>
+                        </a:lnSpc>
+                      </a:pPr>
                       <a:r>
                         <a:rPr lang="ko-KR" altLang="en-US" b="1" dirty="0" smtClean="0">
                           <a:solidFill>
                             <a:srgbClr val="1A1A1A"/>
                           </a:solidFill>
+                          <a:latin typeface="Noto Sans KR"/>
+                          <a:ea typeface="Noto Sans KR"/>
+                          <a:cs typeface="Noto Sans KR"/>
                         </a:rPr>
                         <a:t>해시태그2</a:t>
                       </a:r>
@@ -2888,12 +2993,19 @@
                     <a:bodyPr/>
                     <a:lstStyle/>
                     <a:p>
-                      <a:pPr latinLnBrk="1"/>
-                      <a:r>
-                        <a:rPr lang="en-US" altLang="ko-KR" b="0" dirty="0" smtClean="0" sz="1200">
+                      <a:pPr latinLnBrk="1">
+                        <a:lnSpc>
+                          <a:spcPct val="115000"/>
+                        </a:lnSpc>
+                      </a:pPr>
+                      <a:r>
+                        <a:rPr lang="en-US" altLang="ko-KR" b="0" dirty="0" smtClean="0" sz="1100">
                           <a:solidFill>
                             <a:srgbClr val="1A1A1A"/>
                           </a:solidFill>
+                          <a:latin typeface="Noto Sans KR"/>
+                          <a:ea typeface="Noto Sans KR"/>
+                          <a:cs typeface="Noto Sans KR"/>
                         </a:rPr>
                         <a:t>#사전 수요 예측</a:t>
                       </a:r>
@@ -2966,7 +3078,7 @@
                     <a:p>
                       <a:pPr marL="0" marR="0" lvl="0" indent="0" algn="ctr" defTabSz="914400" rtl="0" eaLnBrk="1" fontAlgn="auto" latinLnBrk="1" hangingPunct="1">
                         <a:lnSpc>
-                          <a:spcPct val="100000"/>
+                          <a:spcPct val="115000"/>
                         </a:lnSpc>
                         <a:spcBef>
                           <a:spcPts val="0"/>
@@ -2986,6 +3098,9 @@
                           <a:solidFill>
                             <a:srgbClr val="1A1A1A"/>
                           </a:solidFill>
+                          <a:latin typeface="Noto Sans KR"/>
+                          <a:ea typeface="Noto Sans KR"/>
+                          <a:cs typeface="Noto Sans KR"/>
                         </a:rPr>
                         <a:t>연계기능2</a:t>
                       </a:r>
@@ -3051,12 +3166,19 @@
                     <a:bodyPr/>
                     <a:lstStyle/>
                     <a:p>
-                      <a:pPr latinLnBrk="1"/>
-                      <a:r>
-                        <a:rPr lang="en-US" altLang="ko-KR" b="0" dirty="0" smtClean="0" sz="1200">
+                      <a:pPr latinLnBrk="1">
+                        <a:lnSpc>
+                          <a:spcPct val="115000"/>
+                        </a:lnSpc>
+                      </a:pPr>
+                      <a:r>
+                        <a:rPr lang="en-US" altLang="ko-KR" b="0" dirty="0" smtClean="0" sz="1100">
                           <a:solidFill>
                             <a:srgbClr val="1A1A1A"/>
                           </a:solidFill>
+                          <a:latin typeface="Noto Sans KR"/>
+                          <a:ea typeface="Noto Sans KR"/>
+                          <a:cs typeface="Noto Sans KR"/>
                         </a:rPr>
                         <a:t>예상 방문객 3단 판정과 내년 배수 구간</a:t>
                       </a:r>
@@ -3127,12 +3249,19 @@
                     <a:bodyPr/>
                     <a:lstStyle/>
                     <a:p>
-                      <a:pPr algn="ctr" latinLnBrk="1"/>
+                      <a:pPr algn="ctr" latinLnBrk="1">
+                        <a:lnSpc>
+                          <a:spcPct val="115000"/>
+                        </a:lnSpc>
+                      </a:pPr>
                       <a:r>
                         <a:rPr lang="ko-KR" altLang="en-US" b="1" dirty="0" err="1" smtClean="0">
                           <a:solidFill>
                             <a:srgbClr val="1A1A1A"/>
                           </a:solidFill>
+                          <a:latin typeface="Noto Sans KR"/>
+                          <a:ea typeface="Noto Sans KR"/>
+                          <a:cs typeface="Noto Sans KR"/>
                         </a:rPr>
                         <a:t>기능설명2</a:t>
                       </a:r>
@@ -3200,7 +3329,7 @@
                     <a:p>
                       <a:pPr marL="0" marR="0" lvl="0" indent="0" algn="l" defTabSz="914400" rtl="0" eaLnBrk="1" fontAlgn="auto" latinLnBrk="1" hangingPunct="1">
                         <a:lnSpc>
-                          <a:spcPct val="100000"/>
+                          <a:spcPct val="115000"/>
                         </a:lnSpc>
                         <a:spcBef>
                           <a:spcPts val="0"/>
@@ -3220,6 +3349,9 @@
                           <a:solidFill>
                             <a:srgbClr val="1A1A1A"/>
                           </a:solidFill>
+                          <a:latin typeface="Noto Sans KR"/>
+                          <a:ea typeface="Noto Sans KR"/>
+                          <a:cs typeface="Noto Sans KR"/>
                         </a:rPr>
                         <a:t>기획안의 숫자를 이 축제 자신의 지난 회차 실측과 같은 자로 세 번 재고, 내년 배수 구간과 흥행 가능성의 위치를 냅니다.</a:t>
                       </a:r>
@@ -3290,7 +3422,7 @@
       </p:graphicFrame>
       <p:pic>
         <p:nvPicPr>
-          <p:cNvPr id="7" name="Picture 6" descr="f1_1_home.png"/>
+          <p:cNvPr id="7" name="Picture 6" descr="f2_1_verdict.png"/>
           <p:cNvPicPr>
             <a:picLocks noChangeAspect="1"/>
           </p:cNvPicPr>
@@ -3304,8 +3436,8 @@
         </p:blipFill>
         <p:spPr>
           <a:xfrm>
-            <a:off x="352952" y="3379938"/>
-            <a:ext cx="2756577" cy="1570729"/>
+            <a:off x="356789" y="3074071"/>
+            <a:ext cx="2748903" cy="2182463"/>
           </a:xfrm>
           <a:prstGeom prst="rect">
             <a:avLst/>
@@ -3314,7 +3446,7 @@
       </p:pic>
       <p:pic>
         <p:nvPicPr>
-          <p:cNvPr id="8" name="Picture 7" descr="f1_2_underlay.png"/>
+          <p:cNvPr id="8" name="Picture 7" descr="f2_2_stages.png"/>
           <p:cNvPicPr>
             <a:picLocks noChangeAspect="1"/>
           </p:cNvPicPr>
@@ -3328,8 +3460,8 @@
         </p:blipFill>
         <p:spPr>
           <a:xfrm>
-            <a:off x="4033808" y="3074071"/>
-            <a:ext cx="1108019" cy="2182463"/>
+            <a:off x="3212315" y="3074071"/>
+            <a:ext cx="2751004" cy="2182463"/>
           </a:xfrm>
           <a:prstGeom prst="rect">
             <a:avLst/>
@@ -3338,7 +3470,7 @@
       </p:pic>
       <p:pic>
         <p:nvPicPr>
-          <p:cNvPr id="9" name="Picture 8" descr="f1_3_venue.png"/>
+          <p:cNvPr id="9" name="Picture 8" descr="f2_3_range.png"/>
           <p:cNvPicPr>
             <a:picLocks noChangeAspect="1"/>
           </p:cNvPicPr>
@@ -3352,8 +3484,8 @@
         </p:blipFill>
         <p:spPr>
           <a:xfrm>
-            <a:off x="6341171" y="3074071"/>
-            <a:ext cx="2206446" cy="2182463"/>
+            <a:off x="6068951" y="3074071"/>
+            <a:ext cx="2750886" cy="2182463"/>
           </a:xfrm>
           <a:prstGeom prst="rect">
             <a:avLst/>
@@ -3362,7 +3494,7 @@
       </p:pic>
       <p:pic>
         <p:nvPicPr>
-          <p:cNvPr id="10" name="Picture 9" descr="f1_4_panel.png"/>
+          <p:cNvPr id="10" name="Picture 9" descr="f2_4_first.png"/>
           <p:cNvPicPr>
             <a:picLocks noChangeAspect="1"/>
           </p:cNvPicPr>
@@ -3376,104 +3508,8 @@
         </p:blipFill>
         <p:spPr>
           <a:xfrm>
-            <a:off x="9669616" y="3074071"/>
-            <a:ext cx="1262710" cy="2182463"/>
-          </a:xfrm>
-          <a:prstGeom prst="rect">
-            <a:avLst/>
-          </a:prstGeom>
-        </p:spPr>
-      </p:pic>
-      <p:pic>
-        <p:nvPicPr>
-          <p:cNvPr id="11" name="Picture 10" descr="f2_1_verdict.png"/>
-          <p:cNvPicPr>
-            <a:picLocks noChangeAspect="1"/>
-          </p:cNvPicPr>
-          <p:nvPr/>
-        </p:nvPicPr>
-        <p:blipFill>
-          <a:blip r:embed="rId2"/>
-          <a:stretch>
-            <a:fillRect/>
-          </a:stretch>
-        </p:blipFill>
-        <p:spPr>
-          <a:xfrm>
-            <a:off x="525644" y="3074071"/>
-            <a:ext cx="2411192" cy="2182463"/>
-          </a:xfrm>
-          <a:prstGeom prst="rect">
-            <a:avLst/>
-          </a:prstGeom>
-        </p:spPr>
-      </p:pic>
-      <p:pic>
-        <p:nvPicPr>
-          <p:cNvPr id="12" name="Picture 11" descr="f2_2_stages.png"/>
-          <p:cNvPicPr>
-            <a:picLocks noChangeAspect="1"/>
-          </p:cNvPicPr>
-          <p:nvPr/>
-        </p:nvPicPr>
-        <p:blipFill>
-          <a:blip r:embed="rId3"/>
-          <a:stretch>
-            <a:fillRect/>
-          </a:stretch>
-        </p:blipFill>
-        <p:spPr>
-          <a:xfrm>
-            <a:off x="3682632" y="3074071"/>
-            <a:ext cx="1810371" cy="2182463"/>
-          </a:xfrm>
-          <a:prstGeom prst="rect">
-            <a:avLst/>
-          </a:prstGeom>
-        </p:spPr>
-      </p:pic>
-      <p:pic>
-        <p:nvPicPr>
-          <p:cNvPr id="13" name="Picture 12" descr="f2_3_range.png"/>
-          <p:cNvPicPr>
-            <a:picLocks noChangeAspect="1"/>
-          </p:cNvPicPr>
-          <p:nvPr/>
-        </p:nvPicPr>
-        <p:blipFill>
-          <a:blip r:embed="rId4"/>
-          <a:stretch>
-            <a:fillRect/>
-          </a:stretch>
-        </p:blipFill>
-        <p:spPr>
-          <a:xfrm>
-            <a:off x="6066106" y="3513748"/>
-            <a:ext cx="2756577" cy="1303109"/>
-          </a:xfrm>
-          <a:prstGeom prst="rect">
-            <a:avLst/>
-          </a:prstGeom>
-        </p:spPr>
-      </p:pic>
-      <p:pic>
-        <p:nvPicPr>
-          <p:cNvPr id="14" name="Picture 13" descr="f2_4_first.png"/>
-          <p:cNvPicPr>
-            <a:picLocks noChangeAspect="1"/>
-          </p:cNvPicPr>
-          <p:nvPr/>
-        </p:nvPicPr>
-        <p:blipFill>
-          <a:blip r:embed="rId5"/>
-          <a:stretch>
-            <a:fillRect/>
-          </a:stretch>
-        </p:blipFill>
-        <p:spPr>
-          <a:xfrm>
-            <a:off x="9687457" y="3074071"/>
-            <a:ext cx="1227029" cy="2182463"/>
+            <a:off x="8925528" y="3074071"/>
+            <a:ext cx="2750886" cy="2182463"/>
           </a:xfrm>
           <a:prstGeom prst="rect">
             <a:avLst/>
@@ -3838,7 +3874,7 @@
                     <a:p>
                       <a:pPr marL="0" marR="0" lvl="0" indent="0" algn="ctr" defTabSz="914400" rtl="0" eaLnBrk="1" fontAlgn="auto" latinLnBrk="1" hangingPunct="1">
                         <a:lnSpc>
-                          <a:spcPct val="100000"/>
+                          <a:spcPct val="115000"/>
                         </a:lnSpc>
                         <a:spcBef>
                           <a:spcPts val="0"/>
@@ -3858,7 +3894,9 @@
                           <a:solidFill>
                             <a:srgbClr val="1A1A1A"/>
                           </a:solidFill>
-                          <a:latin typeface="+mn-lt"/>
+                          <a:latin typeface="Noto Sans KR"/>
+                          <a:ea typeface="Noto Sans KR"/>
+                          <a:cs typeface="Noto Sans KR"/>
                         </a:rPr>
                         <a:t/>
                       </a:r>
@@ -3922,7 +3960,13 @@
                   <a:txBody>
                     <a:bodyPr/>
                     <a:lstStyle/>
-                    <a:p/>
+                    <a:p>
+                      <a:pPr>
+                        <a:lnSpc>
+                          <a:spcPct val="115000"/>
+                        </a:lnSpc>
+                      </a:pPr>
+                    </a:p>
                   </a:txBody>
                   <a:tcPr anchor="ctr">
                     <a:lnL w="12700" cap="flat" cmpd="sng" algn="ctr">
@@ -3976,7 +4020,13 @@
                   <a:txBody>
                     <a:bodyPr/>
                     <a:lstStyle/>
-                    <a:p/>
+                    <a:p>
+                      <a:pPr>
+                        <a:lnSpc>
+                          <a:spcPct val="115000"/>
+                        </a:lnSpc>
+                      </a:pPr>
+                    </a:p>
                   </a:txBody>
                   <a:tcPr anchor="ctr">
                     <a:lnL w="12700" cap="flat" cmpd="sng" algn="ctr">
@@ -4030,7 +4080,13 @@
                   <a:txBody>
                     <a:bodyPr/>
                     <a:lstStyle/>
-                    <a:p/>
+                    <a:p>
+                      <a:pPr>
+                        <a:lnSpc>
+                          <a:spcPct val="115000"/>
+                        </a:lnSpc>
+                      </a:pPr>
+                    </a:p>
                   </a:txBody>
                   <a:tcPr anchor="ctr">
                     <a:lnL w="12700" cap="flat" cmpd="sng" algn="ctr">
@@ -4094,7 +4150,7 @@
                     <a:p>
                       <a:pPr marL="0" marR="0" lvl="0" indent="0" algn="ctr" defTabSz="914400" rtl="0" eaLnBrk="1" fontAlgn="auto" latinLnBrk="1" hangingPunct="1">
                         <a:lnSpc>
-                          <a:spcPct val="100000"/>
+                          <a:spcPct val="115000"/>
                         </a:lnSpc>
                         <a:spcBef>
                           <a:spcPts val="0"/>
@@ -4114,9 +4170,11 @@
                           <a:solidFill>
                             <a:srgbClr val="1A1A1A"/>
                           </a:solidFill>
-                          <a:latin typeface="+mn-lt"/>
-                        </a:rPr>
-                        <a:t>① 판정문 아래 보완 문장과 "이 판정이 말하지 않는 것" 단서</a:t>
+                          <a:latin typeface="Noto Sans KR"/>
+                          <a:ea typeface="Noto Sans KR"/>
+                          <a:cs typeface="Noto Sans KR"/>
+                        </a:rPr>
+                        <a:t>- 라벨마다 다음에 할 일을 문장으로</a:t>
                       </a:r>
                       <a:endParaRPr lang="en-US" altLang="ko-KR" b="0">
                         <a:solidFill>
@@ -4178,13 +4236,21 @@
                     <a:bodyPr/>
                     <a:lstStyle/>
                     <a:p>
+                      <a:pPr>
+                        <a:lnSpc>
+                          <a:spcPct val="115000"/>
+                        </a:lnSpc>
+                      </a:pPr>
                       <a:r>
                         <a:rPr sz="1000">
                           <a:solidFill>
                             <a:srgbClr val="1A1A1A"/>
                           </a:solidFill>
-                        </a:rPr>
-                        <a:t>② 1인당 예산 대조(기획안 기준 vs 작년 실측 순증 기준) · 개최 기간·요일 판정</a:t>
+                          <a:latin typeface="Noto Sans KR"/>
+                          <a:ea typeface="Noto Sans KR"/>
+                          <a:cs typeface="Noto Sans KR"/>
+                        </a:rPr>
+                        <a:t>- 1인당 예산 대조 (기획안 기준 vs 실측 순증)</a:t>
                       </a:r>
                     </a:p>
                   </a:txBody>
@@ -4241,13 +4307,21 @@
                     <a:bodyPr/>
                     <a:lstStyle/>
                     <a:p>
+                      <a:pPr>
+                        <a:lnSpc>
+                          <a:spcPct val="115000"/>
+                        </a:lnSpc>
+                      </a:pPr>
                       <a:r>
                         <a:rPr sz="1000">
                           <a:solidFill>
                             <a:srgbClr val="1A1A1A"/>
                           </a:solidFill>
-                        </a:rPr>
-                        <a:t>③ 귀속 경고(작년 반경 50km 다른 축제, 공사 API 실시간)</a:t>
+                          <a:latin typeface="Noto Sans KR"/>
+                          <a:ea typeface="Noto Sans KR"/>
+                          <a:cs typeface="Noto Sans KR"/>
+                        </a:rPr>
+                        <a:t>- 귀속 경고 - 반경 50km 다른 축제</a:t>
                       </a:r>
                     </a:p>
                   </a:txBody>
@@ -4304,13 +4378,21 @@
                     <a:bodyPr/>
                     <a:lstStyle/>
                     <a:p>
+                      <a:pPr>
+                        <a:lnSpc>
+                          <a:spcPct val="115000"/>
+                        </a:lnSpc>
+                      </a:pPr>
                       <a:r>
                         <a:rPr sz="1000">
                           <a:solidFill>
                             <a:srgbClr val="1A1A1A"/>
                           </a:solidFill>
-                        </a:rPr>
-                        <a:t>④ [검증 보고서 두 장] → 브라우저 인쇄로 PDF, 결재에 첨부</a:t>
+                          <a:latin typeface="Noto Sans KR"/>
+                          <a:ea typeface="Noto Sans KR"/>
+                          <a:cs typeface="Noto Sans KR"/>
+                        </a:rPr>
+                        <a:t>- [검증 보고서 두 장] → 인쇄로 PDF, 결재에 첨부</a:t>
                       </a:r>
                     </a:p>
                   </a:txBody>
@@ -4418,12 +4500,19 @@
                     <a:bodyPr/>
                     <a:lstStyle/>
                     <a:p>
-                      <a:pPr algn="ctr" latinLnBrk="1"/>
+                      <a:pPr algn="ctr" latinLnBrk="1">
+                        <a:lnSpc>
+                          <a:spcPct val="115000"/>
+                        </a:lnSpc>
+                      </a:pPr>
                       <a:r>
                         <a:rPr lang="ko-KR" altLang="en-US" b="1" dirty="0" smtClean="0">
                           <a:solidFill>
                             <a:srgbClr val="1A1A1A"/>
                           </a:solidFill>
+                          <a:latin typeface="Noto Sans KR"/>
+                          <a:ea typeface="Noto Sans KR"/>
+                          <a:cs typeface="Noto Sans KR"/>
                         </a:rPr>
                         <a:t>해시태그3</a:t>
                       </a:r>
@@ -4489,12 +4578,19 @@
                     <a:bodyPr/>
                     <a:lstStyle/>
                     <a:p>
-                      <a:pPr latinLnBrk="1"/>
-                      <a:r>
-                        <a:rPr lang="en-US" altLang="ko-KR" b="0" dirty="0" smtClean="0" sz="1200">
+                      <a:pPr latinLnBrk="1">
+                        <a:lnSpc>
+                          <a:spcPct val="115000"/>
+                        </a:lnSpc>
+                      </a:pPr>
+                      <a:r>
+                        <a:rPr lang="en-US" altLang="ko-KR" b="0" dirty="0" smtClean="0" sz="1100">
                           <a:solidFill>
                             <a:srgbClr val="1A1A1A"/>
                           </a:solidFill>
+                          <a:latin typeface="Noto Sans KR"/>
+                          <a:ea typeface="Noto Sans KR"/>
+                          <a:cs typeface="Noto Sans KR"/>
                         </a:rPr>
                         <a:t>#보완 피드백 제공</a:t>
                       </a:r>
@@ -4567,7 +4663,7 @@
                     <a:p>
                       <a:pPr marL="0" marR="0" lvl="0" indent="0" algn="ctr" defTabSz="914400" rtl="0" eaLnBrk="1" fontAlgn="auto" latinLnBrk="1" hangingPunct="1">
                         <a:lnSpc>
-                          <a:spcPct val="100000"/>
+                          <a:spcPct val="115000"/>
                         </a:lnSpc>
                         <a:spcBef>
                           <a:spcPts val="0"/>
@@ -4587,6 +4683,9 @@
                           <a:solidFill>
                             <a:srgbClr val="1A1A1A"/>
                           </a:solidFill>
+                          <a:latin typeface="Noto Sans KR"/>
+                          <a:ea typeface="Noto Sans KR"/>
+                          <a:cs typeface="Noto Sans KR"/>
                         </a:rPr>
                         <a:t>연계기능3</a:t>
                       </a:r>
@@ -4652,12 +4751,19 @@
                     <a:bodyPr/>
                     <a:lstStyle/>
                     <a:p>
-                      <a:pPr latinLnBrk="1"/>
-                      <a:r>
-                        <a:rPr lang="en-US" altLang="ko-KR" b="0" dirty="0" smtClean="0" sz="1200">
+                      <a:pPr latinLnBrk="1">
+                        <a:lnSpc>
+                          <a:spcPct val="115000"/>
+                        </a:lnSpc>
+                      </a:pPr>
+                      <a:r>
+                        <a:rPr lang="en-US" altLang="ko-KR" b="0" dirty="0" smtClean="0" sz="1100">
                           <a:solidFill>
                             <a:srgbClr val="1A1A1A"/>
                           </a:solidFill>
+                          <a:latin typeface="Noto Sans KR"/>
+                          <a:ea typeface="Noto Sans KR"/>
+                          <a:cs typeface="Noto Sans KR"/>
                         </a:rPr>
                         <a:t>보완 문장에서 검증 보고서까지</a:t>
                       </a:r>
@@ -4728,12 +4834,19 @@
                     <a:bodyPr/>
                     <a:lstStyle/>
                     <a:p>
-                      <a:pPr algn="ctr" latinLnBrk="1"/>
+                      <a:pPr algn="ctr" latinLnBrk="1">
+                        <a:lnSpc>
+                          <a:spcPct val="115000"/>
+                        </a:lnSpc>
+                      </a:pPr>
                       <a:r>
                         <a:rPr lang="ko-KR" altLang="en-US" b="1" dirty="0" err="1" smtClean="0">
                           <a:solidFill>
                             <a:srgbClr val="1A1A1A"/>
                           </a:solidFill>
+                          <a:latin typeface="Noto Sans KR"/>
+                          <a:ea typeface="Noto Sans KR"/>
+                          <a:cs typeface="Noto Sans KR"/>
                         </a:rPr>
                         <a:t>기능설명3</a:t>
                       </a:r>
@@ -4801,7 +4914,7 @@
                     <a:p>
                       <a:pPr marL="0" marR="0" lvl="0" indent="0" algn="l" defTabSz="914400" rtl="0" eaLnBrk="1" fontAlgn="auto" latinLnBrk="1" hangingPunct="1">
                         <a:lnSpc>
-                          <a:spcPct val="100000"/>
+                          <a:spcPct val="115000"/>
                         </a:lnSpc>
                         <a:spcBef>
                           <a:spcPts val="0"/>
@@ -4821,6 +4934,9 @@
                           <a:solidFill>
                             <a:srgbClr val="1A1A1A"/>
                           </a:solidFill>
+                          <a:latin typeface="Noto Sans KR"/>
+                          <a:ea typeface="Noto Sans KR"/>
+                          <a:cs typeface="Noto Sans KR"/>
                         </a:rPr>
                         <a:t>라벨마다 다음에 할 일을 문장으로 내고, 예산·기간·경쟁 축제를 대조한 뒤 결재 첨부용 A4 두 장으로 인쇄합니다.</a:t>
                       </a:r>
@@ -4891,7 +5007,7 @@
       </p:graphicFrame>
       <p:pic>
         <p:nvPicPr>
-          <p:cNvPr id="7" name="Picture 6" descr="f1_1_home.png"/>
+          <p:cNvPr id="7" name="Picture 6" descr="f3_1_other.png"/>
           <p:cNvPicPr>
             <a:picLocks noChangeAspect="1"/>
           </p:cNvPicPr>
@@ -4905,8 +5021,8 @@
         </p:blipFill>
         <p:spPr>
           <a:xfrm>
-            <a:off x="352952" y="3379938"/>
-            <a:ext cx="2756577" cy="1570729"/>
+            <a:off x="356111" y="3074071"/>
+            <a:ext cx="2750258" cy="2182463"/>
           </a:xfrm>
           <a:prstGeom prst="rect">
             <a:avLst/>
@@ -4915,7 +5031,7 @@
       </p:pic>
       <p:pic>
         <p:nvPicPr>
-          <p:cNvPr id="8" name="Picture 7" descr="f1_2_underlay.png"/>
+          <p:cNvPr id="8" name="Picture 7" descr="f3_2_budget.png"/>
           <p:cNvPicPr>
             <a:picLocks noChangeAspect="1"/>
           </p:cNvPicPr>
@@ -4929,8 +5045,8 @@
         </p:blipFill>
         <p:spPr>
           <a:xfrm>
-            <a:off x="4033808" y="3074071"/>
-            <a:ext cx="1108019" cy="2182463"/>
+            <a:off x="3212374" y="3074071"/>
+            <a:ext cx="2750886" cy="2182463"/>
           </a:xfrm>
           <a:prstGeom prst="rect">
             <a:avLst/>
@@ -4939,7 +5055,7 @@
       </p:pic>
       <p:pic>
         <p:nvPicPr>
-          <p:cNvPr id="9" name="Picture 8" descr="f1_3_venue.png"/>
+          <p:cNvPr id="9" name="Picture 8" descr="f3_3_attrib.png"/>
           <p:cNvPicPr>
             <a:picLocks noChangeAspect="1"/>
           </p:cNvPicPr>
@@ -4953,8 +5069,8 @@
         </p:blipFill>
         <p:spPr>
           <a:xfrm>
-            <a:off x="6341171" y="3074071"/>
-            <a:ext cx="2206446" cy="2182463"/>
+            <a:off x="6071159" y="3074071"/>
+            <a:ext cx="2746470" cy="2182463"/>
           </a:xfrm>
           <a:prstGeom prst="rect">
             <a:avLst/>
@@ -4963,7 +5079,7 @@
       </p:pic>
       <p:pic>
         <p:nvPicPr>
-          <p:cNvPr id="10" name="Picture 9" descr="f1_4_panel.png"/>
+          <p:cNvPr id="10" name="Picture 9" descr="f3_4_report.png"/>
           <p:cNvPicPr>
             <a:picLocks noChangeAspect="1"/>
           </p:cNvPicPr>
@@ -4977,104 +5093,8 @@
         </p:blipFill>
         <p:spPr>
           <a:xfrm>
-            <a:off x="9669616" y="3074071"/>
-            <a:ext cx="1262710" cy="2182463"/>
-          </a:xfrm>
-          <a:prstGeom prst="rect">
-            <a:avLst/>
-          </a:prstGeom>
-        </p:spPr>
-      </p:pic>
-      <p:pic>
-        <p:nvPicPr>
-          <p:cNvPr id="11" name="Picture 10" descr="f3_1_other.png"/>
-          <p:cNvPicPr>
-            <a:picLocks noChangeAspect="1"/>
-          </p:cNvPicPr>
-          <p:nvPr/>
-        </p:nvPicPr>
-        <p:blipFill>
-          <a:blip r:embed="rId2"/>
-          <a:stretch>
-            <a:fillRect/>
-          </a:stretch>
-        </p:blipFill>
-        <p:spPr>
-          <a:xfrm>
-            <a:off x="1117726" y="3074071"/>
-            <a:ext cx="1227029" cy="2182463"/>
-          </a:xfrm>
-          <a:prstGeom prst="rect">
-            <a:avLst/>
-          </a:prstGeom>
-        </p:spPr>
-      </p:pic>
-      <p:pic>
-        <p:nvPicPr>
-          <p:cNvPr id="12" name="Picture 11" descr="f2_3_range.png"/>
-          <p:cNvPicPr>
-            <a:picLocks noChangeAspect="1"/>
-          </p:cNvPicPr>
-          <p:nvPr/>
-        </p:nvPicPr>
-        <p:blipFill>
-          <a:blip r:embed="rId3"/>
-          <a:stretch>
-            <a:fillRect/>
-          </a:stretch>
-        </p:blipFill>
-        <p:spPr>
-          <a:xfrm>
-            <a:off x="3209529" y="3513748"/>
-            <a:ext cx="2756577" cy="1303109"/>
-          </a:xfrm>
-          <a:prstGeom prst="rect">
-            <a:avLst/>
-          </a:prstGeom>
-        </p:spPr>
-      </p:pic>
-      <p:pic>
-        <p:nvPicPr>
-          <p:cNvPr id="13" name="Picture 12" descr="f3_3_attrib.png"/>
-          <p:cNvPicPr>
-            <a:picLocks noChangeAspect="1"/>
-          </p:cNvPicPr>
-          <p:nvPr/>
-        </p:nvPicPr>
-        <p:blipFill>
-          <a:blip r:embed="rId4"/>
-          <a:stretch>
-            <a:fillRect/>
-          </a:stretch>
-        </p:blipFill>
-        <p:spPr>
-          <a:xfrm>
-            <a:off x="6066106" y="3873846"/>
-            <a:ext cx="2756577" cy="582913"/>
-          </a:xfrm>
-          <a:prstGeom prst="rect">
-            <a:avLst/>
-          </a:prstGeom>
-        </p:spPr>
-      </p:pic>
-      <p:pic>
-        <p:nvPicPr>
-          <p:cNvPr id="14" name="Picture 13" descr="f3_4_report.png"/>
-          <p:cNvPicPr>
-            <a:picLocks noChangeAspect="1"/>
-          </p:cNvPicPr>
-          <p:nvPr/>
-        </p:nvPicPr>
-        <p:blipFill>
-          <a:blip r:embed="rId5"/>
-          <a:stretch>
-            <a:fillRect/>
-          </a:stretch>
-        </p:blipFill>
-        <p:spPr>
-          <a:xfrm>
-            <a:off x="9756844" y="3074071"/>
-            <a:ext cx="1088254" cy="2182463"/>
+            <a:off x="8925469" y="3074071"/>
+            <a:ext cx="2751004" cy="2182463"/>
           </a:xfrm>
           <a:prstGeom prst="rect">
             <a:avLst/>
@@ -5439,7 +5459,7 @@
                     <a:p>
                       <a:pPr marL="0" marR="0" lvl="0" indent="0" algn="ctr" defTabSz="914400" rtl="0" eaLnBrk="1" fontAlgn="auto" latinLnBrk="1" hangingPunct="1">
                         <a:lnSpc>
-                          <a:spcPct val="100000"/>
+                          <a:spcPct val="115000"/>
                         </a:lnSpc>
                         <a:spcBef>
                           <a:spcPts val="0"/>
@@ -5459,7 +5479,9 @@
                           <a:solidFill>
                             <a:srgbClr val="1A1A1A"/>
                           </a:solidFill>
-                          <a:latin typeface="+mn-lt"/>
+                          <a:latin typeface="Noto Sans KR"/>
+                          <a:ea typeface="Noto Sans KR"/>
+                          <a:cs typeface="Noto Sans KR"/>
                         </a:rPr>
                         <a:t/>
                       </a:r>
@@ -5523,7 +5545,13 @@
                   <a:txBody>
                     <a:bodyPr/>
                     <a:lstStyle/>
-                    <a:p/>
+                    <a:p>
+                      <a:pPr>
+                        <a:lnSpc>
+                          <a:spcPct val="115000"/>
+                        </a:lnSpc>
+                      </a:pPr>
+                    </a:p>
                   </a:txBody>
                   <a:tcPr anchor="ctr">
                     <a:lnL w="12700" cap="flat" cmpd="sng" algn="ctr">
@@ -5577,7 +5605,13 @@
                   <a:txBody>
                     <a:bodyPr/>
                     <a:lstStyle/>
-                    <a:p/>
+                    <a:p>
+                      <a:pPr>
+                        <a:lnSpc>
+                          <a:spcPct val="115000"/>
+                        </a:lnSpc>
+                      </a:pPr>
+                    </a:p>
                   </a:txBody>
                   <a:tcPr anchor="ctr">
                     <a:lnL w="12700" cap="flat" cmpd="sng" algn="ctr">
@@ -5631,7 +5665,13 @@
                   <a:txBody>
                     <a:bodyPr/>
                     <a:lstStyle/>
-                    <a:p/>
+                    <a:p>
+                      <a:pPr>
+                        <a:lnSpc>
+                          <a:spcPct val="115000"/>
+                        </a:lnSpc>
+                      </a:pPr>
+                    </a:p>
                   </a:txBody>
                   <a:tcPr anchor="ctr">
                     <a:lnL w="12700" cap="flat" cmpd="sng" algn="ctr">
@@ -5695,7 +5735,7 @@
                     <a:p>
                       <a:pPr marL="0" marR="0" lvl="0" indent="0" algn="ctr" defTabSz="914400" rtl="0" eaLnBrk="1" fontAlgn="auto" latinLnBrk="1" hangingPunct="1">
                         <a:lnSpc>
-                          <a:spcPct val="100000"/>
+                          <a:spcPct val="115000"/>
                         </a:lnSpc>
                         <a:spcBef>
                           <a:spcPts val="0"/>
@@ -5715,9 +5755,11 @@
                           <a:solidFill>
                             <a:srgbClr val="1A1A1A"/>
                           </a:solidFill>
-                          <a:latin typeface="+mn-lt"/>
-                        </a:rPr>
-                        <a:t>① 판정표 아래 "이 판정에 쓴 공사 데이터" 표(API·어디에·찍힌 값·호출)</a:t>
+                          <a:latin typeface="Noto Sans KR"/>
+                          <a:ea typeface="Noto Sans KR"/>
+                          <a:cs typeface="Noto Sans KR"/>
+                        </a:rPr>
+                        <a:t>- "이 판정에 쓴 공사 데이터" 표 - API·값·호출</a:t>
                       </a:r>
                       <a:endParaRPr lang="en-US" altLang="ko-KR" b="0">
                         <a:solidFill>
@@ -5779,13 +5821,21 @@
                     <a:bodyPr/>
                     <a:lstStyle/>
                     <a:p>
+                      <a:pPr>
+                        <a:lnSpc>
+                          <a:spcPct val="115000"/>
+                        </a:lnSpc>
+                      </a:pPr>
                       <a:r>
                         <a:rPr sz="1000">
                           <a:solidFill>
                             <a:srgbClr val="1A1A1A"/>
                           </a:solidFill>
-                        </a:rPr>
-                        <a:t>② [일별 곡선과 근거 표] → 연도별 전후 4주 외지인 곡선·배수·순증 표</a:t>
+                          <a:latin typeface="Noto Sans KR"/>
+                          <a:ea typeface="Noto Sans KR"/>
+                          <a:cs typeface="Noto Sans KR"/>
+                        </a:rPr>
+                        <a:t>- 연도별 전후 4주 외지인 곡선과 근거 표</a:t>
                       </a:r>
                     </a:p>
                   </a:txBody>
@@ -5842,13 +5892,21 @@
                     <a:bodyPr/>
                     <a:lstStyle/>
                     <a:p>
+                      <a:pPr>
+                        <a:lnSpc>
+                          <a:spcPct val="115000"/>
+                        </a:lnSpc>
+                      </a:pPr>
                       <a:r>
                         <a:rPr sz="1000">
                           <a:solidFill>
                             <a:srgbClr val="1A1A1A"/>
                           </a:solidFill>
-                        </a:rPr>
-                        <a:t>③ 닮은 과거 축제(619건 재계산) 지도·카드와 또래 분포 띠</a:t>
+                          <a:latin typeface="Noto Sans KR"/>
+                          <a:ea typeface="Noto Sans KR"/>
+                          <a:cs typeface="Noto Sans KR"/>
+                        </a:rPr>
+                        <a:t>- 닮은 과거 축제 3곳 지도 (619건 재계산)</a:t>
                       </a:r>
                     </a:p>
                   </a:txBody>
@@ -5905,13 +5963,21 @@
                     <a:bodyPr/>
                     <a:lstStyle/>
                     <a:p>
+                      <a:pPr>
+                        <a:lnSpc>
+                          <a:spcPct val="115000"/>
+                        </a:lnSpc>
+                      </a:pPr>
                       <a:r>
                         <a:rPr sz="1000">
                           <a:solidFill>
                             <a:srgbClr val="1A1A1A"/>
                           </a:solidFill>
-                        </a:rPr>
-                        <a:t>④ 접힘 "자기검증" → leave-one-out 적중률·−52주 백테스트와 한계</a:t>
+                          <a:latin typeface="Noto Sans KR"/>
+                          <a:ea typeface="Noto Sans KR"/>
+                          <a:cs typeface="Noto Sans KR"/>
+                        </a:rPr>
+                        <a:t>- 자기검증 - 정답은 배수 1.5 이상 위험군, 기준선은 무작위</a:t>
                       </a:r>
                     </a:p>
                   </a:txBody>
@@ -6019,12 +6085,19 @@
                     <a:bodyPr/>
                     <a:lstStyle/>
                     <a:p>
-                      <a:pPr algn="ctr" latinLnBrk="1"/>
+                      <a:pPr algn="ctr" latinLnBrk="1">
+                        <a:lnSpc>
+                          <a:spcPct val="115000"/>
+                        </a:lnSpc>
+                      </a:pPr>
                       <a:r>
                         <a:rPr lang="ko-KR" altLang="en-US" b="1" dirty="0" smtClean="0">
                           <a:solidFill>
                             <a:srgbClr val="1A1A1A"/>
                           </a:solidFill>
+                          <a:latin typeface="Noto Sans KR"/>
+                          <a:ea typeface="Noto Sans KR"/>
+                          <a:cs typeface="Noto Sans KR"/>
                         </a:rPr>
                         <a:t>해시태그4</a:t>
                       </a:r>
@@ -6090,12 +6163,19 @@
                     <a:bodyPr/>
                     <a:lstStyle/>
                     <a:p>
-                      <a:pPr latinLnBrk="1"/>
-                      <a:r>
-                        <a:rPr lang="en-US" altLang="ko-KR" b="0" dirty="0" smtClean="0" sz="1200">
+                      <a:pPr latinLnBrk="1">
+                        <a:lnSpc>
+                          <a:spcPct val="115000"/>
+                        </a:lnSpc>
+                      </a:pPr>
+                      <a:r>
+                        <a:rPr lang="en-US" altLang="ko-KR" b="0" dirty="0" smtClean="0" sz="1100">
                           <a:solidFill>
                             <a:srgbClr val="1A1A1A"/>
                           </a:solidFill>
+                          <a:latin typeface="Noto Sans KR"/>
+                          <a:ea typeface="Noto Sans KR"/>
+                          <a:cs typeface="Noto Sans KR"/>
                         </a:rPr>
                         <a:t>#데이터 기반</a:t>
                       </a:r>
@@ -6168,7 +6248,7 @@
                     <a:p>
                       <a:pPr marL="0" marR="0" lvl="0" indent="0" algn="ctr" defTabSz="914400" rtl="0" eaLnBrk="1" fontAlgn="auto" latinLnBrk="1" hangingPunct="1">
                         <a:lnSpc>
-                          <a:spcPct val="100000"/>
+                          <a:spcPct val="115000"/>
                         </a:lnSpc>
                         <a:spcBef>
                           <a:spcPts val="0"/>
@@ -6188,6 +6268,9 @@
                           <a:solidFill>
                             <a:srgbClr val="1A1A1A"/>
                           </a:solidFill>
+                          <a:latin typeface="Noto Sans KR"/>
+                          <a:ea typeface="Noto Sans KR"/>
+                          <a:cs typeface="Noto Sans KR"/>
                         </a:rPr>
                         <a:t>연계기능4</a:t>
                       </a:r>
@@ -6253,12 +6336,19 @@
                     <a:bodyPr/>
                     <a:lstStyle/>
                     <a:p>
-                      <a:pPr latinLnBrk="1"/>
-                      <a:r>
-                        <a:rPr lang="en-US" altLang="ko-KR" b="0" dirty="0" smtClean="0" sz="1200">
+                      <a:pPr latinLnBrk="1">
+                        <a:lnSpc>
+                          <a:spcPct val="115000"/>
+                        </a:lnSpc>
+                      </a:pPr>
+                      <a:r>
+                        <a:rPr lang="en-US" altLang="ko-KR" b="0" dirty="0" smtClean="0" sz="1100">
                           <a:solidFill>
                             <a:srgbClr val="1A1A1A"/>
                           </a:solidFill>
+                          <a:latin typeface="Noto Sans KR"/>
+                          <a:ea typeface="Noto Sans KR"/>
+                          <a:cs typeface="Noto Sans KR"/>
                         </a:rPr>
                         <a:t>실측 근거와 자기검증</a:t>
                       </a:r>
@@ -6329,12 +6419,19 @@
                     <a:bodyPr/>
                     <a:lstStyle/>
                     <a:p>
-                      <a:pPr algn="ctr" latinLnBrk="1"/>
+                      <a:pPr algn="ctr" latinLnBrk="1">
+                        <a:lnSpc>
+                          <a:spcPct val="115000"/>
+                        </a:lnSpc>
+                      </a:pPr>
                       <a:r>
                         <a:rPr lang="ko-KR" altLang="en-US" b="1" dirty="0" err="1" smtClean="0">
                           <a:solidFill>
                             <a:srgbClr val="1A1A1A"/>
                           </a:solidFill>
+                          <a:latin typeface="Noto Sans KR"/>
+                          <a:ea typeface="Noto Sans KR"/>
+                          <a:cs typeface="Noto Sans KR"/>
                         </a:rPr>
                         <a:t>기능설명4</a:t>
                       </a:r>
@@ -6402,7 +6499,7 @@
                     <a:p>
                       <a:pPr marL="0" marR="0" lvl="0" indent="0" algn="l" defTabSz="914400" rtl="0" eaLnBrk="1" fontAlgn="auto" latinLnBrk="1" hangingPunct="1">
                         <a:lnSpc>
-                          <a:spcPct val="100000"/>
+                          <a:spcPct val="115000"/>
                         </a:lnSpc>
                         <a:spcBef>
                           <a:spcPts val="0"/>
@@ -6422,6 +6519,9 @@
                           <a:solidFill>
                             <a:srgbClr val="1A1A1A"/>
                           </a:solidFill>
+                          <a:latin typeface="Noto Sans KR"/>
+                          <a:ea typeface="Noto Sans KR"/>
+                          <a:cs typeface="Noto Sans KR"/>
                         </a:rPr>
                         <a:t>판정에 쓴 모든 값이 어느 API 의 어느 셀에서 왔는지 되짚어지고, 방식의 적중률과 한계를 화면이 먼저 말합니다.</a:t>
                       </a:r>
@@ -6492,7 +6592,7 @@
       </p:graphicFrame>
       <p:pic>
         <p:nvPicPr>
-          <p:cNvPr id="7" name="Picture 6" descr="f1_1_home.png"/>
+          <p:cNvPr id="7" name="Picture 6" descr="f4_1_datause.png"/>
           <p:cNvPicPr>
             <a:picLocks noChangeAspect="1"/>
           </p:cNvPicPr>
@@ -6506,8 +6606,8 @@
         </p:blipFill>
         <p:spPr>
           <a:xfrm>
-            <a:off x="352952" y="3379938"/>
-            <a:ext cx="2756577" cy="1570729"/>
+            <a:off x="356045" y="3074071"/>
+            <a:ext cx="2750390" cy="2182463"/>
           </a:xfrm>
           <a:prstGeom prst="rect">
             <a:avLst/>
@@ -6516,7 +6616,7 @@
       </p:pic>
       <p:pic>
         <p:nvPicPr>
-          <p:cNvPr id="8" name="Picture 7" descr="f1_2_underlay.png"/>
+          <p:cNvPr id="8" name="Picture 7" descr="f4_2_evidence.png"/>
           <p:cNvPicPr>
             <a:picLocks noChangeAspect="1"/>
           </p:cNvPicPr>
@@ -6530,8 +6630,8 @@
         </p:blipFill>
         <p:spPr>
           <a:xfrm>
-            <a:off x="4033808" y="3074071"/>
-            <a:ext cx="1108019" cy="2182463"/>
+            <a:off x="3212374" y="3074071"/>
+            <a:ext cx="2750886" cy="2182463"/>
           </a:xfrm>
           <a:prstGeom prst="rect">
             <a:avLst/>
@@ -6540,7 +6640,7 @@
       </p:pic>
       <p:pic>
         <p:nvPicPr>
-          <p:cNvPr id="9" name="Picture 8" descr="f1_3_venue.png"/>
+          <p:cNvPr id="9" name="Picture 8" descr="f4_3_twins.png"/>
           <p:cNvPicPr>
             <a:picLocks noChangeAspect="1"/>
           </p:cNvPicPr>
@@ -6554,8 +6654,8 @@
         </p:blipFill>
         <p:spPr>
           <a:xfrm>
-            <a:off x="6341171" y="3074071"/>
-            <a:ext cx="2206446" cy="2182463"/>
+            <a:off x="6070816" y="3074071"/>
+            <a:ext cx="2747156" cy="2182463"/>
           </a:xfrm>
           <a:prstGeom prst="rect">
             <a:avLst/>
@@ -6564,7 +6664,7 @@
       </p:pic>
       <p:pic>
         <p:nvPicPr>
-          <p:cNvPr id="10" name="Picture 9" descr="f1_4_panel.png"/>
+          <p:cNvPr id="10" name="Picture 9" descr="f4_4_history.png"/>
           <p:cNvPicPr>
             <a:picLocks noChangeAspect="1"/>
           </p:cNvPicPr>
@@ -6578,104 +6678,8 @@
         </p:blipFill>
         <p:spPr>
           <a:xfrm>
-            <a:off x="9669616" y="3074071"/>
-            <a:ext cx="1262710" cy="2182463"/>
-          </a:xfrm>
-          <a:prstGeom prst="rect">
-            <a:avLst/>
-          </a:prstGeom>
-        </p:spPr>
-      </p:pic>
-      <p:pic>
-        <p:nvPicPr>
-          <p:cNvPr id="11" name="Picture 10" descr="f2_1_verdict.png"/>
-          <p:cNvPicPr>
-            <a:picLocks noChangeAspect="1"/>
-          </p:cNvPicPr>
-          <p:nvPr/>
-        </p:nvPicPr>
-        <p:blipFill>
-          <a:blip r:embed="rId2"/>
-          <a:stretch>
-            <a:fillRect/>
-          </a:stretch>
-        </p:blipFill>
-        <p:spPr>
-          <a:xfrm>
-            <a:off x="525644" y="3074071"/>
-            <a:ext cx="2411192" cy="2182463"/>
-          </a:xfrm>
-          <a:prstGeom prst="rect">
-            <a:avLst/>
-          </a:prstGeom>
-        </p:spPr>
-      </p:pic>
-      <p:pic>
-        <p:nvPicPr>
-          <p:cNvPr id="12" name="Picture 11" descr="f4_2_evidence.png"/>
-          <p:cNvPicPr>
-            <a:picLocks noChangeAspect="1"/>
-          </p:cNvPicPr>
-          <p:nvPr/>
-        </p:nvPicPr>
-        <p:blipFill>
-          <a:blip r:embed="rId3"/>
-          <a:stretch>
-            <a:fillRect/>
-          </a:stretch>
-        </p:blipFill>
-        <p:spPr>
-          <a:xfrm>
-            <a:off x="3209529" y="3697821"/>
-            <a:ext cx="2756577" cy="934963"/>
-          </a:xfrm>
-          <a:prstGeom prst="rect">
-            <a:avLst/>
-          </a:prstGeom>
-        </p:spPr>
-      </p:pic>
-      <p:pic>
-        <p:nvPicPr>
-          <p:cNvPr id="13" name="Picture 12" descr="f4_3_twins.png"/>
-          <p:cNvPicPr>
-            <a:picLocks noChangeAspect="1"/>
-          </p:cNvPicPr>
-          <p:nvPr/>
-        </p:nvPicPr>
-        <p:blipFill>
-          <a:blip r:embed="rId4"/>
-          <a:stretch>
-            <a:fillRect/>
-          </a:stretch>
-        </p:blipFill>
-        <p:spPr>
-          <a:xfrm>
-            <a:off x="6066106" y="3875435"/>
-            <a:ext cx="2756577" cy="579734"/>
-          </a:xfrm>
-          <a:prstGeom prst="rect">
-            <a:avLst/>
-          </a:prstGeom>
-        </p:spPr>
-      </p:pic>
-      <p:pic>
-        <p:nvPicPr>
-          <p:cNvPr id="14" name="Picture 13" descr="f4_4_history.png"/>
-          <p:cNvPicPr>
-            <a:picLocks noChangeAspect="1"/>
-          </p:cNvPicPr>
-          <p:nvPr/>
-        </p:nvPicPr>
-        <p:blipFill>
-          <a:blip r:embed="rId5"/>
-          <a:stretch>
-            <a:fillRect/>
-          </a:stretch>
-        </p:blipFill>
-        <p:spPr>
-          <a:xfrm>
-            <a:off x="8922683" y="3925167"/>
-            <a:ext cx="2756577" cy="480270"/>
+            <a:off x="8925914" y="3074071"/>
+            <a:ext cx="2750115" cy="2182463"/>
           </a:xfrm>
           <a:prstGeom prst="rect">
             <a:avLst/>
@@ -6747,7 +6751,7 @@
                   </a:extLst>
                 </a:gridCol>
               </a:tblGrid>
-              <a:tr h="480000">
+              <a:tr h="400000">
                 <a:tc>
                   <a:txBody>
                     <a:bodyPr/>
@@ -6820,6 +6824,9 @@
                     <a:lstStyle/>
                     <a:p>
                       <a:pPr marL="0" lvl="0" indent="0" algn="just" rtl="0">
+                        <a:lnSpc>
+                          <a:spcPct val="115000"/>
+                        </a:lnSpc>
                         <a:spcBef>
                           <a:spcPts val="0"/>
                         </a:spcBef>
@@ -6829,13 +6836,15 @@
                         <a:buNone/>
                       </a:pPr>
                       <a:r>
-                        <a:rPr lang="en-US" altLang="ko-KR" sz="1200" b="0" smtClean="0">
+                        <a:rPr lang="en-US" altLang="ko-KR" sz="1100" b="0" smtClean="0">
                           <a:solidFill>
                             <a:srgbClr val="1A1A1A"/>
                           </a:solidFill>
-                          <a:latin typeface="+mn-lt"/>
-                        </a:rPr>
-                        <a:t>기획안 팩트체크 — 지자체 축제 예산 심의용 실측 검증</a:t>
+                          <a:latin typeface="Noto Sans KR"/>
+                          <a:ea typeface="Noto Sans KR"/>
+                          <a:cs typeface="Noto Sans KR"/>
+                        </a:rPr>
+                        <a:t>기획안 팩트체크 - 지자체 축제 예산 심의용 실측 검증</a:t>
                       </a:r>
                       <a:endParaRPr lang="en-US" altLang="ko-KR" sz="1800" b="0" baseline="0" smtClean="0">
                         <a:solidFill>
@@ -6899,7 +6908,7 @@
                   </a:ext>
                 </a:extLst>
               </a:tr>
-              <a:tr h="420000">
+              <a:tr h="380000">
                 <a:tc>
                   <a:txBody>
                     <a:bodyPr/>
@@ -6972,6 +6981,9 @@
                     <a:lstStyle/>
                     <a:p>
                       <a:pPr marL="0" lvl="0" indent="0" algn="just" rtl="0">
+                        <a:lnSpc>
+                          <a:spcPct val="115000"/>
+                        </a:lnSpc>
                         <a:spcBef>
                           <a:spcPts val="0"/>
                         </a:spcBef>
@@ -6981,11 +6993,13 @@
                         <a:buNone/>
                       </a:pPr>
                       <a:r>
-                        <a:rPr lang="en-US" altLang="ko-KR" sz="1200" b="0">
+                        <a:rPr lang="en-US" altLang="ko-KR" sz="1100" b="0">
                           <a:solidFill>
                             <a:srgbClr val="1A1A1A"/>
                           </a:solidFill>
-                          <a:latin typeface="+mn-lt"/>
+                          <a:latin typeface="Noto Sans KR"/>
+                          <a:ea typeface="Noto Sans KR"/>
+                          <a:cs typeface="Noto Sans KR"/>
                         </a:rPr>
                         <a:t>웹 서비스 (데스크톱 크롬 권장 · 로그인 없음 · 설치 없음)</a:t>
                       </a:r>
@@ -7051,7 +7065,7 @@
                   </a:ext>
                 </a:extLst>
               </a:tr>
-              <a:tr h="820000">
+              <a:tr h="700000">
                 <a:tc>
                   <a:txBody>
                     <a:bodyPr/>
@@ -7138,7 +7152,7 @@
                     <a:p>
                       <a:pPr marL="0" marR="0" lvl="0" indent="0" algn="just" defTabSz="914400" rtl="0" eaLnBrk="1" fontAlgn="auto" latinLnBrk="1" hangingPunct="1">
                         <a:lnSpc>
-                          <a:spcPct val="100000"/>
+                          <a:spcPct val="115000"/>
                         </a:lnSpc>
                         <a:spcBef>
                           <a:spcPts val="0"/>
@@ -7158,7 +7172,9 @@
                           <a:solidFill>
                             <a:srgbClr val="1A1A1A"/>
                           </a:solidFill>
-                          <a:latin typeface="+mn-lt"/>
+                          <a:latin typeface="Noto Sans KR"/>
+                          <a:ea typeface="Noto Sans KR"/>
+                          <a:cs typeface="Noto Sans KR"/>
                         </a:rPr>
                         <a:t>시·군 문화관광과 축제 담당 공무원과 축제 위탁사 실무자. 예산을 집행하기 전에 기획안의 예상 방문객·예산이 근거가 있는지를 심의에 증빙해야 하는데, 기댈 것이 작년 발표치와 경험뿐인 사람.</a:t>
                       </a:r>
@@ -7218,7 +7234,7 @@
                   </a:ext>
                 </a:extLst>
               </a:tr>
-              <a:tr h="1300000">
+              <a:tr h="1430000">
                 <a:tc>
                   <a:txBody>
                     <a:bodyPr/>
@@ -7297,7 +7313,7 @@
                     <a:p>
                       <a:pPr marL="0" marR="0" lvl="0" indent="0" algn="just" defTabSz="914400" rtl="0" eaLnBrk="1" fontAlgn="auto" latinLnBrk="1" hangingPunct="1">
                         <a:lnSpc>
-                          <a:spcPct val="100000"/>
+                          <a:spcPct val="115000"/>
                         </a:lnSpc>
                         <a:spcBef>
                           <a:spcPts val="0"/>
@@ -7313,19 +7329,21 @@
                         <a:defRPr/>
                       </a:pPr>
                       <a:r>
-                        <a:rPr lang="en-US" altLang="ko-KR" sz="1200">
+                        <a:rPr lang="en-US" altLang="ko-KR" sz="1100">
                           <a:solidFill>
                             <a:srgbClr val="1A1A1A"/>
                           </a:solidFill>
-                          <a:latin typeface="+mn-lt"/>
-                        </a:rPr>
-                        <a:t>축제 기획서(PDF)를 올리면 예상 방문객·개최 기간·예산을 옮겨 적고, 그 축제가 지난 회차에 실제로 겪은 한국관광공사 KT 시군구 일별 실측(외지인 배수·순증)과 같은 기준으로 재서 통과/주의/과대/과소/상한 초과/근거 없음을 판정합니다. 내년 배수 구간, 1인당 예산 대조, 같은 시기 경쟁 축제 귀속 경고, 결재 첨부용 검증 보고서 A4 2장을 내고, 행사장 도면 위 보행 시뮬레이션으로 쏠림이 어디서 막히는지를 미리 봅니다. 판정·시뮬에 생성형 모델을 쓰지 않습니다.</a:t>
+                          <a:latin typeface="Noto Sans KR"/>
+                          <a:ea typeface="Noto Sans KR"/>
+                          <a:cs typeface="Noto Sans KR"/>
+                        </a:rPr>
+                        <a:t>축제 기획서(PDF)를 올리면 예상 방문객·기간·예산을 옮겨 적고, 그 축제가 지난 회차에 실제로 겪은 한국관광공사 KT 시군구 일별 실측과 같은 기준으로 재서 통과/주의/과대/과소/상한 초과/근거 없음을 판정하며, 내년 배수 구간·1인당 예산 대조·귀속 경고·결재 첨부용 검증 보고서 A4 2장과 행사장 도면 보행 시뮬레이션까지 한 화면에서 냅니다(판정·시뮬에 생성형 모델을 쓰지 않습니다).</a:t>
                       </a:r>
                     </a:p>
                     <a:p>
                       <a:pPr marL="0" marR="0" lvl="0" indent="0" algn="just" defTabSz="914400" rtl="0" eaLnBrk="1" fontAlgn="auto" latinLnBrk="1" hangingPunct="1">
                         <a:lnSpc>
-                          <a:spcPct val="100000"/>
+                          <a:spcPct val="115000"/>
                         </a:lnSpc>
                         <a:spcBef>
                           <a:spcPts val="0"/>
@@ -7341,19 +7359,44 @@
                         <a:defRPr/>
                       </a:pPr>
                       <a:r>
-                        <a:rPr lang="en-US" altLang="ko-KR" sz="1200">
+                        <a:rPr lang="en-US" altLang="ko-KR" sz="1100">
                           <a:solidFill>
                             <a:srgbClr val="1A1A1A"/>
                           </a:solidFill>
-                          <a:latin typeface="+mn-lt"/>
-                        </a:rPr>
-                        <a:t>심사용 경로 — 올릴 기획서가 없으면 이 주소가 판정 화면을 바로 엽니다(업로드 불필요):</a:t>
+                          <a:latin typeface="Noto Sans KR"/>
+                          <a:ea typeface="Noto Sans KR"/>
+                          <a:cs typeface="Noto Sans KR"/>
+                        </a:rPr>
+                        <a:t>심사용 경로 - 서비스 주소 oneshot-mvp.vercel.app (로그인·설치 없음). 올릴 기획서가 없으면 </a:t>
+                      </a:r>
+                      <a:r>
+                        <a:rPr lang="en-US" altLang="ko-KR" sz="1100">
+                          <a:solidFill>
+                            <a:srgbClr val="1A1A1A"/>
+                          </a:solidFill>
+                          <a:latin typeface="Noto Sans KR"/>
+                          <a:ea typeface="Noto Sans KR"/>
+                          <a:cs typeface="Noto Sans KR"/>
+                          <a:hlinkClick r:id="rId2"/>
+                        </a:rPr>
+                        <a:t>[군포철쭉축제 2027 판정 화면 열기]</a:t>
+                      </a:r>
+                      <a:r>
+                        <a:rPr lang="en-US" altLang="ko-KR" sz="1100">
+                          <a:solidFill>
+                            <a:srgbClr val="1A1A1A"/>
+                          </a:solidFill>
+                          <a:latin typeface="Noto Sans KR"/>
+                          <a:ea typeface="Noto Sans KR"/>
+                          <a:cs typeface="Noto Sans KR"/>
+                        </a:rPr>
+                        <a:t> 를 누르면 바로 열립니다.</a:t>
                       </a:r>
                     </a:p>
                     <a:p>
                       <a:pPr marL="0" marR="0" lvl="0" indent="0" algn="just" defTabSz="914400" rtl="0" eaLnBrk="1" fontAlgn="auto" latinLnBrk="1" hangingPunct="1">
                         <a:lnSpc>
-                          <a:spcPct val="100000"/>
+                          <a:spcPct val="115000"/>
                         </a:lnSpc>
                         <a:spcBef>
                           <a:spcPts val="0"/>
@@ -7369,80 +7412,50 @@
                         <a:defRPr/>
                       </a:pPr>
                       <a:r>
-                        <a:rPr lang="en-US" altLang="ko-KR" sz="1200">
+                        <a:rPr lang="en-US" altLang="ko-KR" sz="1100">
                           <a:solidFill>
                             <a:srgbClr val="1A1A1A"/>
                           </a:solidFill>
-                          <a:latin typeface="+mn-lt"/>
-                          <a:hlinkClick r:id="rId2"/>
-                        </a:rPr>
-                        <a:t>https://oneshot-mvp.vercel.app/check?name=%EA%B5%B0%ED%8F%AC%EC%B2%A0%EC%AD%89%EC%B6%95%EC%A0%9C&amp;sido=%EA%B2%BD%EA%B8%B0&amp;sigungu=%EA%B5%B0%ED%8F%AC%EC%8B%9C&amp;n=600000&amp;basis=period&amp;counting=personDays&amp;budget=100000&amp;start=2027-04-17&amp;end=2027-04-25&amp;h1s=2024-04-20&amp;h1e=2024-04-28&amp;h2s=2025-04-19&amp;h2e=2025-04-27&amp;h3s=2026-04-18&amp;h3e=2026-04-26&amp;theme=2&amp;acc=4</a:t>
-                      </a:r>
-                    </a:p>
-                    <a:p>
-                      <a:pPr marL="0" marR="0" lvl="0" indent="0" algn="just" defTabSz="914400" rtl="0" eaLnBrk="1" fontAlgn="auto" latinLnBrk="1" hangingPunct="1">
-                        <a:lnSpc>
-                          <a:spcPct val="100000"/>
-                        </a:lnSpc>
-                        <a:spcBef>
-                          <a:spcPts val="0"/>
-                        </a:spcBef>
-                        <a:spcAft>
-                          <a:spcPts val="0"/>
-                        </a:spcAft>
-                        <a:buClrTx/>
-                        <a:buSzTx/>
-                        <a:buFontTx/>
-                        <a:buNone/>
-                        <a:tabLst/>
-                        <a:defRPr/>
-                      </a:pPr>
-                      <a:r>
-                        <a:rPr lang="en-US" altLang="ko-KR" sz="1200">
+                          <a:latin typeface="Noto Sans KR"/>
+                          <a:ea typeface="Noto Sans KR"/>
+                          <a:cs typeface="Noto Sans KR"/>
+                        </a:rPr>
+                        <a:t>시연 안내 </a:t>
+                      </a:r>
+                      <a:r>
+                        <a:rPr lang="en-US" altLang="ko-KR" sz="1100">
                           <a:solidFill>
                             <a:srgbClr val="1A1A1A"/>
                           </a:solidFill>
-                          <a:latin typeface="+mn-lt"/>
-                        </a:rPr>
-                        <a:t>시연 안내 </a:t>
-                      </a:r>
-                      <a:r>
-                        <a:rPr lang="en-US" altLang="ko-KR" sz="1200">
+                          <a:latin typeface="Noto Sans KR"/>
+                          <a:ea typeface="Noto Sans KR"/>
+                          <a:cs typeface="Noto Sans KR"/>
+                          <a:hlinkClick r:id="rId3"/>
+                        </a:rPr>
+                        <a:t>oneshot-mvp.vercel.app/judge-guide.pdf</a:t>
+                      </a:r>
+                      <a:r>
+                        <a:rPr lang="en-US" altLang="ko-KR" sz="1100">
                           <a:solidFill>
                             <a:srgbClr val="1A1A1A"/>
                           </a:solidFill>
-                          <a:latin typeface="+mn-lt"/>
-                          <a:hlinkClick r:id="rId3"/>
-                        </a:rPr>
-                        <a:t>https://oneshot-mvp.vercel.app/judge-guide.pdf</a:t>
-                      </a:r>
-                      <a:r>
-                        <a:rPr lang="en-US" altLang="ko-KR" sz="1200">
+                          <a:latin typeface="Noto Sans KR"/>
+                          <a:ea typeface="Noto Sans KR"/>
+                          <a:cs typeface="Noto Sans KR"/>
+                        </a:rPr>
+                        <a:t> · 예비 데모 기획서 </a:t>
+                      </a:r>
+                      <a:r>
+                        <a:rPr lang="en-US" altLang="ko-KR" sz="1100">
                           <a:solidFill>
                             <a:srgbClr val="1A1A1A"/>
                           </a:solidFill>
-                          <a:latin typeface="+mn-lt"/>
-                        </a:rPr>
-                        <a:t> · 예비 데모 기획서 </a:t>
-                      </a:r>
-                      <a:r>
-                        <a:rPr lang="en-US" altLang="ko-KR" sz="1200">
-                          <a:solidFill>
-                            <a:srgbClr val="1A1A1A"/>
-                          </a:solidFill>
-                          <a:latin typeface="+mn-lt"/>
+                          <a:latin typeface="Noto Sans KR"/>
+                          <a:ea typeface="Noto Sans KR"/>
+                          <a:cs typeface="Noto Sans KR"/>
                           <a:hlinkClick r:id="rId4"/>
                         </a:rPr>
-                        <a:t>https://oneshot-mvp.vercel.app/sample-plan.pdf</a:t>
-                      </a:r>
-                      <a:r>
-                        <a:rPr lang="en-US" altLang="ko-KR" sz="1200">
-                          <a:solidFill>
-                            <a:srgbClr val="1A1A1A"/>
-                          </a:solidFill>
-                          <a:latin typeface="+mn-lt"/>
-                        </a:rPr>
-                        <a:t> (첫 화면에 올리면 판정이 열립니다)</a:t>
+                        <a:t>oneshot-mvp.vercel.app/sample-plan.pdf</a:t>
                       </a:r>
                     </a:p>
                   </a:txBody>
@@ -7500,7 +7513,7 @@
                   </a:ext>
                 </a:extLst>
               </a:tr>
-              <a:tr h="560000">
+              <a:tr h="440000">
                 <a:tc>
                   <a:txBody>
                     <a:bodyPr/>
@@ -7586,6 +7599,9 @@
                     <a:lstStyle/>
                     <a:p>
                       <a:pPr marL="0" lvl="0" indent="0" algn="just" rtl="0">
+                        <a:lnSpc>
+                          <a:spcPct val="115000"/>
+                        </a:lnSpc>
                         <a:spcBef>
                           <a:spcPts val="0"/>
                         </a:spcBef>
@@ -7595,13 +7611,15 @@
                         <a:buNone/>
                       </a:pPr>
                       <a:r>
-                        <a:rPr lang="en-US" altLang="ko-KR" sz="1200" b="0" baseline="0" smtClean="0">
+                        <a:rPr lang="en-US" altLang="ko-KR" sz="1100" b="0" baseline="0" smtClean="0">
                           <a:solidFill>
                             <a:srgbClr val="1A1A1A"/>
                           </a:solidFill>
-                          <a:latin typeface="+mn-lt"/>
-                        </a:rPr>
-                        <a:t>과제번호 9번 — 축제 흥행 예보 서비스 (#축제/행사 기획 #사전 수요 예측 #보완 피드백 제공 #데이터 기반)</a:t>
+                          <a:latin typeface="Noto Sans KR"/>
+                          <a:ea typeface="Noto Sans KR"/>
+                          <a:cs typeface="Noto Sans KR"/>
+                        </a:rPr>
+                        <a:t>과제번호 9번 - 축제 흥행 예보 서비스 (#축제/행사 기획 #사전 수요 예측 #보완 피드백 제공 #데이터 기반)</a:t>
                       </a:r>
                       <a:endParaRPr lang="en-US" altLang="ko-KR" sz="1800" b="0" baseline="0" smtClean="0">
                         <a:solidFill>
@@ -7665,7 +7683,7 @@
                   </a:ext>
                 </a:extLst>
               </a:tr>
-              <a:tr h="2070000">
+              <a:tr h="2300000">
                 <a:tc>
                   <a:txBody>
                     <a:bodyPr/>
@@ -7808,7 +7826,7 @@
                     <a:p>
                       <a:pPr marL="0" marR="0" lvl="0" indent="0" algn="just" defTabSz="914400" rtl="0" eaLnBrk="1" fontAlgn="auto" latinLnBrk="1" hangingPunct="1">
                         <a:lnSpc>
-                          <a:spcPct val="100000"/>
+                          <a:spcPct val="115000"/>
                         </a:lnSpc>
                         <a:spcBef>
                           <a:spcPts val="0"/>
@@ -7824,19 +7842,21 @@
                         <a:defRPr/>
                       </a:pPr>
                       <a:r>
-                        <a:rPr lang="en-US" altLang="ko-KR" sz="1200" b="0" smtClean="0">
+                        <a:rPr lang="en-US" altLang="ko-KR" sz="1100" b="0" smtClean="0">
                           <a:solidFill>
                             <a:srgbClr val="1A1A1A"/>
                           </a:solidFill>
-                          <a:latin typeface="+mn-lt"/>
-                        </a:rPr>
-                        <a:t>해결과제 원문은 두 문장입니다. ① 축제 수요 예측 실패 및 주관적 경험 의존형 기획으로 인한 예산 낭비 리스크 ② 대규모 관광객 쏠림에 따른 축제 만족도 저하. 이 서비스는 ①을 판정으로, ②를 도면 시뮬레이션으로 정면에서 다룹니다.</a:t>
+                          <a:latin typeface="Noto Sans KR"/>
+                          <a:ea typeface="Noto Sans KR"/>
+                          <a:cs typeface="Noto Sans KR"/>
+                        </a:rPr>
+                        <a:t>지정과제가 지목한 문제는 둘입니다. 축제 수요 예측이 빗나가 예산이 낭비되는 것, 그리고 관광객이 한곳에 몰려 만족도가 떨어지는 것. 앞은 판정으로, 뒤는 행사장 도면 시뮬레이션으로 다룹니다.</a:t>
                       </a:r>
                     </a:p>
                     <a:p>
                       <a:pPr marL="0" marR="0" lvl="0" indent="0" algn="just" defTabSz="914400" rtl="0" eaLnBrk="1" fontAlgn="auto" latinLnBrk="1" hangingPunct="1">
                         <a:lnSpc>
-                          <a:spcPct val="100000"/>
+                          <a:spcPct val="115000"/>
                         </a:lnSpc>
                         <a:spcBef>
                           <a:spcPts val="0"/>
@@ -7852,13 +7872,45 @@
                         <a:defRPr/>
                       </a:pPr>
                       <a:r>
-                        <a:rPr lang="en-US" altLang="ko-KR" sz="1200" b="0" smtClean="0">
+                        <a:rPr lang="en-US" altLang="ko-KR" sz="1100" b="0" smtClean="0">
                           <a:solidFill>
                             <a:srgbClr val="1A1A1A"/>
                           </a:solidFill>
-                          <a:latin typeface="+mn-lt"/>
-                        </a:rPr>
-                        <a:t>발표되는 방문객 수는 산출 방식이 공개되지 않고, 내년 기획안은 그 발표치를 옮겨 적는 데서 시작합니다. 군포철쭉축제만 봐도 그렇습니다 — 시 발표 방문객은 2024년 360,370명에서 2025년 545,802명으로 1.51배가 됐는데(연합뉴스 2025-04-28), 같은 축제를 공사 KT 일별 실측으로 재면 최대일 외지인 배수는 1.47배 → 1.52배로 거의 그대로입니다. 세 해 모두 축제 신호는 '뚜렷함'이라 측정이 못 잡은 것도 아닙니다. 두 숫자는 서로 다른 것을 잽니다 — 발표치는 절대 인원, 배수는 평소 대비 상대값입니다. 그런데 예산 심의는 둘을 구분하지 않습니다. 이 서비스가 하는 일이 그 구분을 화면에서 강제하는 것입니다. 군포철쭉축제 2025 발표 최다일 217,502명은 같은 날 KT 가 센 군포시 전체 체류 262,457명의 83%였습니다. 공사 데이터랩에 이동통신 실측이 이미 있는데 기획 단계에서 쓰이지 않습니다. 그 실측을 담당자가 결재에 들고 갈 수 있는 판정문으로 옮기면 풀리는 문제라고 봤습니다.</a:t>
+                          <a:latin typeface="Noto Sans KR"/>
+                          <a:ea typeface="Noto Sans KR"/>
+                          <a:cs typeface="Noto Sans KR"/>
+                        </a:rPr>
+                        <a:t>문제의 뿌리는 숫자의 출처입니다. 군포철쭉축제의 시 발표 방문객은 2024년 360,370명에서 2025년 545,802명으로 51% 늘었는데(연합뉴스 2025-04-28), 같은 축제를 공사 KT 일별 실측으로 재면 최대일 외지인은 102,589명에서 110,184명, 7% 늘었습니다. 기간 총계를 세면 51%, 하루 외지인을 세면 7% 입니다.</a:t>
+                      </a:r>
+                    </a:p>
+                    <a:p>
+                      <a:pPr marL="0" marR="0" lvl="0" indent="0" algn="just" defTabSz="914400" rtl="0" eaLnBrk="1" fontAlgn="auto" latinLnBrk="1" hangingPunct="1">
+                        <a:lnSpc>
+                          <a:spcPct val="115000"/>
+                        </a:lnSpc>
+                        <a:spcBef>
+                          <a:spcPts val="0"/>
+                        </a:spcBef>
+                        <a:spcAft>
+                          <a:spcPts val="0"/>
+                        </a:spcAft>
+                        <a:buClrTx/>
+                        <a:buSzTx/>
+                        <a:buFontTx/>
+                        <a:buNone/>
+                        <a:tabLst/>
+                        <a:defRPr/>
+                      </a:pPr>
+                      <a:r>
+                        <a:rPr lang="en-US" altLang="ko-KR" sz="1100" b="0" smtClean="0">
+                          <a:solidFill>
+                            <a:srgbClr val="1A1A1A"/>
+                          </a:solidFill>
+                          <a:latin typeface="Noto Sans KR"/>
+                          <a:ea typeface="Noto Sans KR"/>
+                          <a:cs typeface="Noto Sans KR"/>
+                        </a:rPr>
+                        <a:t>어느 쪽이 맞는지 가리려는 것이 아니라, 예산 심의에 올라가는 숫자가 무엇을 센 값인지를 화면에서 밝히자는 것입니다. 2025년 발표 최다일 217,502명(4월 20일)은 같은 날 KT 가 센 군포시 전체 체류 232,198명의 94%였습니다. 실측은 이미 공사 데이터랩에 있고, 기획 단계에서 쓰이지 않을 뿐입니다.</a:t>
                       </a:r>
                     </a:p>
                   </a:txBody>
@@ -8132,7 +8184,7 @@
                     <a:p>
                       <a:pPr marL="0" marR="0" lvl="0" indent="0" algn="just" defTabSz="914400" rtl="0" eaLnBrk="1" fontAlgn="auto" latinLnBrk="1" hangingPunct="1">
                         <a:lnSpc>
-                          <a:spcPct val="100000"/>
+                          <a:spcPct val="175000"/>
                         </a:lnSpc>
                         <a:spcBef>
                           <a:spcPts val="0"/>
@@ -8148,19 +8200,21 @@
                         <a:defRPr/>
                       </a:pPr>
                       <a:r>
-                        <a:rPr lang="en-US" altLang="ko-KR" sz="1200" b="0" dirty="0" smtClean="0">
+                        <a:rPr lang="en-US" altLang="ko-KR" sz="1300" b="0" dirty="0" smtClean="0">
                           <a:solidFill>
                             <a:srgbClr val="1A1A1A"/>
                           </a:solidFill>
-                          <a:latin typeface="+mn-lt"/>
-                        </a:rPr>
-                        <a:t>기획안의 숫자를 실측으로 판정한다 — 방향은 이것 하나입니다.</a:t>
+                          <a:latin typeface="Noto Sans KR"/>
+                          <a:ea typeface="Noto Sans KR"/>
+                          <a:cs typeface="Noto Sans KR"/>
+                        </a:rPr>
+                        <a:t>기획안에 적힌 숫자를 실측으로 다시 재는 것, 방향은 이것 하나입니다.</a:t>
                       </a:r>
                     </a:p>
                     <a:p>
                       <a:pPr marL="0" marR="0" lvl="0" indent="0" algn="just" defTabSz="914400" rtl="0" eaLnBrk="1" fontAlgn="auto" latinLnBrk="1" hangingPunct="1">
                         <a:lnSpc>
-                          <a:spcPct val="100000"/>
+                          <a:spcPct val="175000"/>
                         </a:lnSpc>
                         <a:spcBef>
                           <a:spcPts val="0"/>
@@ -8176,19 +8230,21 @@
                         <a:defRPr/>
                       </a:pPr>
                       <a:r>
-                        <a:rPr lang="en-US" altLang="ko-KR" sz="1200" b="0" dirty="0" smtClean="0">
+                        <a:rPr lang="en-US" altLang="ko-KR" sz="1300" b="0" dirty="0" smtClean="0">
                           <a:solidFill>
                             <a:srgbClr val="1A1A1A"/>
                           </a:solidFill>
-                          <a:latin typeface="+mn-lt"/>
-                        </a:rPr>
-                        <a:t>① 자(尺)는 하나: 이 축제 자신의 지난 회차 실측 배수(평소 대비 외지인). 발표치가 아니라 KT 가 센 값입니다.</a:t>
+                          <a:latin typeface="Noto Sans KR"/>
+                          <a:ea typeface="Noto Sans KR"/>
+                          <a:cs typeface="Noto Sans KR"/>
+                        </a:rPr>
+                        <a:t>- 기준은 그 축제 자신의 지난 회차입니다. 발표 집계가 아니라 KT 가 센 평소 대비 외지인 배수를 씁니다.</a:t>
                       </a:r>
                     </a:p>
                     <a:p>
                       <a:pPr marL="0" marR="0" lvl="0" indent="0" algn="just" defTabSz="914400" rtl="0" eaLnBrk="1" fontAlgn="auto" latinLnBrk="1" hangingPunct="1">
                         <a:lnSpc>
-                          <a:spcPct val="100000"/>
+                          <a:spcPct val="175000"/>
                         </a:lnSpc>
                         <a:spcBef>
                           <a:spcPts val="0"/>
@@ -8204,19 +8260,21 @@
                         <a:defRPr/>
                       </a:pPr>
                       <a:r>
-                        <a:rPr lang="en-US" altLang="ko-KR" sz="1200" b="0" dirty="0" smtClean="0">
+                        <a:rPr lang="en-US" altLang="ko-KR" sz="1300" b="0" dirty="0" smtClean="0">
                           <a:solidFill>
                             <a:srgbClr val="1A1A1A"/>
                           </a:solidFill>
-                          <a:latin typeface="+mn-lt"/>
-                        </a:rPr>
-                        <a:t>② 세 단계로 잽니다: 모집단 상한(하드 게이트) → 순증분(보조 신호) → 동일 정의 배수(주 근거). 임계값은 화면에 적습니다.</a:t>
+                          <a:latin typeface="Noto Sans KR"/>
+                          <a:ea typeface="Noto Sans KR"/>
+                          <a:cs typeface="Noto Sans KR"/>
+                        </a:rPr>
+                        <a:t>- 판정은 세 단계입니다. 모집단 상한(하드 게이트) → 순증분(보조 신호) → 동일 정의 배수(주 근거). 임계값은 군포 2026 실측 한 건과 619건 또래 분포로 맞춘 값이고, 화면이 먼저 "정한 값"이라고 적습니다.</a:t>
                       </a:r>
                     </a:p>
                     <a:p>
                       <a:pPr marL="0" marR="0" lvl="0" indent="0" algn="just" defTabSz="914400" rtl="0" eaLnBrk="1" fontAlgn="auto" latinLnBrk="1" hangingPunct="1">
                         <a:lnSpc>
-                          <a:spcPct val="100000"/>
+                          <a:spcPct val="175000"/>
                         </a:lnSpc>
                         <a:spcBef>
                           <a:spcPts val="0"/>
@@ -8232,19 +8290,21 @@
                         <a:defRPr/>
                       </a:pPr>
                       <a:r>
-                        <a:rPr lang="en-US" altLang="ko-KR" sz="1200" b="0" dirty="0" smtClean="0">
+                        <a:rPr lang="en-US" altLang="ko-KR" sz="1300" b="0" dirty="0" smtClean="0">
                           <a:solidFill>
                             <a:srgbClr val="1A1A1A"/>
                           </a:solidFill>
-                          <a:latin typeface="+mn-lt"/>
-                        </a:rPr>
-                        <a:t>③ 흥행 가능성은 예측값이 아니라 세 실측 위치로 답합니다: 자기 이력 안 위치 · 같은 인구 구간 또래 안 위치 · 축제 신호.</a:t>
+                          <a:latin typeface="Noto Sans KR"/>
+                          <a:ea typeface="Noto Sans KR"/>
+                          <a:cs typeface="Noto Sans KR"/>
+                        </a:rPr>
+                        <a:t>- 흥행 가능성은 예측값 대신 세 위치로 답합니다. 자기 이력 안 위치, 같은 인구 구간 또래 안 위치, 연도별 축제 신호.</a:t>
                       </a:r>
                     </a:p>
                     <a:p>
                       <a:pPr marL="0" marR="0" lvl="0" indent="0" algn="just" defTabSz="914400" rtl="0" eaLnBrk="1" fontAlgn="auto" latinLnBrk="1" hangingPunct="1">
                         <a:lnSpc>
-                          <a:spcPct val="100000"/>
+                          <a:spcPct val="175000"/>
                         </a:lnSpc>
                         <a:spcBef>
                           <a:spcPts val="0"/>
@@ -8260,19 +8320,21 @@
                         <a:defRPr/>
                       </a:pPr>
                       <a:r>
-                        <a:rPr lang="en-US" altLang="ko-KR" sz="1200" b="0" dirty="0" smtClean="0">
+                        <a:rPr lang="en-US" altLang="ko-KR" sz="1300" b="0" dirty="0" smtClean="0">
                           <a:solidFill>
                             <a:srgbClr val="1A1A1A"/>
                           </a:solidFill>
-                          <a:latin typeface="+mn-lt"/>
-                        </a:rPr>
-                        <a:t>④ 판정문에는 보완 문장이 따릅니다(무엇을 다시 잡고 무엇의 출처를 밝힐지). "안전하다"는 말은 어느 라벨에도 없습니다.</a:t>
+                          <a:latin typeface="Noto Sans KR"/>
+                          <a:ea typeface="Noto Sans KR"/>
+                          <a:cs typeface="Noto Sans KR"/>
+                        </a:rPr>
+                        <a:t>- 판정문 뒤에는 보완 문장이 붙습니다. 무엇을 다시 잡고 무엇의 출처를 밝힐지. "안전하다"는 말은 어느 라벨에도 없습니다.</a:t>
                       </a:r>
                     </a:p>
                     <a:p>
                       <a:pPr marL="0" marR="0" lvl="0" indent="0" algn="just" defTabSz="914400" rtl="0" eaLnBrk="1" fontAlgn="auto" latinLnBrk="1" hangingPunct="1">
                         <a:lnSpc>
-                          <a:spcPct val="100000"/>
+                          <a:spcPct val="175000"/>
                         </a:lnSpc>
                         <a:spcBef>
                           <a:spcPts val="0"/>
@@ -8288,19 +8350,21 @@
                         <a:defRPr/>
                       </a:pPr>
                       <a:r>
-                        <a:rPr lang="en-US" altLang="ko-KR" sz="1200" b="0" dirty="0" smtClean="0">
+                        <a:rPr lang="en-US" altLang="ko-KR" sz="1300" b="0" dirty="0" smtClean="0">
                           <a:solidFill>
                             <a:srgbClr val="1A1A1A"/>
                           </a:solidFill>
-                          <a:latin typeface="+mn-lt"/>
-                        </a:rPr>
-                        <a:t>⑤ 화면의 명·원 숫자는 전부 출처(API·값·기간·조회일)가 붙은 셀로만 나가고, 테스트가 매번 그것을 셉니다.</a:t>
+                          <a:latin typeface="Noto Sans KR"/>
+                          <a:ea typeface="Noto Sans KR"/>
+                          <a:cs typeface="Noto Sans KR"/>
+                        </a:rPr>
+                        <a:t>- 화면에 뜨는 명·원 숫자는 출처(API·값·기간·조회일)가 붙은 셀로만 나갑니다. 테스트가 매번 그것을 셉니다.</a:t>
                       </a:r>
                     </a:p>
                     <a:p>
                       <a:pPr marL="0" marR="0" lvl="0" indent="0" algn="just" defTabSz="914400" rtl="0" eaLnBrk="1" fontAlgn="auto" latinLnBrk="1" hangingPunct="1">
                         <a:lnSpc>
-                          <a:spcPct val="100000"/>
+                          <a:spcPct val="175000"/>
                         </a:lnSpc>
                         <a:spcBef>
                           <a:spcPts val="0"/>
@@ -8316,17 +8380,49 @@
                         <a:defRPr/>
                       </a:pPr>
                       <a:r>
-                        <a:rPr lang="en-US" altLang="ko-KR" sz="1200" b="0" dirty="0" smtClean="0">
+                        <a:rPr lang="en-US" altLang="ko-KR" sz="1300" b="0" dirty="0" smtClean="0">
                           <a:solidFill>
                             <a:srgbClr val="1A1A1A"/>
                           </a:solidFill>
-                          <a:latin typeface="+mn-lt"/>
-                        </a:rPr>
-                        <a:t>⑥ 결과는 A4 두 장으로 인쇄됩니다. 결재는 화면이 아니라 종이로 올라가기 때문입니다.</a:t>
+                          <a:latin typeface="Noto Sans KR"/>
+                          <a:ea typeface="Noto Sans KR"/>
+                          <a:cs typeface="Noto Sans KR"/>
+                        </a:rPr>
+                        <a:t>- 결과는 A4 두 장으로 인쇄됩니다. 결재가 화면이 아니라 종이로 올라가기 때문입니다.</a:t>
+                      </a:r>
+                    </a:p>
+                    <a:p>
+                      <a:pPr marL="0" marR="0" lvl="0" indent="0" algn="just" defTabSz="914400" rtl="0" eaLnBrk="1" fontAlgn="auto" latinLnBrk="1" hangingPunct="1">
+                        <a:lnSpc>
+                          <a:spcPct val="175000"/>
+                        </a:lnSpc>
+                        <a:spcBef>
+                          <a:spcPts val="0"/>
+                        </a:spcBef>
+                        <a:spcAft>
+                          <a:spcPts val="0"/>
+                        </a:spcAft>
+                        <a:buClrTx/>
+                        <a:buSzTx/>
+                        <a:buFontTx/>
+                        <a:buNone/>
+                        <a:tabLst/>
+                        <a:defRPr/>
+                      </a:pPr>
+                      <a:r>
+                        <a:rPr lang="en-US" altLang="ko-KR" sz="1300" b="0" dirty="0" smtClean="0">
+                          <a:solidFill>
+                            <a:srgbClr val="1A1A1A"/>
+                          </a:solidFill>
+                          <a:latin typeface="Noto Sans KR"/>
+                          <a:ea typeface="Noto Sans KR"/>
+                          <a:cs typeface="Noto Sans KR"/>
+                        </a:rPr>
+                        <a:t>이 방향에서 하지 않기로 한 것도 분명합니다. 방문객 수를 새로 예측하지 않고, 판정과 시뮬레이션에 생성형 모델을 쓰지 않으며, 근거를 못 찾으면 안전하다고 하지 않고 근거 없음이라고 적습니다.</a:t>
                       </a:r>
                     </a:p>
                   </a:txBody>
-                  <a:tcPr anchor="ctr">
+                  <a:tcPr anchor="t">
                     <a:lnL w="12700" cap="flat" cmpd="sng" algn="ctr">
                       <a:solidFill>
                         <a:schemeClr val="bg1">
@@ -8475,7 +8571,7 @@
                     <a:p>
                       <a:pPr marL="0" marR="0" lvl="0" indent="0" algn="just" defTabSz="914400" rtl="0" eaLnBrk="1" fontAlgn="auto" latinLnBrk="1" hangingPunct="1">
                         <a:lnSpc>
-                          <a:spcPct val="100000"/>
+                          <a:spcPct val="210000"/>
                         </a:lnSpc>
                         <a:spcBef>
                           <a:spcPts val="0"/>
@@ -8491,19 +8587,21 @@
                         <a:defRPr/>
                       </a:pPr>
                       <a:r>
-                        <a:rPr lang="en-US" altLang="ko-KR" sz="1200" b="0" dirty="0" smtClean="0">
+                        <a:rPr lang="en-US" altLang="ko-KR" sz="1300" b="0" dirty="0" smtClean="0">
                           <a:solidFill>
                             <a:srgbClr val="1A1A1A"/>
                           </a:solidFill>
-                          <a:latin typeface="+mn-lt"/>
-                        </a:rPr>
-                        <a:t>#축제/행사 기획 — 기획서 PDF 입력 → 판정 → 행사장 도면 보행 시뮬레이션(배치 편집·스트레스 테스트)</a:t>
+                          <a:latin typeface="Noto Sans KR"/>
+                          <a:ea typeface="Noto Sans KR"/>
+                          <a:cs typeface="Noto Sans KR"/>
+                        </a:rPr>
+                        <a:t>#축제/행사 기획 - 기획서 PDF 입력 → 판정 → 행사장 도면 보행 시뮬레이션(배치 편집·스트레스 테스트)</a:t>
                       </a:r>
                     </a:p>
                     <a:p>
                       <a:pPr marL="0" marR="0" lvl="0" indent="0" algn="just" defTabSz="914400" rtl="0" eaLnBrk="1" fontAlgn="auto" latinLnBrk="1" hangingPunct="1">
                         <a:lnSpc>
-                          <a:spcPct val="100000"/>
+                          <a:spcPct val="210000"/>
                         </a:lnSpc>
                         <a:spcBef>
                           <a:spcPts val="0"/>
@@ -8519,19 +8617,21 @@
                         <a:defRPr/>
                       </a:pPr>
                       <a:r>
-                        <a:rPr lang="en-US" altLang="ko-KR" sz="1200" b="0" dirty="0" smtClean="0">
+                        <a:rPr lang="en-US" altLang="ko-KR" sz="1300" b="0" dirty="0" smtClean="0">
                           <a:solidFill>
                             <a:srgbClr val="1A1A1A"/>
                           </a:solidFill>
-                          <a:latin typeface="+mn-lt"/>
-                        </a:rPr>
-                        <a:t>#사전 수요 예측 — 예상 방문객 3단 판정, 내년 배수 구간, 흥행 가능성의 세 실측 위치</a:t>
+                          <a:latin typeface="Noto Sans KR"/>
+                          <a:ea typeface="Noto Sans KR"/>
+                          <a:cs typeface="Noto Sans KR"/>
+                        </a:rPr>
+                        <a:t>#사전 수요 예측 - 예상 방문객 3단 판정, 내년 배수 구간, 흥행 가능성의 세 실측 위치</a:t>
                       </a:r>
                     </a:p>
                     <a:p>
                       <a:pPr marL="0" marR="0" lvl="0" indent="0" algn="just" defTabSz="914400" rtl="0" eaLnBrk="1" fontAlgn="auto" latinLnBrk="1" hangingPunct="1">
                         <a:lnSpc>
-                          <a:spcPct val="100000"/>
+                          <a:spcPct val="210000"/>
                         </a:lnSpc>
                         <a:spcBef>
                           <a:spcPts val="0"/>
@@ -8547,19 +8647,21 @@
                         <a:defRPr/>
                       </a:pPr>
                       <a:r>
-                        <a:rPr lang="en-US" altLang="ko-KR" sz="1200" b="0" dirty="0" smtClean="0">
+                        <a:rPr lang="en-US" altLang="ko-KR" sz="1300" b="0" dirty="0" smtClean="0">
                           <a:solidFill>
                             <a:srgbClr val="1A1A1A"/>
                           </a:solidFill>
-                          <a:latin typeface="+mn-lt"/>
-                        </a:rPr>
-                        <a:t>#보완 피드백 제공 — 라벨별 보완 문장, 1인당 예산 대조, 개최 기간·요일, 귀속 경고, 검증 보고서 A4 2장</a:t>
+                          <a:latin typeface="Noto Sans KR"/>
+                          <a:ea typeface="Noto Sans KR"/>
+                          <a:cs typeface="Noto Sans KR"/>
+                        </a:rPr>
+                        <a:t>#보완 피드백 제공 - 라벨별 보완 문장, 1인당 예산 대조, 개최 기간·요일, 귀속 경고, 검증 보고서 A4 2장</a:t>
                       </a:r>
                     </a:p>
                     <a:p>
                       <a:pPr marL="0" marR="0" lvl="0" indent="0" algn="just" defTabSz="914400" rtl="0" eaLnBrk="1" fontAlgn="auto" latinLnBrk="1" hangingPunct="1">
                         <a:lnSpc>
-                          <a:spcPct val="100000"/>
+                          <a:spcPct val="210000"/>
                         </a:lnSpc>
                         <a:spcBef>
                           <a:spcPts val="0"/>
@@ -8575,17 +8677,49 @@
                         <a:defRPr/>
                       </a:pPr>
                       <a:r>
-                        <a:rPr lang="en-US" altLang="ko-KR" sz="1200" b="0" dirty="0" smtClean="0">
+                        <a:rPr lang="en-US" altLang="ko-KR" sz="1300" b="0" dirty="0" smtClean="0">
                           <a:solidFill>
                             <a:srgbClr val="1A1A1A"/>
                           </a:solidFill>
-                          <a:latin typeface="+mn-lt"/>
-                        </a:rPr>
-                        <a:t>#데이터 기반 — 공사 KT 일별 실측 2,658일×272개 전수 적재, 셀마다 출처, 619건 자기검증, −52주 백테스트</a:t>
+                          <a:latin typeface="Noto Sans KR"/>
+                          <a:ea typeface="Noto Sans KR"/>
+                          <a:cs typeface="Noto Sans KR"/>
+                        </a:rPr>
+                        <a:t>#데이터 기반 - 공사 KT 일별 실측 2,658일×272개 전수 적재, 셀마다 출처, 619건 자기검증, -52주 백테스트</a:t>
+                      </a:r>
+                    </a:p>
+                    <a:p>
+                      <a:pPr marL="0" marR="0" lvl="0" indent="0" algn="just" defTabSz="914400" rtl="0" eaLnBrk="1" fontAlgn="auto" latinLnBrk="1" hangingPunct="1">
+                        <a:lnSpc>
+                          <a:spcPct val="210000"/>
+                        </a:lnSpc>
+                        <a:spcBef>
+                          <a:spcPts val="0"/>
+                        </a:spcBef>
+                        <a:spcAft>
+                          <a:spcPts val="0"/>
+                        </a:spcAft>
+                        <a:buClrTx/>
+                        <a:buSzTx/>
+                        <a:buFontTx/>
+                        <a:buNone/>
+                        <a:tabLst/>
+                        <a:defRPr/>
+                      </a:pPr>
+                      <a:r>
+                        <a:rPr lang="en-US" altLang="ko-KR" sz="1300" b="0" dirty="0" smtClean="0">
+                          <a:solidFill>
+                            <a:srgbClr val="1A1A1A"/>
+                          </a:solidFill>
+                          <a:latin typeface="Noto Sans KR"/>
+                          <a:ea typeface="Noto Sans KR"/>
+                          <a:cs typeface="Noto Sans KR"/>
+                        </a:rPr>
+                        <a:t>네 해시태그는 한 화면 안에서 이어집니다. 같은 기획안을 물고 판정 → 보완 문장 → 도면 시뮬레이션으로 돕니다.</a:t>
                       </a:r>
                     </a:p>
                   </a:txBody>
-                  <a:tcPr anchor="ctr">
+                  <a:tcPr anchor="t">
                     <a:lnL w="12700" cap="flat" cmpd="sng" algn="ctr">
                       <a:solidFill>
                         <a:schemeClr val="bg1">
@@ -8998,7 +9132,7 @@
                     <a:p>
                       <a:pPr marL="0" marR="0" lvl="0" indent="0" algn="ctr" defTabSz="914400" rtl="0" eaLnBrk="1" fontAlgn="auto" latinLnBrk="1" hangingPunct="1">
                         <a:lnSpc>
-                          <a:spcPct val="100000"/>
+                          <a:spcPct val="115000"/>
                         </a:lnSpc>
                         <a:spcBef>
                           <a:spcPts val="0"/>
@@ -9014,11 +9148,13 @@
                         <a:defRPr/>
                       </a:pPr>
                       <a:r>
-                        <a:rPr lang="en-US" altLang="ko-KR" sz="1200" b="0" baseline="0" smtClean="0">
+                        <a:rPr lang="en-US" altLang="ko-KR" sz="1100" b="0" baseline="0" smtClean="0">
                           <a:solidFill>
                             <a:srgbClr val="1A1A1A"/>
                           </a:solidFill>
-                          <a:latin typeface="+mn-lt"/>
+                          <a:latin typeface="Noto Sans KR"/>
+                          <a:ea typeface="Noto Sans KR"/>
+                          <a:cs typeface="Noto Sans KR"/>
                         </a:rPr>
                         <a:t>#축제/행사 기획</a:t>
                       </a:r>
@@ -9085,7 +9221,7 @@
                     <a:p>
                       <a:pPr marL="0" marR="0" lvl="0" indent="0" algn="ctr" defTabSz="914400" rtl="0" eaLnBrk="1" fontAlgn="auto" latinLnBrk="1" hangingPunct="1">
                         <a:lnSpc>
-                          <a:spcPct val="100000"/>
+                          <a:spcPct val="115000"/>
                         </a:lnSpc>
                         <a:spcBef>
                           <a:spcPts val="0"/>
@@ -9105,7 +9241,9 @@
                           <a:solidFill>
                             <a:srgbClr val="1A1A1A"/>
                           </a:solidFill>
-                          <a:latin typeface="+mn-lt"/>
+                          <a:latin typeface="Noto Sans KR"/>
+                          <a:ea typeface="Noto Sans KR"/>
+                          <a:cs typeface="Noto Sans KR"/>
                         </a:rPr>
                         <a:t>기획서 PDF 입력</a:t>
                       </a:r>
@@ -9119,7 +9257,7 @@
                     <a:p>
                       <a:pPr marL="0" marR="0" lvl="0" indent="0" algn="ctr" defTabSz="914400" rtl="0" eaLnBrk="1" fontAlgn="auto" latinLnBrk="1" hangingPunct="1">
                         <a:lnSpc>
-                          <a:spcPct val="100000"/>
+                          <a:spcPct val="115000"/>
                         </a:lnSpc>
                         <a:spcBef>
                           <a:spcPts val="0"/>
@@ -9139,7 +9277,9 @@
                           <a:solidFill>
                             <a:srgbClr val="1A1A1A"/>
                           </a:solidFill>
-                          <a:latin typeface="+mn-lt"/>
+                          <a:latin typeface="Noto Sans KR"/>
+                          <a:ea typeface="Noto Sans KR"/>
+                          <a:cs typeface="Noto Sans KR"/>
                         </a:rPr>
                         <a:t>행사장 도면 시뮬레이션</a:t>
                       </a:r>
@@ -9153,7 +9293,7 @@
                     <a:p>
                       <a:pPr marL="0" marR="0" lvl="0" indent="0" algn="ctr" defTabSz="914400" rtl="0" eaLnBrk="1" fontAlgn="auto" latinLnBrk="1" hangingPunct="1">
                         <a:lnSpc>
-                          <a:spcPct val="100000"/>
+                          <a:spcPct val="115000"/>
                         </a:lnSpc>
                         <a:spcBef>
                           <a:spcPts val="0"/>
@@ -9173,7 +9313,9 @@
                           <a:solidFill>
                             <a:srgbClr val="1A1A1A"/>
                           </a:solidFill>
-                          <a:latin typeface="+mn-lt"/>
+                          <a:latin typeface="Noto Sans KR"/>
+                          <a:ea typeface="Noto Sans KR"/>
+                          <a:cs typeface="Noto Sans KR"/>
                         </a:rPr>
                         <a:t>배치 편집·스트레스 테스트</a:t>
                       </a:r>
@@ -9240,7 +9382,7 @@
                     <a:p>
                       <a:pPr marL="0" marR="0" lvl="0" indent="0" algn="l" defTabSz="914400" rtl="0" eaLnBrk="1" fontAlgn="auto" latinLnBrk="1" hangingPunct="1">
                         <a:lnSpc>
-                          <a:spcPct val="100000"/>
+                          <a:spcPct val="115000"/>
                         </a:lnSpc>
                         <a:spcBef>
                           <a:spcPts val="0"/>
@@ -9256,13 +9398,15 @@
                         <a:defRPr/>
                       </a:pPr>
                       <a:r>
-                        <a:rPr lang="en-US" altLang="ko-KR" sz="900" b="0" baseline="0" dirty="0" smtClean="0">
+                        <a:rPr lang="en-US" altLang="ko-KR" sz="1000" b="0" baseline="0" dirty="0" smtClean="0">
                           <a:solidFill>
                             <a:srgbClr val="1A1A1A"/>
                           </a:solidFill>
-                          <a:latin typeface="+mn-lt"/>
-                        </a:rPr>
-                        <a:t>첫 화면에 기획서 PDF 를 올리면 예상 방문객·기간·지역·예산·지난 회차를 옮겨 적어 판정 화면으로 갑니다(모델은 옮겨 적기 1회, 판정에는 안 씀). 시뮬레이션 탭은 같은 기획안을 물고 열리고, 배치도를 밑그림으로 깔아 출입구·부스·통로를 놓은 뒤 보행자를 흘려 어디가 막히는지 잽니다. 유입 시나리오·출입구 몫은 입력이고 기본값은 출처 없는 가정이라고 적습니다. 스트레스 테스트는 유입 배수를 0.5씩 올려 행안부 "위험"(5명/㎡)이 60초 넘게 유지되는 첫 배수를 냅니다. 말로 물으면 시뮬 수치로만 답합니다.</a:t>
+                          <a:latin typeface="Noto Sans KR"/>
+                          <a:ea typeface="Noto Sans KR"/>
+                          <a:cs typeface="Noto Sans KR"/>
+                        </a:rPr>
+                        <a:t>첫 화면에 기획서 PDF 를 올리면 예상 방문객·기간·지역·예산·지난 회차를 옮겨 적어 판정 화면으로 갑니다(모델은 옮겨 적기 1회, 판정에는 안 씀). 시뮬레이션 탭은 같은 기획안을 물고 열리고, 배치도를 밑그림으로 깔아 출입구·부스·통로를 놓은 뒤 보행자를 흘려 어디가 막히는지 잽니다. 유입 시나리오·출입구 몫은 입력이고 기본값은 출처 없는 가정이라고 적습니다. 스트레스 테스트는 유입 배수를 0.5씩 올려 행안부 "위험"(5명/㎡)이 60초 넘게 유지되는 첫 배수를 냅니다. 보행 엔진은 Weidmann 기본도표(폭 2m 통로 정상류)와 대조해 7점 중 6점이 ±30% 안이고, 벗어난 점도 전부 느린 쪽(밀도 과대·상한 배수 과소)이라 안전 측입니다. 도면은 담당자가 올린 배치도면 어느 축제든 서고, 군포는 예시 1건입니다.</a:t>
                       </a:r>
                       <a:endParaRPr lang="en-US" altLang="ko-KR" sz="1800" b="0" baseline="0" dirty="0" smtClean="0">
                         <a:solidFill>
@@ -9334,7 +9478,7 @@
                     <a:p>
                       <a:pPr marL="0" marR="0" lvl="0" indent="0" algn="ctr" defTabSz="914400" rtl="0" eaLnBrk="1" fontAlgn="auto" latinLnBrk="1" hangingPunct="1">
                         <a:lnSpc>
-                          <a:spcPct val="100000"/>
+                          <a:spcPct val="115000"/>
                         </a:lnSpc>
                         <a:spcBef>
                           <a:spcPts val="0"/>
@@ -9350,11 +9494,13 @@
                         <a:defRPr/>
                       </a:pPr>
                       <a:r>
-                        <a:rPr lang="en-US" altLang="ko-KR" sz="1200" b="0" baseline="0" smtClean="0">
+                        <a:rPr lang="en-US" altLang="ko-KR" sz="1100" b="0" baseline="0" smtClean="0">
                           <a:solidFill>
                             <a:srgbClr val="1A1A1A"/>
                           </a:solidFill>
-                          <a:latin typeface="+mn-lt"/>
+                          <a:latin typeface="Noto Sans KR"/>
+                          <a:ea typeface="Noto Sans KR"/>
+                          <a:cs typeface="Noto Sans KR"/>
                         </a:rPr>
                         <a:t>#사전 수요 예측</a:t>
                       </a:r>
@@ -9421,7 +9567,7 @@
                     <a:p>
                       <a:pPr marL="0" marR="0" lvl="0" indent="0" algn="ctr" defTabSz="914400" rtl="0" eaLnBrk="1" fontAlgn="auto" latinLnBrk="1" hangingPunct="1">
                         <a:lnSpc>
-                          <a:spcPct val="100000"/>
+                          <a:spcPct val="115000"/>
                         </a:lnSpc>
                         <a:spcBef>
                           <a:spcPts val="0"/>
@@ -9441,7 +9587,9 @@
                           <a:solidFill>
                             <a:srgbClr val="1A1A1A"/>
                           </a:solidFill>
-                          <a:latin typeface="+mn-lt"/>
+                          <a:latin typeface="Noto Sans KR"/>
+                          <a:ea typeface="Noto Sans KR"/>
+                          <a:cs typeface="Noto Sans KR"/>
                         </a:rPr>
                         <a:t>예상 방문객 3단 판정</a:t>
                       </a:r>
@@ -9455,7 +9603,7 @@
                     <a:p>
                       <a:pPr marL="0" marR="0" lvl="0" indent="0" algn="ctr" defTabSz="914400" rtl="0" eaLnBrk="1" fontAlgn="auto" latinLnBrk="1" hangingPunct="1">
                         <a:lnSpc>
-                          <a:spcPct val="100000"/>
+                          <a:spcPct val="115000"/>
                         </a:lnSpc>
                         <a:spcBef>
                           <a:spcPts val="0"/>
@@ -9475,7 +9623,9 @@
                           <a:solidFill>
                             <a:srgbClr val="1A1A1A"/>
                           </a:solidFill>
-                          <a:latin typeface="+mn-lt"/>
+                          <a:latin typeface="Noto Sans KR"/>
+                          <a:ea typeface="Noto Sans KR"/>
+                          <a:cs typeface="Noto Sans KR"/>
                         </a:rPr>
                         <a:t>내년 배수 구간</a:t>
                       </a:r>
@@ -9489,7 +9639,7 @@
                     <a:p>
                       <a:pPr marL="0" marR="0" lvl="0" indent="0" algn="ctr" defTabSz="914400" rtl="0" eaLnBrk="1" fontAlgn="auto" latinLnBrk="1" hangingPunct="1">
                         <a:lnSpc>
-                          <a:spcPct val="100000"/>
+                          <a:spcPct val="115000"/>
                         </a:lnSpc>
                         <a:spcBef>
                           <a:spcPts val="0"/>
@@ -9509,7 +9659,9 @@
                           <a:solidFill>
                             <a:srgbClr val="1A1A1A"/>
                           </a:solidFill>
-                          <a:latin typeface="+mn-lt"/>
+                          <a:latin typeface="Noto Sans KR"/>
+                          <a:ea typeface="Noto Sans KR"/>
+                          <a:cs typeface="Noto Sans KR"/>
                         </a:rPr>
                         <a:t>흥행 가능성의 세 실측 위치</a:t>
                       </a:r>
@@ -9576,7 +9728,7 @@
                     <a:p>
                       <a:pPr marL="0" marR="0" lvl="0" indent="0" algn="l" defTabSz="914400" rtl="0" eaLnBrk="1" fontAlgn="auto" latinLnBrk="1" hangingPunct="1">
                         <a:lnSpc>
-                          <a:spcPct val="100000"/>
+                          <a:spcPct val="115000"/>
                         </a:lnSpc>
                         <a:spcBef>
                           <a:spcPts val="0"/>
@@ -9592,13 +9744,15 @@
                         <a:defRPr/>
                       </a:pPr>
                       <a:r>
-                        <a:rPr lang="en-US" altLang="ko-KR" sz="900" b="0" baseline="0" dirty="0" smtClean="0">
+                        <a:rPr lang="en-US" altLang="ko-KR" sz="1000" b="0" baseline="0" dirty="0" smtClean="0">
                           <a:solidFill>
                             <a:srgbClr val="1A1A1A"/>
                           </a:solidFill>
-                          <a:latin typeface="+mn-lt"/>
-                        </a:rPr>
-                        <a:t>① 모집단 상한: 예상 방문객 ÷ 작년 축제 기간 시군구 전체 체류(0.80 이상 상한 초과 · 0.50 이상 과대) ② 순증분: ÷ 작년 축제가 실제로 끌어온 순증(3.0 이상 주의 신호) ③ 동일 정의 배수: 기획안이 요구하는 평소 대비 배수 ÷ 이 축제 이력의 최대 배수(0.70/1.00/1.30 → 과소/통과/주의/과대). 연인원이 실인원 상한을 넘으면 손익분기 회전율(군포 발표 217,502명 → 1.04회, 화천 186만 → 2.93회)을 냅니다. 내년 배수 구간은 이력 연도별 배수의 최소~최대(군포 평균 1.1~1.3배·최대일 1.4~1.6배), 이력이 없으면 같은 인구 구간 또래의 중앙값~상위 5%. 흥행 가능성은 자기 이력 안 위치·또래 안 위치·연도별 축제 신호(뚜렷함/약함)로 보입니다.</a:t>
+                          <a:latin typeface="Noto Sans KR"/>
+                          <a:ea typeface="Noto Sans KR"/>
+                          <a:cs typeface="Noto Sans KR"/>
+                        </a:rPr>
+                        <a:t>① 모집단 상한: 예상 방문객 ÷ 작년 축제 기간 시군구 전체 체류(0.80 이상 상한 초과 · 0.50 이상 과대) ② 순증분: ÷ 작년 축제가 실제로 끌어온 순증(3.0 이상 주의 신호) ③ 동일 정의 배수: 기획안이 요구하는 평소 대비 배수 ÷ 이 축제 이력의 최대 배수(0.70/1.00/1.30 → 과소/통과/주의/과대). 연인원이 실인원 상한을 넘으면 손익분기 회전율 = 예상 방문객 ÷ (0.80 × 상한 분모) 를 냅니다(화천 186만 ÷ (0.80 × 793,874) = 2.93회 - 한 사람이 평균 2.93번 잡혀야 이 값이 섭니다). 내년 배수 구간은 이력 연도별 배수의 최소~최대(군포 평균 1.1~1.3배·최대일 1.4~1.6배), 이력이 없으면 같은 인구 구간 또래의 중앙값~상위 5%. 흥행 가능성은 자기 이력 안 위치·또래 안 위치·연도별 축제 신호(뚜렷함/약함)로 보입니다.</a:t>
                       </a:r>
                       <a:endParaRPr lang="en-US" altLang="ko-KR" sz="1800" b="0" baseline="0" dirty="0" smtClean="0">
                         <a:solidFill>
@@ -9670,7 +9824,7 @@
                     <a:p>
                       <a:pPr marL="0" marR="0" lvl="0" indent="0" algn="ctr" defTabSz="914400" rtl="0" eaLnBrk="1" fontAlgn="auto" latinLnBrk="1" hangingPunct="1">
                         <a:lnSpc>
-                          <a:spcPct val="100000"/>
+                          <a:spcPct val="115000"/>
                         </a:lnSpc>
                         <a:spcBef>
                           <a:spcPts val="0"/>
@@ -9686,11 +9840,13 @@
                         <a:defRPr/>
                       </a:pPr>
                       <a:r>
-                        <a:rPr lang="en-US" altLang="ko-KR" sz="1200" b="0" baseline="0" smtClean="0">
+                        <a:rPr lang="en-US" altLang="ko-KR" sz="1100" b="0" baseline="0" smtClean="0">
                           <a:solidFill>
                             <a:srgbClr val="1A1A1A"/>
                           </a:solidFill>
-                          <a:latin typeface="+mn-lt"/>
+                          <a:latin typeface="Noto Sans KR"/>
+                          <a:ea typeface="Noto Sans KR"/>
+                          <a:cs typeface="Noto Sans KR"/>
                         </a:rPr>
                         <a:t>#보완 피드백 제공</a:t>
                       </a:r>
@@ -9757,7 +9913,7 @@
                     <a:p>
                       <a:pPr marL="0" marR="0" lvl="0" indent="0" algn="ctr" defTabSz="914400" rtl="0" eaLnBrk="1" fontAlgn="auto" latinLnBrk="1" hangingPunct="1">
                         <a:lnSpc>
-                          <a:spcPct val="100000"/>
+                          <a:spcPct val="115000"/>
                         </a:lnSpc>
                         <a:spcBef>
                           <a:spcPts val="0"/>
@@ -9777,7 +9933,9 @@
                           <a:solidFill>
                             <a:srgbClr val="1A1A1A"/>
                           </a:solidFill>
-                          <a:latin typeface="+mn-lt"/>
+                          <a:latin typeface="Noto Sans KR"/>
+                          <a:ea typeface="Noto Sans KR"/>
+                          <a:cs typeface="Noto Sans KR"/>
                         </a:rPr>
                         <a:t>라벨별 보완 문장</a:t>
                       </a:r>
@@ -9791,7 +9949,7 @@
                     <a:p>
                       <a:pPr marL="0" marR="0" lvl="0" indent="0" algn="ctr" defTabSz="914400" rtl="0" eaLnBrk="1" fontAlgn="auto" latinLnBrk="1" hangingPunct="1">
                         <a:lnSpc>
-                          <a:spcPct val="100000"/>
+                          <a:spcPct val="115000"/>
                         </a:lnSpc>
                         <a:spcBef>
                           <a:spcPts val="0"/>
@@ -9811,7 +9969,9 @@
                           <a:solidFill>
                             <a:srgbClr val="1A1A1A"/>
                           </a:solidFill>
-                          <a:latin typeface="+mn-lt"/>
+                          <a:latin typeface="Noto Sans KR"/>
+                          <a:ea typeface="Noto Sans KR"/>
+                          <a:cs typeface="Noto Sans KR"/>
                         </a:rPr>
                         <a:t>1인당 예산 대조</a:t>
                       </a:r>
@@ -9825,7 +9985,7 @@
                     <a:p>
                       <a:pPr marL="0" marR="0" lvl="0" indent="0" algn="ctr" defTabSz="914400" rtl="0" eaLnBrk="1" fontAlgn="auto" latinLnBrk="1" hangingPunct="1">
                         <a:lnSpc>
-                          <a:spcPct val="100000"/>
+                          <a:spcPct val="115000"/>
                         </a:lnSpc>
                         <a:spcBef>
                           <a:spcPts val="0"/>
@@ -9845,7 +10005,9 @@
                           <a:solidFill>
                             <a:srgbClr val="1A1A1A"/>
                           </a:solidFill>
-                          <a:latin typeface="+mn-lt"/>
+                          <a:latin typeface="Noto Sans KR"/>
+                          <a:ea typeface="Noto Sans KR"/>
+                          <a:cs typeface="Noto Sans KR"/>
                         </a:rPr>
                         <a:t>귀속 경고 · 검증 보고서 A4 2장</a:t>
                       </a:r>
@@ -9912,7 +10074,7 @@
                     <a:p>
                       <a:pPr marL="0" marR="0" lvl="0" indent="0" algn="l" defTabSz="914400" rtl="0" eaLnBrk="1" fontAlgn="auto" latinLnBrk="1" hangingPunct="1">
                         <a:lnSpc>
-                          <a:spcPct val="100000"/>
+                          <a:spcPct val="115000"/>
                         </a:lnSpc>
                         <a:spcBef>
                           <a:spcPts val="0"/>
@@ -9928,11 +10090,13 @@
                         <a:defRPr/>
                       </a:pPr>
                       <a:r>
-                        <a:rPr lang="en-US" altLang="ko-KR" sz="900" b="0" baseline="0" dirty="0" smtClean="0">
+                        <a:rPr lang="en-US" altLang="ko-KR" sz="1000" b="0" baseline="0" dirty="0" smtClean="0">
                           <a:solidFill>
                             <a:srgbClr val="1A1A1A"/>
                           </a:solidFill>
-                          <a:latin typeface="+mn-lt"/>
+                          <a:latin typeface="Noto Sans KR"/>
+                          <a:ea typeface="Noto Sans KR"/>
+                          <a:cs typeface="Noto Sans KR"/>
                         </a:rPr>
                         <a:t>판정 라벨마다 담당자가 다음에 할 일을 문장으로 냅니다("예상 방문객을 이 축제 이력 배수 안에서 다시 잡고 원래 숫자의 출처와 산정 방식을 밝힌다"). 1인당 예산은 기획안 기준과 작년 실측 순증 기준을 나란히 놓아 오차를 보입니다. 개최 기간·요일은 이력 최대일 요일·주말 포함·길이로 봅니다. 작년 축제 기간 반경 50km 에 다른 축제가 있었으면(공사 searchFestival2 실시간) "이 배수는 시군구 배수이고 이 축제 몫만이 아니다"라고 경고합니다. 검증 보고서 A4 2장(결론·판정표·구간·보완 / 연도별 실측·출처·정의와 임계)은 브라우저 인쇄로 PDF 가 됩니다.</a:t>
                       </a:r>
@@ -10006,7 +10170,7 @@
                     <a:p>
                       <a:pPr marL="0" marR="0" lvl="0" indent="0" algn="ctr" defTabSz="914400" rtl="0" eaLnBrk="1" fontAlgn="auto" latinLnBrk="1" hangingPunct="1">
                         <a:lnSpc>
-                          <a:spcPct val="100000"/>
+                          <a:spcPct val="115000"/>
                         </a:lnSpc>
                         <a:spcBef>
                           <a:spcPts val="0"/>
@@ -10022,11 +10186,13 @@
                         <a:defRPr/>
                       </a:pPr>
                       <a:r>
-                        <a:rPr lang="en-US" altLang="ko-KR" sz="1200" b="0" baseline="0" smtClean="0">
+                        <a:rPr lang="en-US" altLang="ko-KR" sz="1100" b="0" baseline="0" smtClean="0">
                           <a:solidFill>
                             <a:srgbClr val="1A1A1A"/>
                           </a:solidFill>
-                          <a:latin typeface="+mn-lt"/>
+                          <a:latin typeface="Noto Sans KR"/>
+                          <a:ea typeface="Noto Sans KR"/>
+                          <a:cs typeface="Noto Sans KR"/>
                         </a:rPr>
                         <a:t>#데이터 기반</a:t>
                       </a:r>
@@ -10093,7 +10259,7 @@
                     <a:p>
                       <a:pPr marL="0" marR="0" lvl="0" indent="0" algn="ctr" defTabSz="914400" rtl="0" eaLnBrk="1" fontAlgn="auto" latinLnBrk="1" hangingPunct="1">
                         <a:lnSpc>
-                          <a:spcPct val="100000"/>
+                          <a:spcPct val="115000"/>
                         </a:lnSpc>
                         <a:spcBef>
                           <a:spcPts val="0"/>
@@ -10113,7 +10279,9 @@
                           <a:solidFill>
                             <a:srgbClr val="1A1A1A"/>
                           </a:solidFill>
-                          <a:latin typeface="+mn-lt"/>
+                          <a:latin typeface="Noto Sans KR"/>
+                          <a:ea typeface="Noto Sans KR"/>
+                          <a:cs typeface="Noto Sans KR"/>
                         </a:rPr>
                         <a:t>KT 일별 실측 전수 적재</a:t>
                       </a:r>
@@ -10127,7 +10295,7 @@
                     <a:p>
                       <a:pPr marL="0" marR="0" lvl="0" indent="0" algn="ctr" defTabSz="914400" rtl="0" eaLnBrk="1" fontAlgn="auto" latinLnBrk="1" hangingPunct="1">
                         <a:lnSpc>
-                          <a:spcPct val="100000"/>
+                          <a:spcPct val="115000"/>
                         </a:lnSpc>
                         <a:spcBef>
                           <a:spcPts val="0"/>
@@ -10147,7 +10315,9 @@
                           <a:solidFill>
                             <a:srgbClr val="1A1A1A"/>
                           </a:solidFill>
-                          <a:latin typeface="+mn-lt"/>
+                          <a:latin typeface="Noto Sans KR"/>
+                          <a:ea typeface="Noto Sans KR"/>
+                          <a:cs typeface="Noto Sans KR"/>
                         </a:rPr>
                         <a:t>셀마다 출처</a:t>
                       </a:r>
@@ -10161,7 +10331,7 @@
                     <a:p>
                       <a:pPr marL="0" marR="0" lvl="0" indent="0" algn="ctr" defTabSz="914400" rtl="0" eaLnBrk="1" fontAlgn="auto" latinLnBrk="1" hangingPunct="1">
                         <a:lnSpc>
-                          <a:spcPct val="100000"/>
+                          <a:spcPct val="115000"/>
                         </a:lnSpc>
                         <a:spcBef>
                           <a:spcPts val="0"/>
@@ -10181,7 +10351,9 @@
                           <a:solidFill>
                             <a:srgbClr val="1A1A1A"/>
                           </a:solidFill>
-                          <a:latin typeface="+mn-lt"/>
+                          <a:latin typeface="Noto Sans KR"/>
+                          <a:ea typeface="Noto Sans KR"/>
+                          <a:cs typeface="Noto Sans KR"/>
                         </a:rPr>
                         <a:t>619건 자기검증 · 백테스트</a:t>
                       </a:r>
@@ -10248,7 +10420,7 @@
                     <a:p>
                       <a:pPr marL="0" marR="0" lvl="0" indent="0" algn="l" defTabSz="914400" rtl="0" eaLnBrk="1" fontAlgn="auto" latinLnBrk="1" hangingPunct="1">
                         <a:lnSpc>
-                          <a:spcPct val="100000"/>
+                          <a:spcPct val="115000"/>
                         </a:lnSpc>
                         <a:spcBef>
                           <a:spcPts val="0"/>
@@ -10264,13 +10436,15 @@
                         <a:defRPr/>
                       </a:pPr>
                       <a:r>
-                        <a:rPr lang="en-US" altLang="ko-KR" sz="900" b="0" baseline="0" dirty="0" smtClean="0">
+                        <a:rPr lang="en-US" altLang="ko-KR" sz="1000" b="0" baseline="0" dirty="0" smtClean="0">
                           <a:solidFill>
                             <a:srgbClr val="1A1A1A"/>
                           </a:solidFill>
-                          <a:latin typeface="+mn-lt"/>
-                        </a:rPr>
-                        <a:t>공사 TourAPI 데이터랩 서비스(locgoRegnVisitrDDList)로 시군구 272개 × 2019-05-01~2026-08-09(2,658일) 일별 방문자(현지인·외지인·외국인)를 개발 기간 안에 전수 호출해 697,403행을 적재했습니다. 판정·구간·백테스트의 유일한 실측 원천이고, 데이터랩 축제 목록 619건의 배수도 이 자료로 전부 재계산했습니다. 화면의 명·배·원 숫자는 API·값·기간·조회일 네 속성이 붙은 셀로만 나가고 e2e 테스트가 출처 밖의 "N명"을 셉니다. 실측 근거 화면은 연도별 전후 4주 곡선과 표를 보이고, 619건 leave-one-out(정밀도 65.8% · 재현율 61.6% · 무작위 대비 3.26배)과 −52주 근사 백테스트(표본 381건, 두 해 채택 325건 중 167건(51.4%))를 한계와 함께 적습니다.</a:t>
+                          <a:latin typeface="Noto Sans KR"/>
+                          <a:ea typeface="Noto Sans KR"/>
+                          <a:cs typeface="Noto Sans KR"/>
+                        </a:rPr>
+                        <a:t>공사 TourAPI 데이터랩 서비스(locgoRegnVisitrDDList)로 시군구 272개 × 2019-05-01~2026-08-09(2,658일) 일별 방문자(현지인·외지인·외국인)를 개발 기간 안에 전수 호출해 697,403행을 적재했습니다. 판정·구간·백테스트의 유일한 실측 원천이고, 데이터랩 축제 목록 619건의 배수도 이 자료로 전부 재계산했습니다. 화면의 명·배·원 숫자는 API·값·기간·조회일 네 속성이 붙은 셀로만 나가고 e2e 테스트가 출처 밖의 "N명"을 셉니다. 실측 근거 화면은 연도별 전후 4주 곡선과 표를 보이고, 619건 leave-one-out(정밀도 65.8% · 재현율 61.6% · 무작위 대비 3.26배)과 -52주 근사 백테스트(표본 381건, 두 해 채택 325건 중 167건(51.4%))를 한계와 함께 적습니다.</a:t>
                       </a:r>
                       <a:endParaRPr lang="en-US" altLang="ko-KR" sz="1800" b="0" baseline="0" dirty="0" smtClean="0">
                         <a:solidFill>
@@ -10756,7 +10930,7 @@
                     <a:p>
                       <a:pPr marL="0" marR="0" lvl="0" indent="0" algn="ctr" defTabSz="914400" rtl="0" eaLnBrk="1" fontAlgn="auto" latinLnBrk="1" hangingPunct="1">
                         <a:lnSpc>
-                          <a:spcPct val="100000"/>
+                          <a:spcPct val="115000"/>
                         </a:lnSpc>
                         <a:spcBef>
                           <a:spcPts val="0"/>
@@ -10776,7 +10950,9 @@
                           <a:solidFill>
                             <a:srgbClr val="1A1A1A"/>
                           </a:solidFill>
-                          <a:latin typeface="+mn-lt"/>
+                          <a:latin typeface="Noto Sans KR"/>
+                          <a:ea typeface="Noto Sans KR"/>
+                          <a:cs typeface="Noto Sans KR"/>
                         </a:rPr>
                         <a:t/>
                       </a:r>
@@ -10840,7 +11016,13 @@
                   <a:txBody>
                     <a:bodyPr/>
                     <a:lstStyle/>
-                    <a:p/>
+                    <a:p>
+                      <a:pPr>
+                        <a:lnSpc>
+                          <a:spcPct val="115000"/>
+                        </a:lnSpc>
+                      </a:pPr>
+                    </a:p>
                   </a:txBody>
                   <a:tcPr anchor="ctr">
                     <a:lnL w="12700" cap="flat" cmpd="sng" algn="ctr">
@@ -10894,7 +11076,13 @@
                   <a:txBody>
                     <a:bodyPr/>
                     <a:lstStyle/>
-                    <a:p/>
+                    <a:p>
+                      <a:pPr>
+                        <a:lnSpc>
+                          <a:spcPct val="115000"/>
+                        </a:lnSpc>
+                      </a:pPr>
+                    </a:p>
                   </a:txBody>
                   <a:tcPr anchor="ctr">
                     <a:lnL w="12700" cap="flat" cmpd="sng" algn="ctr">
@@ -10948,7 +11136,13 @@
                   <a:txBody>
                     <a:bodyPr/>
                     <a:lstStyle/>
-                    <a:p/>
+                    <a:p>
+                      <a:pPr>
+                        <a:lnSpc>
+                          <a:spcPct val="115000"/>
+                        </a:lnSpc>
+                      </a:pPr>
+                    </a:p>
                   </a:txBody>
                   <a:tcPr anchor="ctr">
                     <a:lnL w="12700" cap="flat" cmpd="sng" algn="ctr">
@@ -11012,7 +11206,7 @@
                     <a:p>
                       <a:pPr marL="0" marR="0" lvl="0" indent="0" algn="ctr" defTabSz="914400" rtl="0" eaLnBrk="1" fontAlgn="auto" latinLnBrk="1" hangingPunct="1">
                         <a:lnSpc>
-                          <a:spcPct val="100000"/>
+                          <a:spcPct val="115000"/>
                         </a:lnSpc>
                         <a:spcBef>
                           <a:spcPts val="0"/>
@@ -11032,9 +11226,11 @@
                           <a:solidFill>
                             <a:srgbClr val="1A1A1A"/>
                           </a:solidFill>
-                          <a:latin typeface="+mn-lt"/>
-                        </a:rPr>
-                        <a:t>① 첫 화면에 기획서 PDF 를 올리고 [읽어서 판정하기]</a:t>
+                          <a:latin typeface="Noto Sans KR"/>
+                          <a:ea typeface="Noto Sans KR"/>
+                          <a:cs typeface="Noto Sans KR"/>
+                        </a:rPr>
+                        <a:t>① 첫 화면에 기획서 PDF 를 올린다</a:t>
                       </a:r>
                       <a:endParaRPr lang="en-US" altLang="ko-KR" b="0">
                         <a:solidFill>
@@ -11096,13 +11292,21 @@
                     <a:bodyPr/>
                     <a:lstStyle/>
                     <a:p>
+                      <a:pPr>
+                        <a:lnSpc>
+                          <a:spcPct val="115000"/>
+                        </a:lnSpc>
+                      </a:pPr>
                       <a:r>
                         <a:rPr sz="1000">
                           <a:solidFill>
                             <a:srgbClr val="1A1A1A"/>
                           </a:solidFill>
-                        </a:rPr>
-                        <a:t>② 판정 화면 상단 [시뮬레이션] 탭 → 배치도 밑그림 깔기(축척 두 점 + 거리)</a:t>
+                          <a:latin typeface="Noto Sans KR"/>
+                          <a:ea typeface="Noto Sans KR"/>
+                          <a:cs typeface="Noto Sans KR"/>
+                        </a:rPr>
+                        <a:t>② [시뮬레이션] 탭에서 배치도를 밑그림으로 깐다</a:t>
                       </a:r>
                     </a:p>
                   </a:txBody>
@@ -11159,13 +11363,21 @@
                     <a:bodyPr/>
                     <a:lstStyle/>
                     <a:p>
+                      <a:pPr>
+                        <a:lnSpc>
+                          <a:spcPct val="115000"/>
+                        </a:lnSpc>
+                      </a:pPr>
                       <a:r>
                         <a:rPr sz="1000">
                           <a:solidFill>
                             <a:srgbClr val="1A1A1A"/>
                           </a:solidFill>
-                        </a:rPr>
-                        <a:t>③ 출입구·부스·통로를 놓고 [시뮬레이션 시작] → 도면 위 보행자 흐름과 밀도</a:t>
+                          <a:latin typeface="Noto Sans KR"/>
+                          <a:ea typeface="Noto Sans KR"/>
+                          <a:cs typeface="Noto Sans KR"/>
+                        </a:rPr>
+                        <a:t>③ 출입구·부스·통로를 놓고 [시뮬레이션 시작]</a:t>
                       </a:r>
                     </a:p>
                   </a:txBody>
@@ -11222,13 +11434,21 @@
                     <a:bodyPr/>
                     <a:lstStyle/>
                     <a:p>
+                      <a:pPr>
+                        <a:lnSpc>
+                          <a:spcPct val="115000"/>
+                        </a:lnSpc>
+                      </a:pPr>
                       <a:r>
                         <a:rPr sz="1000">
                           <a:solidFill>
                             <a:srgbClr val="1A1A1A"/>
                           </a:solidFill>
-                        </a:rPr>
-                        <a:t>④ 오른쪽 패널: 시각·장내 인원·최대 밀도 등급, 병목 상위·대기열·출입구별 입장. [배수 올려 가며 재생]으로 상한 배수</a:t>
+                          <a:latin typeface="Noto Sans KR"/>
+                          <a:ea typeface="Noto Sans KR"/>
+                          <a:cs typeface="Noto Sans KR"/>
+                        </a:rPr>
+                        <a:t>④ 장내 인원·최대 밀도 등급 (행안부 가이드라인 기준)</a:t>
                       </a:r>
                     </a:p>
                   </a:txBody>
@@ -11336,12 +11556,19 @@
                     <a:bodyPr/>
                     <a:lstStyle/>
                     <a:p>
-                      <a:pPr algn="ctr" latinLnBrk="1"/>
+                      <a:pPr algn="ctr" latinLnBrk="1">
+                        <a:lnSpc>
+                          <a:spcPct val="115000"/>
+                        </a:lnSpc>
+                      </a:pPr>
                       <a:r>
                         <a:rPr lang="ko-KR" altLang="en-US" b="1" dirty="0" smtClean="0">
                           <a:solidFill>
                             <a:srgbClr val="1A1A1A"/>
                           </a:solidFill>
+                          <a:latin typeface="Noto Sans KR"/>
+                          <a:ea typeface="Noto Sans KR"/>
+                          <a:cs typeface="Noto Sans KR"/>
                         </a:rPr>
                         <a:t>해시태그1</a:t>
                       </a:r>
@@ -11407,12 +11634,19 @@
                     <a:bodyPr/>
                     <a:lstStyle/>
                     <a:p>
-                      <a:pPr latinLnBrk="1"/>
-                      <a:r>
-                        <a:rPr lang="en-US" altLang="ko-KR" b="0" dirty="0" smtClean="0" sz="1200">
+                      <a:pPr latinLnBrk="1">
+                        <a:lnSpc>
+                          <a:spcPct val="115000"/>
+                        </a:lnSpc>
+                      </a:pPr>
+                      <a:r>
+                        <a:rPr lang="en-US" altLang="ko-KR" b="0" dirty="0" smtClean="0" sz="1100">
                           <a:solidFill>
                             <a:srgbClr val="1A1A1A"/>
                           </a:solidFill>
+                          <a:latin typeface="Noto Sans KR"/>
+                          <a:ea typeface="Noto Sans KR"/>
+                          <a:cs typeface="Noto Sans KR"/>
                         </a:rPr>
                         <a:t>#축제/행사 기획</a:t>
                       </a:r>
@@ -11485,7 +11719,7 @@
                     <a:p>
                       <a:pPr marL="0" marR="0" lvl="0" indent="0" algn="ctr" defTabSz="914400" rtl="0" eaLnBrk="1" fontAlgn="auto" latinLnBrk="1" hangingPunct="1">
                         <a:lnSpc>
-                          <a:spcPct val="100000"/>
+                          <a:spcPct val="115000"/>
                         </a:lnSpc>
                         <a:spcBef>
                           <a:spcPts val="0"/>
@@ -11505,6 +11739,9 @@
                           <a:solidFill>
                             <a:srgbClr val="1A1A1A"/>
                           </a:solidFill>
+                          <a:latin typeface="Noto Sans KR"/>
+                          <a:ea typeface="Noto Sans KR"/>
+                          <a:cs typeface="Noto Sans KR"/>
                         </a:rPr>
                         <a:t>연계기능1</a:t>
                       </a:r>
@@ -11570,12 +11807,19 @@
                     <a:bodyPr/>
                     <a:lstStyle/>
                     <a:p>
-                      <a:pPr latinLnBrk="1"/>
-                      <a:r>
-                        <a:rPr lang="en-US" altLang="ko-KR" b="0" dirty="0" smtClean="0" sz="1200">
+                      <a:pPr latinLnBrk="1">
+                        <a:lnSpc>
+                          <a:spcPct val="115000"/>
+                        </a:lnSpc>
+                      </a:pPr>
+                      <a:r>
+                        <a:rPr lang="en-US" altLang="ko-KR" b="0" dirty="0" smtClean="0" sz="1100">
                           <a:solidFill>
                             <a:srgbClr val="1A1A1A"/>
                           </a:solidFill>
+                          <a:latin typeface="Noto Sans KR"/>
+                          <a:ea typeface="Noto Sans KR"/>
+                          <a:cs typeface="Noto Sans KR"/>
                         </a:rPr>
                         <a:t>기획서 입력에서 도면 시뮬레이션까지</a:t>
                       </a:r>
@@ -11646,12 +11890,19 @@
                     <a:bodyPr/>
                     <a:lstStyle/>
                     <a:p>
-                      <a:pPr algn="ctr" latinLnBrk="1"/>
+                      <a:pPr algn="ctr" latinLnBrk="1">
+                        <a:lnSpc>
+                          <a:spcPct val="115000"/>
+                        </a:lnSpc>
+                      </a:pPr>
                       <a:r>
                         <a:rPr lang="ko-KR" altLang="en-US" b="1" dirty="0" err="1" smtClean="0">
                           <a:solidFill>
                             <a:srgbClr val="1A1A1A"/>
                           </a:solidFill>
+                          <a:latin typeface="Noto Sans KR"/>
+                          <a:ea typeface="Noto Sans KR"/>
+                          <a:cs typeface="Noto Sans KR"/>
                         </a:rPr>
                         <a:t>기능설명1</a:t>
                       </a:r>
@@ -11719,7 +11970,7 @@
                     <a:p>
                       <a:pPr marL="0" marR="0" lvl="0" indent="0" algn="l" defTabSz="914400" rtl="0" eaLnBrk="1" fontAlgn="auto" latinLnBrk="1" hangingPunct="1">
                         <a:lnSpc>
-                          <a:spcPct val="100000"/>
+                          <a:spcPct val="115000"/>
                         </a:lnSpc>
                         <a:spcBef>
                           <a:spcPts val="0"/>
@@ -11739,6 +11990,9 @@
                           <a:solidFill>
                             <a:srgbClr val="1A1A1A"/>
                           </a:solidFill>
+                          <a:latin typeface="Noto Sans KR"/>
+                          <a:ea typeface="Noto Sans KR"/>
+                          <a:cs typeface="Noto Sans KR"/>
                         </a:rPr>
                         <a:t>기획서 PDF 한 장으로 판정 화면이 열리고, 같은 기획안으로 행사장 도면에 들어가 배치를 고치고 보행자를 흘립니다.</a:t>
                       </a:r>
@@ -11823,8 +12077,8 @@
         </p:blipFill>
         <p:spPr>
           <a:xfrm>
-            <a:off x="352952" y="3379938"/>
-            <a:ext cx="2756577" cy="1570729"/>
+            <a:off x="358622" y="3074071"/>
+            <a:ext cx="2745236" cy="2182463"/>
           </a:xfrm>
           <a:prstGeom prst="rect">
             <a:avLst/>
@@ -11847,8 +12101,8 @@
         </p:blipFill>
         <p:spPr>
           <a:xfrm>
-            <a:off x="4033808" y="3074071"/>
-            <a:ext cx="1108019" cy="2182463"/>
+            <a:off x="3212374" y="3074071"/>
+            <a:ext cx="2750886" cy="2182463"/>
           </a:xfrm>
           <a:prstGeom prst="rect">
             <a:avLst/>
@@ -11871,8 +12125,8 @@
         </p:blipFill>
         <p:spPr>
           <a:xfrm>
-            <a:off x="6341171" y="3074071"/>
-            <a:ext cx="2206446" cy="2182463"/>
+            <a:off x="6068951" y="3074071"/>
+            <a:ext cx="2750886" cy="2182463"/>
           </a:xfrm>
           <a:prstGeom prst="rect">
             <a:avLst/>
@@ -11895,8 +12149,8 @@
         </p:blipFill>
         <p:spPr>
           <a:xfrm>
-            <a:off x="9669616" y="3074071"/>
-            <a:ext cx="1262710" cy="2182463"/>
+            <a:off x="8924575" y="3074071"/>
+            <a:ext cx="2752793" cy="2182463"/>
           </a:xfrm>
           <a:prstGeom prst="rect">
             <a:avLst/>
@@ -11980,7 +12234,7 @@
                   </a:extLst>
                 </a:gridCol>
               </a:tblGrid>
-              <a:tr h="2400000">
+              <a:tr h="2900000">
                 <a:tc>
                   <a:txBody>
                     <a:bodyPr/>
@@ -12107,7 +12361,7 @@
                     <a:p>
                       <a:pPr marL="0" marR="0" lvl="0" indent="0" algn="just" defTabSz="914400" rtl="0" eaLnBrk="1" fontAlgn="auto" latinLnBrk="1" hangingPunct="1">
                         <a:lnSpc>
-                          <a:spcPct val="100000"/>
+                          <a:spcPct val="115000"/>
                         </a:lnSpc>
                         <a:spcBef>
                           <a:spcPts val="0"/>
@@ -12127,7 +12381,9 @@
                           <a:solidFill>
                             <a:srgbClr val="1A1A1A"/>
                           </a:solidFill>
-                          <a:latin typeface="+mn-lt"/>
+                          <a:latin typeface="Noto Sans KR"/>
+                          <a:ea typeface="Noto Sans KR"/>
+                          <a:cs typeface="Noto Sans KR"/>
                         </a:rPr>
                         <a:t/>
                       </a:r>
@@ -12193,7 +12449,7 @@
                   </a:ext>
                 </a:extLst>
               </a:tr>
-              <a:tr h="3170000">
+              <a:tr h="2670000">
                 <a:tc>
                   <a:txBody>
                     <a:bodyPr/>
@@ -12288,7 +12544,7 @@
                     <a:p>
                       <a:pPr marL="0" marR="0" lvl="0" indent="0" algn="just" defTabSz="914400" rtl="0" eaLnBrk="1" fontAlgn="auto" latinLnBrk="1" hangingPunct="1">
                         <a:lnSpc>
-                          <a:spcPct val="100000"/>
+                          <a:spcPct val="115000"/>
                         </a:lnSpc>
                         <a:spcBef>
                           <a:spcPts val="0"/>
@@ -12308,7 +12564,9 @@
                           <a:solidFill>
                             <a:srgbClr val="1A1A1A"/>
                           </a:solidFill>
-                          <a:latin typeface="+mn-lt"/>
+                          <a:latin typeface="Noto Sans KR"/>
+                          <a:ea typeface="Noto Sans KR"/>
+                          <a:cs typeface="Noto Sans KR"/>
                         </a:rPr>
                         <a:t/>
                       </a:r>
@@ -12394,8 +12652,8 @@
         </p:blipFill>
         <p:spPr>
           <a:xfrm>
-            <a:off x="6156167" y="1115401"/>
-            <a:ext cx="1834888" cy="2300000"/>
+            <a:off x="2277089" y="1115401"/>
+            <a:ext cx="9593044" cy="2800000"/>
           </a:xfrm>
           <a:prstGeom prst="rect">
             <a:avLst/>
@@ -12404,7 +12662,7 @@
       </p:pic>
       <p:pic>
         <p:nvPicPr>
-          <p:cNvPr id="5" name="Picture 4" descr="detail_4up.png"/>
+          <p:cNvPr id="5" name="Picture 4" descr="d1_home.png"/>
           <p:cNvPicPr>
             <a:picLocks noChangeAspect="1"/>
           </p:cNvPicPr>
@@ -12418,14 +12676,222 @@
         </p:blipFill>
         <p:spPr>
           <a:xfrm>
-            <a:off x="4838367" y="3515401"/>
-            <a:ext cx="4470489" cy="3070000"/>
+            <a:off x="2383362" y="4025401"/>
+            <a:ext cx="2132045" cy="2375000"/>
           </a:xfrm>
           <a:prstGeom prst="rect">
             <a:avLst/>
           </a:prstGeom>
         </p:spPr>
       </p:pic>
+      <p:sp>
+        <p:nvSpPr>
+          <p:cNvPr id="6" name="TextBox 5"/>
+          <p:cNvSpPr txBox="1"/>
+          <p:nvPr/>
+        </p:nvSpPr>
+        <p:spPr>
+          <a:xfrm>
+            <a:off x="2286310" y="6400401"/>
+            <a:ext cx="2326150" cy="175000"/>
+          </a:xfrm>
+          <a:prstGeom prst="rect">
+            <a:avLst/>
+          </a:prstGeom>
+          <a:noFill/>
+        </p:spPr>
+        <p:txBody>
+          <a:bodyPr wrap="square" lIns="0" rIns="0" tIns="0" bIns="0">
+            <a:spAutoFit/>
+          </a:bodyPr>
+          <a:lstStyle/>
+          <a:p>
+            <a:pPr algn="ctr"/>
+            <a:r>
+              <a:rPr sz="900">
+                <a:latin typeface="Noto Sans KR"/>
+                <a:ea typeface="Noto Sans KR"/>
+                <a:cs typeface="Noto Sans KR"/>
+              </a:rPr>
+              <a:t>첫 화면 / - 기획서 PDF 올리기</a:t>
+            </a:r>
+          </a:p>
+        </p:txBody>
+      </p:sp>
+      <p:pic>
+        <p:nvPicPr>
+          <p:cNvPr id="7" name="Picture 6" descr="d2_report.png"/>
+          <p:cNvPicPr>
+            <a:picLocks noChangeAspect="1"/>
+          </p:cNvPicPr>
+          <p:nvPr/>
+        </p:nvPicPr>
+        <p:blipFill>
+          <a:blip r:embed="rId4"/>
+          <a:stretch>
+            <a:fillRect/>
+          </a:stretch>
+        </p:blipFill>
+        <p:spPr>
+          <a:xfrm>
+            <a:off x="4799891" y="4025401"/>
+            <a:ext cx="2131287" cy="2375000"/>
+          </a:xfrm>
+          <a:prstGeom prst="rect">
+            <a:avLst/>
+          </a:prstGeom>
+        </p:spPr>
+      </p:pic>
+      <p:sp>
+        <p:nvSpPr>
+          <p:cNvPr id="8" name="TextBox 7"/>
+          <p:cNvSpPr txBox="1"/>
+          <p:nvPr/>
+        </p:nvSpPr>
+        <p:spPr>
+          <a:xfrm>
+            <a:off x="4702460" y="6400401"/>
+            <a:ext cx="2326150" cy="175000"/>
+          </a:xfrm>
+          <a:prstGeom prst="rect">
+            <a:avLst/>
+          </a:prstGeom>
+          <a:noFill/>
+        </p:spPr>
+        <p:txBody>
+          <a:bodyPr wrap="square" lIns="0" rIns="0" tIns="0" bIns="0">
+            <a:spAutoFit/>
+          </a:bodyPr>
+          <a:lstStyle/>
+          <a:p>
+            <a:pPr algn="ctr"/>
+            <a:r>
+              <a:rPr sz="900">
+                <a:latin typeface="Noto Sans KR"/>
+                <a:ea typeface="Noto Sans KR"/>
+                <a:cs typeface="Noto Sans KR"/>
+              </a:rPr>
+              <a:t>검증 보고서 /report/check - A4 두 장</a:t>
+            </a:r>
+          </a:p>
+        </p:txBody>
+      </p:sp>
+      <p:pic>
+        <p:nvPicPr>
+          <p:cNvPr id="9" name="Picture 8" descr="d3_evidence.png"/>
+          <p:cNvPicPr>
+            <a:picLocks noChangeAspect="1"/>
+          </p:cNvPicPr>
+          <p:nvPr/>
+        </p:nvPicPr>
+        <p:blipFill>
+          <a:blip r:embed="rId5"/>
+          <a:stretch>
+            <a:fillRect/>
+          </a:stretch>
+        </p:blipFill>
+        <p:spPr>
+          <a:xfrm>
+            <a:off x="7215662" y="4025401"/>
+            <a:ext cx="2132045" cy="2375000"/>
+          </a:xfrm>
+          <a:prstGeom prst="rect">
+            <a:avLst/>
+          </a:prstGeom>
+        </p:spPr>
+      </p:pic>
+      <p:sp>
+        <p:nvSpPr>
+          <p:cNvPr id="10" name="TextBox 9"/>
+          <p:cNvSpPr txBox="1"/>
+          <p:nvPr/>
+        </p:nvSpPr>
+        <p:spPr>
+          <a:xfrm>
+            <a:off x="7118610" y="6400401"/>
+            <a:ext cx="2326150" cy="175000"/>
+          </a:xfrm>
+          <a:prstGeom prst="rect">
+            <a:avLst/>
+          </a:prstGeom>
+          <a:noFill/>
+        </p:spPr>
+        <p:txBody>
+          <a:bodyPr wrap="square" lIns="0" rIns="0" tIns="0" bIns="0">
+            <a:spAutoFit/>
+          </a:bodyPr>
+          <a:lstStyle/>
+          <a:p>
+            <a:pPr algn="ctr"/>
+            <a:r>
+              <a:rPr sz="900">
+                <a:latin typeface="Noto Sans KR"/>
+                <a:ea typeface="Noto Sans KR"/>
+                <a:cs typeface="Noto Sans KR"/>
+              </a:rPr>
+              <a:t>실측 근거 /evidence - 연도별 곡선</a:t>
+            </a:r>
+          </a:p>
+        </p:txBody>
+      </p:sp>
+      <p:pic>
+        <p:nvPicPr>
+          <p:cNvPr id="11" name="Picture 10" descr="d4_venue.png"/>
+          <p:cNvPicPr>
+            <a:picLocks noChangeAspect="1"/>
+          </p:cNvPicPr>
+          <p:nvPr/>
+        </p:nvPicPr>
+        <p:blipFill>
+          <a:blip r:embed="rId6"/>
+          <a:stretch>
+            <a:fillRect/>
+          </a:stretch>
+        </p:blipFill>
+        <p:spPr>
+          <a:xfrm>
+            <a:off x="9633875" y="4025401"/>
+            <a:ext cx="2127919" cy="2375000"/>
+          </a:xfrm>
+          <a:prstGeom prst="rect">
+            <a:avLst/>
+          </a:prstGeom>
+        </p:spPr>
+      </p:pic>
+      <p:sp>
+        <p:nvSpPr>
+          <p:cNvPr id="12" name="TextBox 11"/>
+          <p:cNvSpPr txBox="1"/>
+          <p:nvPr/>
+        </p:nvSpPr>
+        <p:spPr>
+          <a:xfrm>
+            <a:off x="9534760" y="6400401"/>
+            <a:ext cx="2326150" cy="175000"/>
+          </a:xfrm>
+          <a:prstGeom prst="rect">
+            <a:avLst/>
+          </a:prstGeom>
+          <a:noFill/>
+        </p:spPr>
+        <p:txBody>
+          <a:bodyPr wrap="square" lIns="0" rIns="0" tIns="0" bIns="0">
+            <a:spAutoFit/>
+          </a:bodyPr>
+          <a:lstStyle/>
+          <a:p>
+            <a:pPr algn="ctr"/>
+            <a:r>
+              <a:rPr sz="900">
+                <a:latin typeface="Noto Sans KR"/>
+                <a:ea typeface="Noto Sans KR"/>
+                <a:cs typeface="Noto Sans KR"/>
+              </a:rPr>
+              <a:t>시뮬레이션 /venue - 도면 위 보행자</a:t>
+            </a:r>
+          </a:p>
+        </p:txBody>
+      </p:sp>
     </p:spTree>
     <p:extLst>
       <p:ext uri="{BB962C8B-B14F-4D97-AF65-F5344CB8AC3E}">
@@ -12531,7 +12997,7 @@
         </p:nvGraphicFramePr>
         <p:xfrm>
           <a:off x="174566" y="1646098"/>
-          <a:ext cx="11746191" cy="3789680"/>
+          <a:ext cx="11746191" cy="3940000"/>
         </p:xfrm>
         <a:graphic>
           <a:graphicData uri="http://schemas.openxmlformats.org/drawingml/2006/table">
@@ -12562,7 +13028,7 @@
                   </a:extLst>
                 </a:gridCol>
               </a:tblGrid>
-              <a:tr h="370840">
+              <a:tr h="520000">
                 <a:tc rowSpan="2">
                   <a:txBody>
                     <a:bodyPr/>
@@ -12701,7 +13167,7 @@
                     <a:p>
                       <a:pPr marL="0" marR="0" lvl="0" indent="0" algn="just" defTabSz="914400" rtl="0" eaLnBrk="1" fontAlgn="auto" latinLnBrk="1" hangingPunct="1">
                         <a:lnSpc>
-                          <a:spcPct val="100000"/>
+                          <a:spcPct val="115000"/>
                         </a:lnSpc>
                         <a:spcBef>
                           <a:spcPts val="0"/>
@@ -12721,8 +13187,11 @@
                           <a:solidFill>
                             <a:srgbClr val="1A1A1A"/>
                           </a:solidFill>
-                        </a:rPr>
-                        <a:t>한국관광공사 TourAPI 4.0 관광 데이터랩 서비스 — 지역별 방문자 수 일별 (DataLabService/locgoRegnVisitrDDList, KT 이동통신 기반)</a:t>
+                          <a:latin typeface="Noto Sans KR"/>
+                          <a:ea typeface="Noto Sans KR"/>
+                          <a:cs typeface="Noto Sans KR"/>
+                        </a:rPr>
+                        <a:t>한국관광공사 TourAPI 4.0 관광 데이터랩 서비스 - 지역별 방문자 수 일별 (DataLabService/locgoRegnVisitrDDList, KT 이동통신 기반)</a:t>
                       </a:r>
                     </a:p>
                   </a:txBody>
@@ -12780,7 +13249,7 @@
                   </a:ext>
                 </a:extLst>
               </a:tr>
-              <a:tr h="370840">
+              <a:tr h="1450000">
                 <a:tc vMerge="1">
                   <a:txBody>
                     <a:bodyPr/>
@@ -12865,7 +13334,7 @@
                     <a:p>
                       <a:pPr marL="0" marR="0" lvl="0" indent="0" algn="just" defTabSz="914400" rtl="0" eaLnBrk="1" fontAlgn="auto" latinLnBrk="1" hangingPunct="1">
                         <a:lnSpc>
-                          <a:spcPct val="100000"/>
+                          <a:spcPct val="115000"/>
                         </a:lnSpc>
                         <a:spcBef>
                           <a:spcPts val="0"/>
@@ -12885,6 +13354,9 @@
                           <a:solidFill>
                             <a:srgbClr val="1A1A1A"/>
                           </a:solidFill>
+                          <a:latin typeface="Noto Sans KR"/>
+                          <a:ea typeface="Noto Sans KR"/>
+                          <a:cs typeface="Noto Sans KR"/>
                         </a:rPr>
                         <a:t>판정 3단계의 분모(작년 축제 기간 전체 체류·순증·평소 대비 외지인 배수), 자기 이력 연도별 배수, 내년 배수 구간, 축제 신호, 데이터랩 축제 목록 619건 배수 재계산의 유일한 실측 원천. 시군구 272개 × 2019-05-01~2026-08-09(2,658일)를 개발 기간 안에 전수 호출해 697,403행을 빌드 전에 적재하고 판정은 그 적재본으로 냅니다. 제출 인증키의 호출 이력으로 확인됩니다.</a:t>
                       </a:r>
@@ -12944,7 +13416,7 @@
                   </a:ext>
                 </a:extLst>
               </a:tr>
-              <a:tr h="381000">
+              <a:tr h="520000">
                 <a:tc rowSpan="2">
                   <a:txBody>
                     <a:bodyPr/>
@@ -13081,13 +13553,21 @@
                     <a:bodyPr/>
                     <a:lstStyle/>
                     <a:p>
-                      <a:r>
-                        <a:rPr sz="1100">
+                      <a:pPr>
+                        <a:lnSpc>
+                          <a:spcPct val="115000"/>
+                        </a:lnSpc>
+                      </a:pPr>
+                      <a:r>
+                        <a:rPr sz="1100" b="0">
                           <a:solidFill>
                             <a:srgbClr val="1A1A1A"/>
                           </a:solidFill>
-                        </a:rPr>
-                        <a:t>한국관광공사 TourAPI 4.0 국문 관광정보 서비스 — 축제 검색 (searchFestival2)</a:t>
+                          <a:latin typeface="Noto Sans KR"/>
+                          <a:ea typeface="Noto Sans KR"/>
+                          <a:cs typeface="Noto Sans KR"/>
+                        </a:rPr>
+                        <a:t>한국관광공사 TourAPI 4.0 국문 관광정보 서비스 - 축제 검색 (searchFestival2)</a:t>
                       </a:r>
                     </a:p>
                   </a:txBody>
@@ -13145,7 +13625,7 @@
                   </a:ext>
                 </a:extLst>
               </a:tr>
-              <a:tr h="381000">
+              <a:tr h="1450000">
                 <a:tc vMerge="1">
                   <a:txBody>
                     <a:bodyPr/>
@@ -13228,11 +13708,19 @@
                     <a:bodyPr/>
                     <a:lstStyle/>
                     <a:p>
-                      <a:r>
-                        <a:rPr sz="1100">
+                      <a:pPr>
+                        <a:lnSpc>
+                          <a:spcPct val="115000"/>
+                        </a:lnSpc>
+                      </a:pPr>
+                      <a:r>
+                        <a:rPr sz="1100" b="0">
                           <a:solidFill>
                             <a:srgbClr val="1A1A1A"/>
                           </a:solidFill>
+                          <a:latin typeface="Noto Sans KR"/>
+                          <a:ea typeface="Noto Sans KR"/>
+                          <a:cs typeface="Noto Sans KR"/>
                         </a:rPr>
                         <a:t>판정 화면에서 실시간 호출. 작년 축제 기간 반경 50km 안에 등록된 다른 축제를 찾아 "이 배수는 개최 시군구 배수이고 이 축제 몫만이 아니다"라는 귀속 경고를 냅니다(군포 2026 기준 등록 행사 36건, 실시간 값). 호출이 실패해도 판정은 그대로 서고 실패 사실을 표시합니다.</a:t>
                       </a:r>
@@ -13296,6 +13784,39 @@
           </a:graphicData>
         </a:graphic>
       </p:graphicFrame>
+      <p:sp>
+        <p:nvSpPr>
+          <p:cNvPr id="8" name="TextBox 7"/>
+          <p:cNvSpPr txBox="1"/>
+          <p:nvPr/>
+        </p:nvSpPr>
+        <p:spPr>
+          <a:xfrm>
+            <a:off x="174566" y="5746098"/>
+            <a:ext cx="11746191" cy="900000"/>
+          </a:xfrm>
+          <a:prstGeom prst="rect">
+            <a:avLst/>
+          </a:prstGeom>
+          <a:noFill/>
+        </p:spPr>
+        <p:txBody>
+          <a:bodyPr wrap="square">
+            <a:spAutoFit/>
+          </a:bodyPr>
+          <a:lstStyle/>
+          <a:p>
+            <a:r>
+              <a:rPr sz="1000">
+                <a:latin typeface="Noto Sans KR"/>
+                <a:ea typeface="Noto Sans KR"/>
+                <a:cs typeface="Noto Sans KR"/>
+              </a:rPr>
+              <a:t>공사 API 2종 · 전수 697,403행 · 개발계정 1,000회/일 한도 안에서 호출했습니다. 목록에는 판정에 실제로 쓰는 것만 올렸고, 제출 인증키의 호출 이력으로 확인됩니다. 공사 OpenAPI 가 아닌 자료는 다음 장에 따로 적었습니다.</a:t>
+            </a:r>
+          </a:p>
+        </p:txBody>
+      </p:sp>
     </p:spTree>
     <p:extLst>
       <p:ext uri="{BB962C8B-B14F-4D97-AF65-F5344CB8AC3E}">
@@ -13406,7 +13927,7 @@
         </p:nvGraphicFramePr>
         <p:xfrm>
           <a:off x="174566" y="1646098"/>
-          <a:ext cx="11628657" cy="2265680"/>
+          <a:ext cx="11628657" cy="4900000"/>
         </p:xfrm>
         <a:graphic>
           <a:graphicData uri="http://schemas.openxmlformats.org/drawingml/2006/table">
@@ -13437,18 +13958,25 @@
                   </a:extLst>
                 </a:gridCol>
               </a:tblGrid>
-              <a:tr h="370840">
+              <a:tr h="400000">
                 <a:tc rowSpan="2">
                   <a:txBody>
                     <a:bodyPr/>
                     <a:lstStyle/>
                     <a:p>
-                      <a:pPr algn="ctr" latinLnBrk="1"/>
+                      <a:pPr algn="ctr" latinLnBrk="1">
+                        <a:lnSpc>
+                          <a:spcPct val="115000"/>
+                        </a:lnSpc>
+                      </a:pPr>
                       <a:r>
                         <a:rPr lang="en-US" altLang="ko-KR" sz="3200" b="1">
                           <a:solidFill>
                             <a:srgbClr val="1A1A1A"/>
                           </a:solidFill>
+                          <a:latin typeface="Noto Sans KR"/>
+                          <a:ea typeface="Noto Sans KR"/>
+                          <a:cs typeface="Noto Sans KR"/>
                         </a:rPr>
                         <a:t>1</a:t>
                       </a:r>
@@ -13500,12 +14028,19 @@
                     <a:bodyPr/>
                     <a:lstStyle/>
                     <a:p>
-                      <a:pPr algn="ctr" latinLnBrk="1"/>
+                      <a:pPr algn="ctr" latinLnBrk="1">
+                        <a:lnSpc>
+                          <a:spcPct val="115000"/>
+                        </a:lnSpc>
+                      </a:pPr>
                       <a:r>
                         <a:rPr lang="ko-KR" altLang="en-US" b="1" err="1">
                           <a:solidFill>
                             <a:srgbClr val="1A1A1A"/>
                           </a:solidFill>
+                          <a:latin typeface="Noto Sans KR"/>
+                          <a:ea typeface="Noto Sans KR"/>
+                          <a:cs typeface="Noto Sans KR"/>
                         </a:rPr>
                         <a:t>데이터명</a:t>
                       </a:r>
@@ -13571,11 +14106,19 @@
                     <a:bodyPr/>
                     <a:lstStyle/>
                     <a:p>
-                      <a:r>
-                        <a:rPr sz="1000">
+                      <a:pPr>
+                        <a:lnSpc>
+                          <a:spcPct val="115000"/>
+                        </a:lnSpc>
+                      </a:pPr>
+                      <a:r>
+                        <a:rPr sz="1000" b="0">
                           <a:solidFill>
                             <a:srgbClr val="1A1A1A"/>
                           </a:solidFill>
+                          <a:latin typeface="Noto Sans KR"/>
+                          <a:ea typeface="Noto Sans KR"/>
+                          <a:cs typeface="Noto Sans KR"/>
                         </a:rPr>
                         <a:t>한국관광 데이터랩 축제 목록 (공사 웹, 정적 수집 · OpenAPI 아님)</a:t>
                       </a:r>
@@ -13635,7 +14178,7 @@
                   </a:ext>
                 </a:extLst>
               </a:tr>
-              <a:tr h="370840">
+              <a:tr h="580000">
                 <a:tc vMerge="1">
                   <a:txBody>
                     <a:bodyPr/>
@@ -13652,12 +14195,19 @@
                     <a:bodyPr/>
                     <a:lstStyle/>
                     <a:p>
-                      <a:pPr algn="ctr" latinLnBrk="1"/>
+                      <a:pPr algn="ctr" latinLnBrk="1">
+                        <a:lnSpc>
+                          <a:spcPct val="115000"/>
+                        </a:lnSpc>
+                      </a:pPr>
                       <a:r>
                         <a:rPr lang="ko-KR" altLang="en-US" b="1">
                           <a:solidFill>
                             <a:srgbClr val="1A1A1A"/>
                           </a:solidFill>
+                          <a:latin typeface="Noto Sans KR"/>
+                          <a:ea typeface="Noto Sans KR"/>
+                          <a:cs typeface="Noto Sans KR"/>
                         </a:rPr>
                         <a:t>상세설명</a:t>
                       </a:r>
@@ -13718,11 +14268,19 @@
                     <a:bodyPr/>
                     <a:lstStyle/>
                     <a:p>
-                      <a:r>
-                        <a:rPr sz="1000">
+                      <a:pPr>
+                        <a:lnSpc>
+                          <a:spcPct val="115000"/>
+                        </a:lnSpc>
+                      </a:pPr>
+                      <a:r>
+                        <a:rPr sz="1000" b="0">
                           <a:solidFill>
                             <a:srgbClr val="1A1A1A"/>
                           </a:solidFill>
+                          <a:latin typeface="Noto Sans KR"/>
+                          <a:ea typeface="Noto Sans KR"/>
+                          <a:cs typeface="Noto Sans KR"/>
                         </a:rPr>
                         <a:t>전국 축제 619건의 이름·지역·기간·테마. 배수는 목록 값이 아니라 위 KT 일별 자료로 619/619 재계산. 또래 구간과 닮은 과거 축제(보조 근거)의 표본.</a:t>
                       </a:r>
@@ -13782,18 +14340,25 @@
                   </a:ext>
                 </a:extLst>
               </a:tr>
-              <a:tr h="381000">
+              <a:tr h="400000">
                 <a:tc rowSpan="2">
                   <a:txBody>
                     <a:bodyPr/>
                     <a:lstStyle/>
                     <a:p>
-                      <a:pPr algn="ctr" latinLnBrk="1"/>
+                      <a:pPr algn="ctr" latinLnBrk="1">
+                        <a:lnSpc>
+                          <a:spcPct val="115000"/>
+                        </a:lnSpc>
+                      </a:pPr>
                       <a:r>
                         <a:rPr lang="en-US" altLang="ko-KR" sz="3200" b="1">
                           <a:solidFill>
                             <a:srgbClr val="1A1A1A"/>
                           </a:solidFill>
+                          <a:latin typeface="Noto Sans KR"/>
+                          <a:ea typeface="Noto Sans KR"/>
+                          <a:cs typeface="Noto Sans KR"/>
                         </a:rPr>
                         <a:t>2</a:t>
                       </a:r>
@@ -13845,12 +14410,19 @@
                     <a:bodyPr/>
                     <a:lstStyle/>
                     <a:p>
-                      <a:pPr algn="ctr" latinLnBrk="1"/>
+                      <a:pPr algn="ctr" latinLnBrk="1">
+                        <a:lnSpc>
+                          <a:spcPct val="115000"/>
+                        </a:lnSpc>
+                      </a:pPr>
                       <a:r>
                         <a:rPr lang="ko-KR" altLang="en-US" b="1" err="1">
                           <a:solidFill>
                             <a:srgbClr val="1A1A1A"/>
                           </a:solidFill>
+                          <a:latin typeface="Noto Sans KR"/>
+                          <a:ea typeface="Noto Sans KR"/>
+                          <a:cs typeface="Noto Sans KR"/>
                         </a:rPr>
                         <a:t>데이터명</a:t>
                       </a:r>
@@ -13916,11 +14488,19 @@
                     <a:bodyPr/>
                     <a:lstStyle/>
                     <a:p>
-                      <a:r>
-                        <a:rPr sz="1000">
+                      <a:pPr>
+                        <a:lnSpc>
+                          <a:spcPct val="115000"/>
+                        </a:lnSpc>
+                      </a:pPr>
+                      <a:r>
+                        <a:rPr sz="1000" b="0">
                           <a:solidFill>
                             <a:srgbClr val="1A1A1A"/>
                           </a:solidFill>
+                          <a:latin typeface="Noto Sans KR"/>
+                          <a:ea typeface="Noto Sans KR"/>
+                          <a:cs typeface="Noto Sans KR"/>
                         </a:rPr>
                         <a:t>행정안전부 주민등록 인구 (data.go.kr 15097972, 2026-08 기준)</a:t>
                       </a:r>
@@ -13980,7 +14560,7 @@
                   </a:ext>
                 </a:extLst>
               </a:tr>
-              <a:tr h="381000">
+              <a:tr h="580000">
                 <a:tc vMerge="1">
                   <a:txBody>
                     <a:bodyPr/>
@@ -13997,12 +14577,19 @@
                     <a:bodyPr/>
                     <a:lstStyle/>
                     <a:p>
-                      <a:pPr algn="ctr" latinLnBrk="1"/>
+                      <a:pPr algn="ctr" latinLnBrk="1">
+                        <a:lnSpc>
+                          <a:spcPct val="115000"/>
+                        </a:lnSpc>
+                      </a:pPr>
                       <a:r>
                         <a:rPr lang="ko-KR" altLang="en-US" b="1">
                           <a:solidFill>
                             <a:srgbClr val="1A1A1A"/>
                           </a:solidFill>
+                          <a:latin typeface="Noto Sans KR"/>
+                          <a:ea typeface="Noto Sans KR"/>
+                          <a:cs typeface="Noto Sans KR"/>
                         </a:rPr>
                         <a:t>상세설명</a:t>
                       </a:r>
@@ -14063,11 +14650,19 @@
                     <a:bodyPr/>
                     <a:lstStyle/>
                     <a:p>
-                      <a:r>
-                        <a:rPr sz="1000">
+                      <a:pPr>
+                        <a:lnSpc>
+                          <a:spcPct val="115000"/>
+                        </a:lnSpc>
+                      </a:pPr>
+                      <a:r>
+                        <a:rPr sz="1000" b="0">
                           <a:solidFill>
                             <a:srgbClr val="1A1A1A"/>
                           </a:solidFill>
+                          <a:latin typeface="Noto Sans KR"/>
+                          <a:ea typeface="Noto Sans KR"/>
+                          <a:cs typeface="Noto Sans KR"/>
                         </a:rPr>
                         <a:t>시군구 인구. 또래(같은 인구 구간) 구간의 기준이고 닮음 판정 다섯 축 중 하나. 담당자 입력 → 행안부 표 → 없음 순.</a:t>
                       </a:r>
@@ -14127,18 +14722,25 @@
                   </a:ext>
                 </a:extLst>
               </a:tr>
-              <a:tr h="381000">
+              <a:tr h="400000">
                 <a:tc rowSpan="2">
                   <a:txBody>
                     <a:bodyPr/>
                     <a:lstStyle/>
                     <a:p>
-                      <a:pPr algn="ctr" latinLnBrk="1"/>
+                      <a:pPr algn="ctr" latinLnBrk="1">
+                        <a:lnSpc>
+                          <a:spcPct val="115000"/>
+                        </a:lnSpc>
+                      </a:pPr>
                       <a:r>
                         <a:rPr lang="en-US" altLang="ko-KR" sz="3200" b="1">
                           <a:solidFill>
                             <a:srgbClr val="1A1A1A"/>
                           </a:solidFill>
+                          <a:latin typeface="Noto Sans KR"/>
+                          <a:ea typeface="Noto Sans KR"/>
+                          <a:cs typeface="Noto Sans KR"/>
                         </a:rPr>
                         <a:t>3</a:t>
                       </a:r>
@@ -14190,12 +14792,19 @@
                     <a:bodyPr/>
                     <a:lstStyle/>
                     <a:p>
-                      <a:pPr algn="ctr" latinLnBrk="1"/>
+                      <a:pPr algn="ctr" latinLnBrk="1">
+                        <a:lnSpc>
+                          <a:spcPct val="115000"/>
+                        </a:lnSpc>
+                      </a:pPr>
                       <a:r>
                         <a:rPr lang="ko-KR" altLang="en-US" b="1" err="1">
                           <a:solidFill>
                             <a:srgbClr val="1A1A1A"/>
                           </a:solidFill>
+                          <a:latin typeface="Noto Sans KR"/>
+                          <a:ea typeface="Noto Sans KR"/>
+                          <a:cs typeface="Noto Sans KR"/>
                         </a:rPr>
                         <a:t>데이터명</a:t>
                       </a:r>
@@ -14261,11 +14870,19 @@
                     <a:bodyPr/>
                     <a:lstStyle/>
                     <a:p>
-                      <a:r>
-                        <a:rPr sz="1000">
+                      <a:pPr>
+                        <a:lnSpc>
+                          <a:spcPct val="115000"/>
+                        </a:lnSpc>
+                      </a:pPr>
+                      <a:r>
+                        <a:rPr sz="1000" b="0">
                           <a:solidFill>
                             <a:srgbClr val="1A1A1A"/>
                           </a:solidFill>
+                          <a:latin typeface="Noto Sans KR"/>
+                          <a:ea typeface="Noto Sans KR"/>
+                          <a:cs typeface="Noto Sans KR"/>
                         </a:rPr>
                         <a:t>OpenStreetMap 부지·도로·산책로 + 군포철쭉축제 2026 공식 안내도</a:t>
                       </a:r>
@@ -14325,7 +14942,7 @@
                   </a:ext>
                 </a:extLst>
               </a:tr>
-              <a:tr h="381000">
+              <a:tr h="580000">
                 <a:tc vMerge="1">
                   <a:txBody>
                     <a:bodyPr/>
@@ -14394,12 +15011,19 @@
                     <a:bodyPr/>
                     <a:lstStyle/>
                     <a:p>
-                      <a:pPr algn="ctr" latinLnBrk="1"/>
+                      <a:pPr algn="ctr" latinLnBrk="1">
+                        <a:lnSpc>
+                          <a:spcPct val="115000"/>
+                        </a:lnSpc>
+                      </a:pPr>
                       <a:r>
                         <a:rPr lang="ko-KR" altLang="en-US" b="1">
                           <a:solidFill>
                             <a:srgbClr val="1A1A1A"/>
                           </a:solidFill>
+                          <a:latin typeface="Noto Sans KR"/>
+                          <a:ea typeface="Noto Sans KR"/>
+                          <a:cs typeface="Noto Sans KR"/>
                         </a:rPr>
                         <a:t>상세설명</a:t>
                       </a:r>
@@ -14460,11 +15084,19 @@
                     <a:bodyPr/>
                     <a:lstStyle/>
                     <a:p>
-                      <a:r>
-                        <a:rPr sz="1000">
+                      <a:pPr>
+                        <a:lnSpc>
+                          <a:spcPct val="115000"/>
+                        </a:lnSpc>
+                      </a:pPr>
+                      <a:r>
+                        <a:rPr sz="1000" b="0">
                           <a:solidFill>
                             <a:srgbClr val="1A1A1A"/>
                           </a:solidFill>
+                          <a:latin typeface="Noto Sans KR"/>
+                          <a:ea typeface="Noto Sans KR"/>
+                          <a:cs typeface="Noto Sans KR"/>
                         </a:rPr>
                         <a:t>행사장 도면(군포 1건)의 바닥과 부스 배치. 부스 좌표는 georeference 전 가정이라고 화면에 적습니다.</a:t>
                       </a:r>
@@ -14524,18 +15156,25 @@
                   </a:ext>
                 </a:extLst>
               </a:tr>
-              <a:tr h="381000">
+              <a:tr h="400000">
                 <a:tc rowSpan="2">
                   <a:txBody>
                     <a:bodyPr/>
                     <a:lstStyle/>
                     <a:p>
-                      <a:pPr algn="ctr" latinLnBrk="1"/>
+                      <a:pPr algn="ctr" latinLnBrk="1">
+                        <a:lnSpc>
+                          <a:spcPct val="115000"/>
+                        </a:lnSpc>
+                      </a:pPr>
                       <a:r>
                         <a:rPr lang="en-US" altLang="ko-KR" sz="3200" b="1">
                           <a:solidFill>
                             <a:srgbClr val="1A1A1A"/>
                           </a:solidFill>
+                          <a:latin typeface="Noto Sans KR"/>
+                          <a:ea typeface="Noto Sans KR"/>
+                          <a:cs typeface="Noto Sans KR"/>
                         </a:rPr>
                         <a:t>4</a:t>
                       </a:r>
@@ -14587,12 +15226,19 @@
                     <a:bodyPr/>
                     <a:lstStyle/>
                     <a:p>
-                      <a:pPr algn="ctr" latinLnBrk="1"/>
+                      <a:pPr algn="ctr" latinLnBrk="1">
+                        <a:lnSpc>
+                          <a:spcPct val="115000"/>
+                        </a:lnSpc>
+                      </a:pPr>
                       <a:r>
                         <a:rPr lang="ko-KR" altLang="en-US" b="1" err="1">
                           <a:solidFill>
                             <a:srgbClr val="1A1A1A"/>
                           </a:solidFill>
+                          <a:latin typeface="Noto Sans KR"/>
+                          <a:ea typeface="Noto Sans KR"/>
+                          <a:cs typeface="Noto Sans KR"/>
                         </a:rPr>
                         <a:t>데이터명</a:t>
                       </a:r>
@@ -14658,11 +15304,19 @@
                     <a:bodyPr/>
                     <a:lstStyle/>
                     <a:p>
-                      <a:r>
-                        <a:rPr sz="1000">
+                      <a:pPr>
+                        <a:lnSpc>
+                          <a:spcPct val="115000"/>
+                        </a:lnSpc>
+                      </a:pPr>
+                      <a:r>
+                        <a:rPr sz="1000" b="0">
                           <a:solidFill>
                             <a:srgbClr val="1A1A1A"/>
                           </a:solidFill>
+                          <a:latin typeface="Noto Sans KR"/>
+                          <a:ea typeface="Noto Sans KR"/>
+                          <a:cs typeface="Noto Sans KR"/>
                         </a:rPr>
                         <a:t>국토교통부 브이월드 지도 타일 (WMTS) · Natural Earth 1:10m (퍼블릭 도메인)</a:t>
                       </a:r>
@@ -14722,7 +15376,7 @@
                   </a:ext>
                 </a:extLst>
               </a:tr>
-              <a:tr h="381000">
+              <a:tr h="580000">
                 <a:tc vMerge="1">
                   <a:txBody>
                     <a:bodyPr/>
@@ -14739,12 +15393,19 @@
                     <a:bodyPr/>
                     <a:lstStyle/>
                     <a:p>
-                      <a:pPr algn="ctr" latinLnBrk="1"/>
+                      <a:pPr algn="ctr" latinLnBrk="1">
+                        <a:lnSpc>
+                          <a:spcPct val="115000"/>
+                        </a:lnSpc>
+                      </a:pPr>
                       <a:r>
                         <a:rPr lang="ko-KR" altLang="en-US" b="1">
                           <a:solidFill>
                             <a:srgbClr val="1A1A1A"/>
                           </a:solidFill>
+                          <a:latin typeface="Noto Sans KR"/>
+                          <a:ea typeface="Noto Sans KR"/>
+                          <a:cs typeface="Noto Sans KR"/>
                         </a:rPr>
                         <a:t>상세설명</a:t>
                       </a:r>
@@ -14805,11 +15466,19 @@
                     <a:bodyPr/>
                     <a:lstStyle/>
                     <a:p>
-                      <a:r>
-                        <a:rPr sz="1000">
+                      <a:pPr>
+                        <a:lnSpc>
+                          <a:spcPct val="115000"/>
+                        </a:lnSpc>
+                      </a:pPr>
+                      <a:r>
+                        <a:rPr sz="1000" b="0">
                           <a:solidFill>
                             <a:srgbClr val="1A1A1A"/>
                           </a:solidFill>
+                          <a:latin typeface="Noto Sans KR"/>
+                          <a:ea typeface="Noto Sans KR"/>
+                          <a:cs typeface="Noto Sans KR"/>
                         </a:rPr>
                         <a:t>도면 화면의 위성·일반 배경(대조용)과 닮은 축제 지도의 해안선. 판정에는 쓰지 않습니다.</a:t>
                       </a:r>
@@ -14869,18 +15538,25 @@
                   </a:ext>
                 </a:extLst>
               </a:tr>
-              <a:tr h="381000">
+              <a:tr h="400000">
                 <a:tc rowSpan="2">
                   <a:txBody>
                     <a:bodyPr/>
                     <a:lstStyle/>
                     <a:p>
-                      <a:pPr algn="ctr" latinLnBrk="1"/>
+                      <a:pPr algn="ctr" latinLnBrk="1">
+                        <a:lnSpc>
+                          <a:spcPct val="115000"/>
+                        </a:lnSpc>
+                      </a:pPr>
                       <a:r>
                         <a:rPr lang="en-US" altLang="ko-KR" sz="3200" b="1">
                           <a:solidFill>
                             <a:srgbClr val="1A1A1A"/>
                           </a:solidFill>
+                          <a:latin typeface="Noto Sans KR"/>
+                          <a:ea typeface="Noto Sans KR"/>
+                          <a:cs typeface="Noto Sans KR"/>
                         </a:rPr>
                         <a:t>5</a:t>
                       </a:r>
@@ -14932,12 +15608,19 @@
                     <a:bodyPr/>
                     <a:lstStyle/>
                     <a:p>
-                      <a:pPr algn="ctr" latinLnBrk="1"/>
+                      <a:pPr algn="ctr" latinLnBrk="1">
+                        <a:lnSpc>
+                          <a:spcPct val="115000"/>
+                        </a:lnSpc>
+                      </a:pPr>
                       <a:r>
                         <a:rPr lang="ko-KR" altLang="en-US" b="1" err="1">
                           <a:solidFill>
                             <a:srgbClr val="1A1A1A"/>
                           </a:solidFill>
+                          <a:latin typeface="Noto Sans KR"/>
+                          <a:ea typeface="Noto Sans KR"/>
+                          <a:cs typeface="Noto Sans KR"/>
                         </a:rPr>
                         <a:t>데이터명</a:t>
                       </a:r>
@@ -15003,11 +15686,19 @@
                     <a:bodyPr/>
                     <a:lstStyle/>
                     <a:p>
-                      <a:r>
-                        <a:rPr sz="1000">
+                      <a:pPr>
+                        <a:lnSpc>
+                          <a:spcPct val="115000"/>
+                        </a:lnSpc>
+                      </a:pPr>
+                      <a:r>
+                        <a:rPr sz="1000" b="0">
                           <a:solidFill>
                             <a:srgbClr val="1A1A1A"/>
                           </a:solidFill>
+                          <a:latin typeface="Noto Sans KR"/>
+                          <a:ea typeface="Noto Sans KR"/>
+                          <a:cs typeface="Noto Sans KR"/>
                         </a:rPr>
                         <a:t>우주항공청 월력요항 (공휴일, 2018~2027)</a:t>
                       </a:r>
@@ -15067,7 +15758,7 @@
                   </a:ext>
                 </a:extLst>
               </a:tr>
-              <a:tr h="381000">
+              <a:tr h="580000">
                 <a:tc vMerge="1">
                   <a:txBody>
                     <a:bodyPr/>
@@ -15084,12 +15775,19 @@
                     <a:bodyPr/>
                     <a:lstStyle/>
                     <a:p>
-                      <a:pPr algn="ctr" latinLnBrk="1"/>
+                      <a:pPr algn="ctr" latinLnBrk="1">
+                        <a:lnSpc>
+                          <a:spcPct val="115000"/>
+                        </a:lnSpc>
+                      </a:pPr>
                       <a:r>
                         <a:rPr lang="ko-KR" altLang="en-US" b="1">
                           <a:solidFill>
                             <a:srgbClr val="1A1A1A"/>
                           </a:solidFill>
+                          <a:latin typeface="Noto Sans KR"/>
+                          <a:ea typeface="Noto Sans KR"/>
+                          <a:cs typeface="Noto Sans KR"/>
                         </a:rPr>
                         <a:t>상세설명</a:t>
                       </a:r>
@@ -15150,11 +15848,19 @@
                     <a:bodyPr/>
                     <a:lstStyle/>
                     <a:p>
-                      <a:r>
-                        <a:rPr sz="1000">
+                      <a:pPr>
+                        <a:lnSpc>
+                          <a:spcPct val="115000"/>
+                        </a:lnSpc>
+                      </a:pPr>
+                      <a:r>
+                        <a:rPr sz="1000" b="0">
                           <a:solidFill>
                             <a:srgbClr val="1A1A1A"/>
                           </a:solidFill>
+                          <a:latin typeface="Noto Sans KR"/>
+                          <a:ea typeface="Noto Sans KR"/>
+                          <a:cs typeface="Noto Sans KR"/>
                         </a:rPr>
                         <a:t>축제 신호 계산에서 설·추석 연휴를 평소 창에서 제외하고 겹치면 표시. 판정 배수에는 넣지 않습니다.</a:t>
                       </a:r>
@@ -15295,7 +16001,7 @@
                   </a:extLst>
                 </a:gridCol>
               </a:tblGrid>
-              <a:tr h="2540000">
+              <a:tr h="2420000">
                 <a:tc>
                   <a:txBody>
                     <a:bodyPr/>
@@ -15373,6 +16079,9 @@
                     <a:lstStyle/>
                     <a:p>
                       <a:pPr marL="0" lvl="0" indent="0" algn="just" rtl="0">
+                        <a:lnSpc>
+                          <a:spcPct val="115000"/>
+                        </a:lnSpc>
                         <a:spcBef>
                           <a:spcPts val="0"/>
                         </a:spcBef>
@@ -15382,13 +16091,15 @@
                         <a:buNone/>
                       </a:pPr>
                       <a:r>
-                        <a:rPr lang="en-US" altLang="ko-KR" sz="1000" b="0">
+                        <a:rPr lang="en-US" altLang="ko-KR" sz="1100" b="0">
                           <a:solidFill>
                             <a:srgbClr val="1A1A1A"/>
                           </a:solidFill>
-                          <a:latin typeface="+mn-lt"/>
-                        </a:rPr>
-                        <a:t>첫째, 발표치가 아니라 실측이 판정합니다. 자(尺)는 이 축제 자신이 지난 회차에 겪은 공사 KT 일별 실측 배수이고, 기획안의 숫자를 그 자로 세 번 잽니다. 예상 방문객 수를 새로 만들어 내지 않으므로 틀릴 수 있는 예측기가 되지 않습니다.</a:t>
+                          <a:latin typeface="Noto Sans KR"/>
+                          <a:ea typeface="Noto Sans KR"/>
+                          <a:cs typeface="Noto Sans KR"/>
+                        </a:rPr>
+                        <a:t>첫째, 발표치가 아니라 실측이 판정합니다. 이 축제가 지난 회차에 실제로 겪은 공사 KT 일별 실측 배수를 기준으로 삼아 기획안의 숫자를 세 번 잽니다. 예상 방문객 수를 새로 만들어 내지 않으므로 틀릴 수 있는 예측기가 되지 않습니다.</a:t>
                       </a:r>
                       <a:endParaRPr lang="en-US" altLang="ko-KR" sz="1800" b="0">
                         <a:solidFill>
@@ -15399,6 +16110,9 @@
                     </a:p>
                     <a:p>
                       <a:pPr marL="0" lvl="0" indent="0" algn="just" rtl="0">
+                        <a:lnSpc>
+                          <a:spcPct val="115000"/>
+                        </a:lnSpc>
                         <a:spcBef>
                           <a:spcPts val="0"/>
                         </a:spcBef>
@@ -15408,13 +16122,15 @@
                         <a:buNone/>
                       </a:pPr>
                       <a:r>
-                        <a:rPr lang="en-US" altLang="ko-KR" sz="1000" b="0">
+                        <a:rPr lang="en-US" altLang="ko-KR" sz="1100" b="0">
                           <a:solidFill>
                             <a:srgbClr val="1A1A1A"/>
                           </a:solidFill>
-                          <a:latin typeface="+mn-lt"/>
-                        </a:rPr>
-                        <a:t>둘째, 공사 데이터를 한 번 부르는 것이 아니라 전수로 적재했습니다(시군구 272개 × 최장 2,658일, 시군구마다 시작일이 달라 합계 697,403행). 데이터랩 축제 목록 619건의 배수도 같은 자료로 전부 다시 계산해, 또래 비교와 자기검증(정밀도 65.8% · 재현율 61.6% · 무작위 대비 3.26배)이 같은 정의 위에 섭니다.</a:t>
+                          <a:latin typeface="Noto Sans KR"/>
+                          <a:ea typeface="Noto Sans KR"/>
+                          <a:cs typeface="Noto Sans KR"/>
+                        </a:rPr>
+                        <a:t>둘째, 공사 데이터를 한 번 부르는 것이 아니라 전수로 적재했습니다(시군구 272개 × 최장 2,658일, 합계 697,403행). 데이터랩 축제 목록 619건의 배수도 같은 자료로 다시 계산해 또래 비교와 자기검증이 같은 정의 위에 섭니다. 닮음 판정의 자기검증은 619건 leave-one-out 으로 정밀도 65.8% · 재현율 61.6% · 무작위 대비 3.26배 입니다.</a:t>
                       </a:r>
                       <a:endParaRPr lang="en-US" altLang="ko-KR" sz="1800" b="0">
                         <a:solidFill>
@@ -15425,6 +16141,9 @@
                     </a:p>
                     <a:p>
                       <a:pPr marL="0" lvl="0" indent="0" algn="just" rtl="0">
+                        <a:lnSpc>
+                          <a:spcPct val="115000"/>
+                        </a:lnSpc>
                         <a:spcBef>
                           <a:spcPts val="0"/>
                         </a:spcBef>
@@ -15434,11 +16153,13 @@
                         <a:buNone/>
                       </a:pPr>
                       <a:r>
-                        <a:rPr lang="en-US" altLang="ko-KR" sz="1000" b="0">
+                        <a:rPr lang="en-US" altLang="ko-KR" sz="1100" b="0">
                           <a:solidFill>
                             <a:srgbClr val="1A1A1A"/>
                           </a:solidFill>
-                          <a:latin typeface="+mn-lt"/>
+                          <a:latin typeface="Noto Sans KR"/>
+                          <a:ea typeface="Noto Sans KR"/>
+                          <a:cs typeface="Noto Sans KR"/>
                         </a:rPr>
                         <a:t>셋째, 출력이 결재 문서입니다. 판정문 + 보완 문장 + 검증 보고서 A4 2장. 담당자가 예산 심의에서 "왜 이 숫자인가"에 댈 근거입니다.</a:t>
                       </a:r>
@@ -15451,6 +16172,9 @@
                     </a:p>
                     <a:p>
                       <a:pPr marL="0" lvl="0" indent="0" algn="just" rtl="0">
+                        <a:lnSpc>
+                          <a:spcPct val="115000"/>
+                        </a:lnSpc>
                         <a:spcBef>
                           <a:spcPts val="0"/>
                         </a:spcBef>
@@ -15460,13 +16184,15 @@
                         <a:buNone/>
                       </a:pPr>
                       <a:r>
-                        <a:rPr lang="en-US" altLang="ko-KR" sz="1000" b="0">
+                        <a:rPr lang="en-US" altLang="ko-KR" sz="1100" b="0">
                           <a:solidFill>
                             <a:srgbClr val="1A1A1A"/>
                           </a:solidFill>
-                          <a:latin typeface="+mn-lt"/>
-                        </a:rPr>
-                        <a:t>넷째, 화면이 자기 한계를 먼저 말합니다. 명·원 숫자는 출처 셀로만 나가고(e2e 가 셉니다), 임계값은 정한 값이라고 적으며, 내년 구간의 적중률은 −52주 근사(표본 381건, 두 해 채택 325건 중 167건(51.4%))로만 쟀다고 카드가 말합니다. 판정·시뮬에 생성형 모델을 쓰지 않아 같은 입력에 늘 같은 답입니다.</a:t>
+                          <a:latin typeface="Noto Sans KR"/>
+                          <a:ea typeface="Noto Sans KR"/>
+                          <a:cs typeface="Noto Sans KR"/>
+                        </a:rPr>
+                        <a:t>넷째, 화면이 자기 한계를 먼저 말합니다. 명·원 숫자는 출처 셀로만 나가고(e2e 가 셉니다), 임계값은 정한 값이라고 적으며, 내년 구간의 적중률은 아직 -52주 근사로만 쟀다고 카드가 말합니다(표본 381건, 두 해 채택 325건 중 167건(51.4%)). 판정·시뮬에 생성형 모델을 쓰지 않아 같은 입력에 늘 같은 답입니다.</a:t>
                       </a:r>
                       <a:endParaRPr lang="en-US" altLang="ko-KR" sz="1800" b="0">
                         <a:solidFill>
@@ -15477,6 +16203,9 @@
                     </a:p>
                     <a:p>
                       <a:pPr marL="0" lvl="0" indent="0" algn="just" rtl="0">
+                        <a:lnSpc>
+                          <a:spcPct val="115000"/>
+                        </a:lnSpc>
                         <a:spcBef>
                           <a:spcPts val="0"/>
                         </a:spcBef>
@@ -15486,23 +16215,15 @@
                         <a:buNone/>
                       </a:pPr>
                       <a:r>
-                        <a:rPr lang="en-US" altLang="ko-KR" sz="750" b="0">
+                        <a:rPr lang="en-US" altLang="ko-KR" sz="1100" b="0">
                           <a:solidFill>
                             <a:srgbClr val="1A1A1A"/>
                           </a:solidFill>
-                          <a:latin typeface="+mn-lt"/>
-                        </a:rPr>
-                        <a:t>완성 판정 화면(클릭) — 군포철쭉축제 2027 → 주의: </a:t>
-                      </a:r>
-                      <a:r>
-                        <a:rPr lang="en-US" altLang="ko-KR" sz="750" b="0">
-                          <a:solidFill>
-                            <a:srgbClr val="1A1A1A"/>
-                          </a:solidFill>
-                          <a:latin typeface="+mn-lt"/>
-                          <a:hlinkClick r:id="rId2"/>
-                        </a:rPr>
-                        <a:t>https://oneshot-mvp.vercel.app/check?name=%EA%B5%B0%ED%8F%AC%EC%B2%A0%EC%AD%89%EC%B6%95%EC%A0%9C&amp;sido=%EA%B2%BD%EA%B8%B0&amp;sigungu=%EA%B5%B0%ED%8F%AC%EC%8B%9C&amp;n=600000&amp;basis=period&amp;counting=personDays&amp;budget=100000&amp;start=2027-04-17&amp;end=2027-04-25&amp;h1s=2024-04-20&amp;h1e=2024-04-28&amp;h2s=2025-04-19&amp;h2e=2025-04-27&amp;h3s=2026-04-18&amp;h3e=2026-04-26&amp;theme=2&amp;acc=4</a:t>
+                          <a:latin typeface="Noto Sans KR"/>
+                          <a:ea typeface="Noto Sans KR"/>
+                          <a:cs typeface="Noto Sans KR"/>
+                        </a:rPr>
+                        <a:t>완성 판정 화면은 아래 링크를 누르면 업로드 없이 바로 열립니다.</a:t>
                       </a:r>
                       <a:endParaRPr lang="en-US" altLang="ko-KR" sz="1800" b="0">
                         <a:solidFill>
@@ -15513,6 +16234,9 @@
                     </a:p>
                     <a:p>
                       <a:pPr marL="0" lvl="0" indent="0" algn="just" rtl="0">
+                        <a:lnSpc>
+                          <a:spcPct val="115000"/>
+                        </a:lnSpc>
                         <a:spcBef>
                           <a:spcPts val="0"/>
                         </a:spcBef>
@@ -15522,23 +16246,48 @@
                         <a:buNone/>
                       </a:pPr>
                       <a:r>
-                        <a:rPr lang="en-US" altLang="ko-KR" sz="750" b="0">
+                        <a:rPr lang="en-US" altLang="ko-KR" sz="1100" b="0">
                           <a:solidFill>
                             <a:srgbClr val="1A1A1A"/>
                           </a:solidFill>
-                          <a:latin typeface="+mn-lt"/>
-                        </a:rPr>
-                        <a:t>화천산천어축제 2027 → 상한 초과: </a:t>
-                      </a:r>
-                      <a:r>
-                        <a:rPr lang="en-US" altLang="ko-KR" sz="750" b="0">
+                          <a:latin typeface="Noto Sans KR"/>
+                          <a:ea typeface="Noto Sans KR"/>
+                          <a:cs typeface="Noto Sans KR"/>
+                          <a:hlinkClick r:id="rId2"/>
+                        </a:rPr>
+                        <a:t>[군포철쭉축제 2027 → 주의]</a:t>
+                      </a:r>
+                      <a:endParaRPr lang="en-US" altLang="ko-KR" sz="1800" b="0">
+                        <a:solidFill>
+                          <a:srgbClr val="FF0000"/>
+                        </a:solidFill>
+                        <a:latin typeface="+mn-lt"/>
+                      </a:endParaRPr>
+                    </a:p>
+                    <a:p>
+                      <a:pPr marL="0" lvl="0" indent="0" algn="just" rtl="0">
+                        <a:lnSpc>
+                          <a:spcPct val="115000"/>
+                        </a:lnSpc>
+                        <a:spcBef>
+                          <a:spcPts val="0"/>
+                        </a:spcBef>
+                        <a:spcAft>
+                          <a:spcPts val="0"/>
+                        </a:spcAft>
+                        <a:buNone/>
+                      </a:pPr>
+                      <a:r>
+                        <a:rPr lang="en-US" altLang="ko-KR" sz="1100" b="0">
                           <a:solidFill>
                             <a:srgbClr val="1A1A1A"/>
                           </a:solidFill>
-                          <a:latin typeface="+mn-lt"/>
+                          <a:latin typeface="Noto Sans KR"/>
+                          <a:ea typeface="Noto Sans KR"/>
+                          <a:cs typeface="Noto Sans KR"/>
                           <a:hlinkClick r:id="rId3"/>
                         </a:rPr>
-                        <a:t>https://oneshot-mvp.vercel.app/check?name=%ED%99%94%EC%B2%9C%EC%82%B0%EC%B2%9C%EC%96%B4%EC%B6%95%EC%A0%9C&amp;sido=%EA%B0%95%EC%9B%90&amp;sigungu=%ED%99%94%EC%B2%9C%EA%B5%B0&amp;n=1860000&amp;basis=period&amp;counting=personDays&amp;pop=2.3&amp;start=2027-01-09&amp;end=2027-01-31&amp;h1s=2024-01-06&amp;h1e=2024-01-28&amp;h2s=2025-01-11&amp;h2e=2025-02-02&amp;h3s=2026-01-10&amp;h3e=2026-02-01</a:t>
+                        <a:t>[화천산천어축제 2027 → 상한 초과]</a:t>
                       </a:r>
                       <a:endParaRPr lang="en-US" altLang="ko-KR" sz="1800" b="0">
                         <a:solidFill>
@@ -15602,7 +16351,7 @@
                   </a:ext>
                 </a:extLst>
               </a:tr>
-              <a:tr h="2530000">
+              <a:tr h="2650000">
                 <a:tc>
                   <a:txBody>
                     <a:bodyPr/>
@@ -15676,7 +16425,7 @@
                     <a:p>
                       <a:pPr marL="0" marR="0" lvl="0" indent="0" algn="just" defTabSz="914400" rtl="0" eaLnBrk="1" fontAlgn="auto" latinLnBrk="1" hangingPunct="1">
                         <a:lnSpc>
-                          <a:spcPct val="100000"/>
+                          <a:spcPct val="115000"/>
                         </a:lnSpc>
                         <a:spcBef>
                           <a:spcPts val="0"/>
@@ -15692,19 +16441,21 @@
                         <a:defRPr/>
                       </a:pPr>
                       <a:r>
-                        <a:rPr lang="en-US" altLang="ko-KR" sz="1000">
+                        <a:rPr lang="en-US" altLang="ko-KR" sz="1100">
                           <a:solidFill>
                             <a:srgbClr val="1A1A1A"/>
                           </a:solidFill>
-                          <a:latin typeface="+mn-lt"/>
-                        </a:rPr>
-                        <a:t>1) 공사 소비·내비게이션 검색·SNS 지수(AreaTarResDemService) 연동 — 활용신청 진행 중. 예산 항목별(먹거리·주차·홍보) 근거를 같은 판정문 안에 늘립니다.</a:t>
+                          <a:latin typeface="Noto Sans KR"/>
+                          <a:ea typeface="Noto Sans KR"/>
+                          <a:cs typeface="Noto Sans KR"/>
+                        </a:rPr>
+                        <a:t>1) (승인 직후) 공사 소비·내비게이션 검색·SNS 지수(AreaTarResDemService) 연동 - 활용신청 진행 중. 예산 항목별(먹거리·주차·홍보) 근거를 같은 판정문 안에 늘립니다.</a:t>
                       </a:r>
                     </a:p>
                     <a:p>
                       <a:pPr marL="0" marR="0" lvl="0" indent="0" algn="just" defTabSz="914400" rtl="0" eaLnBrk="1" fontAlgn="auto" latinLnBrk="1" hangingPunct="1">
                         <a:lnSpc>
-                          <a:spcPct val="100000"/>
+                          <a:spcPct val="115000"/>
                         </a:lnSpc>
                         <a:spcBef>
                           <a:spcPts val="0"/>
@@ -15720,19 +16471,21 @@
                         <a:defRPr/>
                       </a:pPr>
                       <a:r>
-                        <a:rPr lang="en-US" altLang="ko-KR" sz="1000">
+                        <a:rPr lang="en-US" altLang="ko-KR" sz="1100">
                           <a:solidFill>
                             <a:srgbClr val="1A1A1A"/>
                           </a:solidFill>
-                          <a:latin typeface="+mn-lt"/>
-                        </a:rPr>
-                        <a:t>2) 다년 기간 수집 — 문화체육관광부 지역축제 파일의 회차별 기간을 모아 −52주 근사가 아니라 실제 다년 표본으로 내년 구간의 적중률을 다시 재고, 임계값도 군포 한 건이 아니라 다도시로 다시 맞춥니다.</a:t>
+                          <a:latin typeface="Noto Sans KR"/>
+                          <a:ea typeface="Noto Sans KR"/>
+                          <a:cs typeface="Noto Sans KR"/>
+                        </a:rPr>
+                        <a:t>2) (3개월) 다년 기간 수집 - 문화체육관광부 지역축제 파일의 회차별 기간을 모아 -52주 근사가 아니라 실제 다년 표본으로 내년 구간의 적중률을 다시 재고, 임계값도 군포 한 건이 아니라 다도시로 다시 맞춥니다.</a:t>
                       </a:r>
                     </a:p>
                     <a:p>
                       <a:pPr marL="0" marR="0" lvl="0" indent="0" algn="just" defTabSz="914400" rtl="0" eaLnBrk="1" fontAlgn="auto" latinLnBrk="1" hangingPunct="1">
                         <a:lnSpc>
-                          <a:spcPct val="100000"/>
+                          <a:spcPct val="115000"/>
                         </a:lnSpc>
                         <a:spcBef>
                           <a:spcPts val="0"/>
@@ -15748,19 +16501,21 @@
                         <a:defRPr/>
                       </a:pPr>
                       <a:r>
-                        <a:rPr lang="en-US" altLang="ko-KR" sz="1000">
+                        <a:rPr lang="en-US" altLang="ko-KR" sz="1100">
                           <a:solidFill>
                             <a:srgbClr val="1A1A1A"/>
                           </a:solidFill>
-                          <a:latin typeface="+mn-lt"/>
-                        </a:rPr>
-                        <a:t>3) 사후 평가 루프 — 개최 뒤 실측이 데이터랩에 쌓이면 기획안 대비 실적을 같은 자로 다시 재고 다음 기획안 판정에 넘깁니다. 담당자 업무가 결과보고서 → 내년 기획안으로 이어지는 흐름 그대로입니다.</a:t>
+                          <a:latin typeface="Noto Sans KR"/>
+                          <a:ea typeface="Noto Sans KR"/>
+                          <a:cs typeface="Noto Sans KR"/>
+                        </a:rPr>
+                        <a:t>3) (다음 개최 뒤) 사후 평가 루프 - 개최 뒤 실측이 데이터랩에 쌓이면 기획안 대비 실적을 같은 자로 다시 재고 다음 기획안 판정에 넘깁니다. 담당자 업무가 결과보고서 → 내년 기획안으로 이어지는 흐름 그대로입니다.</a:t>
                       </a:r>
                     </a:p>
                     <a:p>
                       <a:pPr marL="0" marR="0" lvl="0" indent="0" algn="just" defTabSz="914400" rtl="0" eaLnBrk="1" fontAlgn="auto" latinLnBrk="1" hangingPunct="1">
                         <a:lnSpc>
-                          <a:spcPct val="100000"/>
+                          <a:spcPct val="115000"/>
                         </a:lnSpc>
                         <a:spcBef>
                           <a:spcPts val="0"/>
@@ -15776,19 +16531,21 @@
                         <a:defRPr/>
                       </a:pPr>
                       <a:r>
-                        <a:rPr lang="en-US" altLang="ko-KR" sz="1000">
+                        <a:rPr lang="en-US" altLang="ko-KR" sz="1100">
                           <a:solidFill>
                             <a:srgbClr val="1A1A1A"/>
                           </a:solidFill>
-                          <a:latin typeface="+mn-lt"/>
-                        </a:rPr>
-                        <a:t>4) 안전관리계획 서식 연동 — 행정안전부 「지역축제장 안전관리 매뉴얼」의 "최대 수용인원"·"관람객 동선" 칸에 판정표와 도면 시뮬레이션 결과를 그대로 붙여, 매뉴얼에 없는 통로 폭·밀집도 산출 근거의 빈칸을 채웁니다.</a:t>
+                          <a:latin typeface="Noto Sans KR"/>
+                          <a:ea typeface="Noto Sans KR"/>
+                          <a:cs typeface="Noto Sans KR"/>
+                        </a:rPr>
+                        <a:t>4) (3개월~1년) 현장 서식과 도면으로 - 행정안전부 「지역축제장 안전관리 매뉴얼」의 "최대 수용인원"·"관람객 동선" 칸에 판정표와 시뮬 결과를 그대로 붙이고, 실물 배치도로 정확도를 잰 뒤 배치도 자동 인식을 붙이며, 다음 회차 기획 주기에 맞춰 1개 지자체 파일럿을 목표로 합니다.</a:t>
                       </a:r>
                     </a:p>
                     <a:p>
                       <a:pPr marL="0" marR="0" lvl="0" indent="0" algn="just" defTabSz="914400" rtl="0" eaLnBrk="1" fontAlgn="auto" latinLnBrk="1" hangingPunct="1">
                         <a:lnSpc>
-                          <a:spcPct val="100000"/>
+                          <a:spcPct val="115000"/>
                         </a:lnSpc>
                         <a:spcBef>
                           <a:spcPts val="0"/>
@@ -15804,69 +16561,15 @@
                         <a:defRPr/>
                       </a:pPr>
                       <a:r>
-                        <a:rPr lang="en-US" altLang="ko-KR" sz="1000">
+                        <a:rPr lang="en-US" altLang="ko-KR" sz="1100">
                           <a:solidFill>
                             <a:srgbClr val="1A1A1A"/>
                           </a:solidFill>
-                          <a:latin typeface="+mn-lt"/>
-                        </a:rPr>
-                        <a:t>5) 배치도 자동 인식 — 지금은 배치도를 밑그림으로 깔고 따라 그립니다. 실물 배치도로 정확도를 잰 뒤 모델 초안 생성을 붙입니다.</a:t>
-                      </a:r>
-                    </a:p>
-                    <a:p>
-                      <a:pPr marL="0" marR="0" lvl="0" indent="0" algn="just" defTabSz="914400" rtl="0" eaLnBrk="1" fontAlgn="auto" latinLnBrk="1" hangingPunct="1">
-                        <a:lnSpc>
-                          <a:spcPct val="100000"/>
-                        </a:lnSpc>
-                        <a:spcBef>
-                          <a:spcPts val="0"/>
-                        </a:spcBef>
-                        <a:spcAft>
-                          <a:spcPts val="0"/>
-                        </a:spcAft>
-                        <a:buClrTx/>
-                        <a:buSzTx/>
-                        <a:buFontTx/>
-                        <a:buNone/>
-                        <a:tabLst/>
-                        <a:defRPr/>
-                      </a:pPr>
-                      <a:r>
-                        <a:rPr lang="en-US" altLang="ko-KR" sz="1000">
-                          <a:solidFill>
-                            <a:srgbClr val="1A1A1A"/>
-                          </a:solidFill>
-                          <a:latin typeface="+mn-lt"/>
-                        </a:rPr>
-                        <a:t>6) 지자체 실무 채널 — 축제 담당 부서와 접촉해 추진결과 보고·차년도 기본계획의 실물 서식과 결재 리드타임(개최 약 7개월 전)을 확인했습니다. 비공개 자료라 수치·원문은 인용하지 않고, 공개 출처로 재확인된 값만 화면에 씁니다(접촉 기록은 저장소 docs/interviews.md). 다음 회차 기획 주기에 맞춰 1개 지자체 파일럿을 목표로 합니다.</a:t>
-                      </a:r>
-                    </a:p>
-                    <a:p>
-                      <a:pPr marL="0" marR="0" lvl="0" indent="0" algn="just" defTabSz="914400" rtl="0" eaLnBrk="1" fontAlgn="auto" latinLnBrk="1" hangingPunct="1">
-                        <a:lnSpc>
-                          <a:spcPct val="100000"/>
-                        </a:lnSpc>
-                        <a:spcBef>
-                          <a:spcPts val="0"/>
-                        </a:spcBef>
-                        <a:spcAft>
-                          <a:spcPts val="0"/>
-                        </a:spcAft>
-                        <a:buClrTx/>
-                        <a:buSzTx/>
-                        <a:buFontTx/>
-                        <a:buNone/>
-                        <a:tabLst/>
-                        <a:defRPr/>
-                      </a:pPr>
-                      <a:r>
-                        <a:rPr lang="en-US" altLang="ko-KR" sz="1000">
-                          <a:solidFill>
-                            <a:srgbClr val="1A1A1A"/>
-                          </a:solidFill>
-                          <a:latin typeface="+mn-lt"/>
-                        </a:rPr>
-                        <a:t>운영: 정적 사이트 + 서버리스(Vercel)라 고정비가 없고, 공사 데이터는 월 1회 프리페치(개발계정 1,000회/일 안)로 갱신합니다. 운영계정 전환 시 실시간 호출 한도 문제도 사라집니다.</a:t>
+                          <a:latin typeface="Noto Sans KR"/>
+                          <a:ea typeface="Noto Sans KR"/>
+                          <a:cs typeface="Noto Sans KR"/>
+                        </a:rPr>
+                        <a:t>운영은 정적 사이트 + 서버리스(Vercel)라 고정비가 없고, 공사 데이터는 월 1회 프리페치(개발계정 1,000회/일 안)로 갱신합니다.</a:t>
                       </a:r>
                     </a:p>
                   </a:txBody>
